--- a/PS6TakingPartFitnessTestingSlides.pptx
+++ b/PS6TakingPartFitnessTestingSlides.pptx
@@ -15,9 +15,12 @@
     <p:sldId id="263" r:id="rId9"/>
     <p:sldId id="264" r:id="rId10"/>
     <p:sldId id="265" r:id="rId11"/>
+    <p:sldId id="266" r:id="rId12"/>
+    <p:sldId id="267" r:id="rId13"/>
+    <p:sldId id="268" r:id="rId14"/>
   </p:sldIdLst>
   <p:notesMasterIdLst>
-    <p:notesMasterId r:id="rId12"/>
+    <p:notesMasterId r:id="rId15"/>
   </p:notesMasterIdLst>
   <p:sldSz cx="12192000" cy="6858000"/>
   <p:notesSz cx="6858000" cy="12192000"/>
@@ -623,6 +626,270 @@
             <a:fld id="{F7021451-1387-4CA6-816F-3879F97B5CBC}" type="slidenum">
               <a:rPr lang="en-US"/>
               <a:t>10</a:t>
+            </a:fld>
+            <a:endParaRPr lang="en-US"/>
+          </a:p>
+        </p:txBody>
+      </p:sp>
+    </p:spTree>
+    <p:extLst>
+      <p:ext uri="{BB962C8B-B14F-4D97-AF65-F5344CB8AC3E}">
+        <p14:creationId xmlns:p14="http://schemas.microsoft.com/office/powerpoint/2010/main" val="1024086991"/>
+      </p:ext>
+    </p:extLst>
+  </p:cSld>
+  <p:clrMapOvr>
+    <a:masterClrMapping/>
+  </p:clrMapOvr>
+</p:notes>
+</file>
+
+<file path=ppt/notesSlides/notesSlide11.xml><?xml version="1.0" encoding="utf-8"?>
+<p:notes xmlns:a="http://schemas.openxmlformats.org/drawingml/2006/main" xmlns:r="http://schemas.openxmlformats.org/officeDocument/2006/relationships" xmlns:p="http://schemas.openxmlformats.org/presentationml/2006/main">
+  <p:cSld>
+    <p:spTree>
+      <p:nvGrpSpPr>
+        <p:cNvPr id="1" name=""/>
+        <p:cNvGrpSpPr/>
+        <p:nvPr/>
+      </p:nvGrpSpPr>
+      <p:grpSpPr>
+        <a:xfrm>
+          <a:off x="0" y="0"/>
+          <a:ext cx="0" cy="0"/>
+          <a:chOff x="0" y="0"/>
+          <a:chExt cx="0" cy="0"/>
+        </a:xfrm>
+      </p:grpSpPr>
+      <p:sp>
+        <p:nvSpPr>
+          <p:cNvPr id="2" name="Slide Image Placeholder 1"/>
+          <p:cNvSpPr>
+            <a:spLocks noGrp="1" noRot="1" noChangeAspect="1"/>
+          </p:cNvSpPr>
+          <p:nvPr>
+            <p:ph type="sldImg"/>
+          </p:nvPr>
+        </p:nvSpPr>
+        <p:spPr/>
+      </p:sp>
+      <p:sp>
+        <p:nvSpPr>
+          <p:cNvPr id="3" name="Notes Placeholder 2"/>
+          <p:cNvSpPr>
+            <a:spLocks noGrp="1"/>
+          </p:cNvSpPr>
+          <p:nvPr>
+            <p:ph type="body" idx="1"/>
+          </p:nvPr>
+        </p:nvSpPr>
+        <p:spPr/>
+        <p:txBody>
+          <a:bodyPr/>
+          <a:lstStyle/>
+          <a:p>
+            <a:r>
+              <a:rPr lang="en-US" dirty="0"/>
+              <a:t/>
+            </a:r>
+            <a:endParaRPr lang="en-US" dirty="0"/>
+          </a:p>
+        </p:txBody>
+      </p:sp>
+      <p:sp>
+        <p:nvSpPr>
+          <p:cNvPr id="4" name="Slide Number Placeholder 3"/>
+          <p:cNvSpPr>
+            <a:spLocks noGrp="1"/>
+          </p:cNvSpPr>
+          <p:nvPr>
+            <p:ph type="sldNum" sz="quarter" idx="10"/>
+          </p:nvPr>
+        </p:nvSpPr>
+        <p:spPr/>
+        <p:txBody>
+          <a:bodyPr/>
+          <a:lstStyle/>
+          <a:p>
+            <a:fld id="{F7021451-1387-4CA6-816F-3879F97B5CBC}" type="slidenum">
+              <a:rPr lang="en-US"/>
+              <a:t>11</a:t>
+            </a:fld>
+            <a:endParaRPr lang="en-US"/>
+          </a:p>
+        </p:txBody>
+      </p:sp>
+    </p:spTree>
+    <p:extLst>
+      <p:ext uri="{BB962C8B-B14F-4D97-AF65-F5344CB8AC3E}">
+        <p14:creationId xmlns:p14="http://schemas.microsoft.com/office/powerpoint/2010/main" val="1024086991"/>
+      </p:ext>
+    </p:extLst>
+  </p:cSld>
+  <p:clrMapOvr>
+    <a:masterClrMapping/>
+  </p:clrMapOvr>
+</p:notes>
+</file>
+
+<file path=ppt/notesSlides/notesSlide12.xml><?xml version="1.0" encoding="utf-8"?>
+<p:notes xmlns:a="http://schemas.openxmlformats.org/drawingml/2006/main" xmlns:r="http://schemas.openxmlformats.org/officeDocument/2006/relationships" xmlns:p="http://schemas.openxmlformats.org/presentationml/2006/main">
+  <p:cSld>
+    <p:spTree>
+      <p:nvGrpSpPr>
+        <p:cNvPr id="1" name=""/>
+        <p:cNvGrpSpPr/>
+        <p:nvPr/>
+      </p:nvGrpSpPr>
+      <p:grpSpPr>
+        <a:xfrm>
+          <a:off x="0" y="0"/>
+          <a:ext cx="0" cy="0"/>
+          <a:chOff x="0" y="0"/>
+          <a:chExt cx="0" cy="0"/>
+        </a:xfrm>
+      </p:grpSpPr>
+      <p:sp>
+        <p:nvSpPr>
+          <p:cNvPr id="2" name="Slide Image Placeholder 1"/>
+          <p:cNvSpPr>
+            <a:spLocks noGrp="1" noRot="1" noChangeAspect="1"/>
+          </p:cNvSpPr>
+          <p:nvPr>
+            <p:ph type="sldImg"/>
+          </p:nvPr>
+        </p:nvSpPr>
+        <p:spPr/>
+      </p:sp>
+      <p:sp>
+        <p:nvSpPr>
+          <p:cNvPr id="3" name="Notes Placeholder 2"/>
+          <p:cNvSpPr>
+            <a:spLocks noGrp="1"/>
+          </p:cNvSpPr>
+          <p:nvPr>
+            <p:ph type="body" idx="1"/>
+          </p:nvPr>
+        </p:nvSpPr>
+        <p:spPr/>
+        <p:txBody>
+          <a:bodyPr/>
+          <a:lstStyle/>
+          <a:p>
+            <a:r>
+              <a:rPr lang="en-US" dirty="0"/>
+              <a:t/>
+            </a:r>
+            <a:endParaRPr lang="en-US" dirty="0"/>
+          </a:p>
+        </p:txBody>
+      </p:sp>
+      <p:sp>
+        <p:nvSpPr>
+          <p:cNvPr id="4" name="Slide Number Placeholder 3"/>
+          <p:cNvSpPr>
+            <a:spLocks noGrp="1"/>
+          </p:cNvSpPr>
+          <p:nvPr>
+            <p:ph type="sldNum" sz="quarter" idx="10"/>
+          </p:nvPr>
+        </p:nvSpPr>
+        <p:spPr/>
+        <p:txBody>
+          <a:bodyPr/>
+          <a:lstStyle/>
+          <a:p>
+            <a:fld id="{F7021451-1387-4CA6-816F-3879F97B5CBC}" type="slidenum">
+              <a:rPr lang="en-US"/>
+              <a:t>12</a:t>
+            </a:fld>
+            <a:endParaRPr lang="en-US"/>
+          </a:p>
+        </p:txBody>
+      </p:sp>
+    </p:spTree>
+    <p:extLst>
+      <p:ext uri="{BB962C8B-B14F-4D97-AF65-F5344CB8AC3E}">
+        <p14:creationId xmlns:p14="http://schemas.microsoft.com/office/powerpoint/2010/main" val="1024086991"/>
+      </p:ext>
+    </p:extLst>
+  </p:cSld>
+  <p:clrMapOvr>
+    <a:masterClrMapping/>
+  </p:clrMapOvr>
+</p:notes>
+</file>
+
+<file path=ppt/notesSlides/notesSlide13.xml><?xml version="1.0" encoding="utf-8"?>
+<p:notes xmlns:a="http://schemas.openxmlformats.org/drawingml/2006/main" xmlns:r="http://schemas.openxmlformats.org/officeDocument/2006/relationships" xmlns:p="http://schemas.openxmlformats.org/presentationml/2006/main">
+  <p:cSld>
+    <p:spTree>
+      <p:nvGrpSpPr>
+        <p:cNvPr id="1" name=""/>
+        <p:cNvGrpSpPr/>
+        <p:nvPr/>
+      </p:nvGrpSpPr>
+      <p:grpSpPr>
+        <a:xfrm>
+          <a:off x="0" y="0"/>
+          <a:ext cx="0" cy="0"/>
+          <a:chOff x="0" y="0"/>
+          <a:chExt cx="0" cy="0"/>
+        </a:xfrm>
+      </p:grpSpPr>
+      <p:sp>
+        <p:nvSpPr>
+          <p:cNvPr id="2" name="Slide Image Placeholder 1"/>
+          <p:cNvSpPr>
+            <a:spLocks noGrp="1" noRot="1" noChangeAspect="1"/>
+          </p:cNvSpPr>
+          <p:nvPr>
+            <p:ph type="sldImg"/>
+          </p:nvPr>
+        </p:nvSpPr>
+        <p:spPr/>
+      </p:sp>
+      <p:sp>
+        <p:nvSpPr>
+          <p:cNvPr id="3" name="Notes Placeholder 2"/>
+          <p:cNvSpPr>
+            <a:spLocks noGrp="1"/>
+          </p:cNvSpPr>
+          <p:nvPr>
+            <p:ph type="body" idx="1"/>
+          </p:nvPr>
+        </p:nvSpPr>
+        <p:spPr/>
+        <p:txBody>
+          <a:bodyPr/>
+          <a:lstStyle/>
+          <a:p>
+            <a:r>
+              <a:rPr lang="en-US" dirty="0"/>
+              <a:t/>
+            </a:r>
+            <a:endParaRPr lang="en-US" dirty="0"/>
+          </a:p>
+        </p:txBody>
+      </p:sp>
+      <p:sp>
+        <p:nvSpPr>
+          <p:cNvPr id="4" name="Slide Number Placeholder 3"/>
+          <p:cNvSpPr>
+            <a:spLocks noGrp="1"/>
+          </p:cNvSpPr>
+          <p:nvPr>
+            <p:ph type="sldNum" sz="quarter" idx="10"/>
+          </p:nvPr>
+        </p:nvSpPr>
+        <p:spPr/>
+        <p:txBody>
+          <a:bodyPr/>
+          <a:lstStyle/>
+          <a:p>
+            <a:fld id="{F7021451-1387-4CA6-816F-3879F97B5CBC}" type="slidenum">
+              <a:rPr lang="en-US"/>
+              <a:t>13</a:t>
             </a:fld>
             <a:endParaRPr lang="en-US"/>
           </a:p>
@@ -1838,7 +2105,7 @@
         </p:nvSpPr>
         <p:spPr>
           <a:xfrm>
-            <a:off x="548640" y="4069080"/>
+            <a:off x="548640" y="4160520"/>
             <a:ext cx="5486400" cy="365760"/>
           </a:xfrm>
           <a:prstGeom prst="rect">
@@ -1877,7 +2144,7 @@
         </p:nvSpPr>
         <p:spPr>
           <a:xfrm>
-            <a:off x="548640" y="4754880"/>
+            <a:off x="548640" y="4846320"/>
             <a:ext cx="5349240" cy="1463040"/>
           </a:xfrm>
           <a:prstGeom prst="roundRect">
@@ -1899,7 +2166,7 @@
         </p:nvSpPr>
         <p:spPr>
           <a:xfrm>
-            <a:off x="822960" y="4892040"/>
+            <a:off x="822960" y="4983480"/>
             <a:ext cx="4800600" cy="320040"/>
           </a:xfrm>
           <a:prstGeom prst="rect">
@@ -1938,7 +2205,7 @@
         </p:nvSpPr>
         <p:spPr>
           <a:xfrm>
-            <a:off x="822960" y="5212080"/>
+            <a:off x="822960" y="5303520"/>
             <a:ext cx="4800600" cy="914400"/>
           </a:xfrm>
           <a:prstGeom prst="rect">
@@ -1977,7 +2244,7 @@
         </p:nvSpPr>
         <p:spPr>
           <a:xfrm>
-            <a:off x="6217920" y="4754880"/>
+            <a:off x="6217920" y="4846320"/>
             <a:ext cx="5349240" cy="1463040"/>
           </a:xfrm>
           <a:prstGeom prst="roundRect">
@@ -1999,7 +2266,7 @@
         </p:nvSpPr>
         <p:spPr>
           <a:xfrm>
-            <a:off x="6492240" y="4892040"/>
+            <a:off x="6492240" y="4983480"/>
             <a:ext cx="4800600" cy="320040"/>
           </a:xfrm>
           <a:prstGeom prst="rect">
@@ -2038,7 +2305,7 @@
         </p:nvSpPr>
         <p:spPr>
           <a:xfrm>
-            <a:off x="6492240" y="5212080"/>
+            <a:off x="6492240" y="5303520"/>
             <a:ext cx="4800600" cy="914400"/>
           </a:xfrm>
           <a:prstGeom prst="rect">
@@ -2080,6 +2347,2694 @@
 <file path=ppt/slides/slide10.xml><?xml version="1.0" encoding="utf-8"?>
 <p:sld xmlns:a="http://schemas.openxmlformats.org/drawingml/2006/main" xmlns:r="http://schemas.openxmlformats.org/officeDocument/2006/relationships" xmlns:p="http://schemas.openxmlformats.org/presentationml/2006/main">
   <p:cSld name="Slide 10">
+    <p:spTree>
+      <p:nvGrpSpPr>
+        <p:cNvPr id="1" name=""/>
+        <p:cNvGrpSpPr/>
+        <p:nvPr/>
+      </p:nvGrpSpPr>
+      <p:grpSpPr>
+        <a:xfrm>
+          <a:off x="0" y="0"/>
+          <a:ext cx="0" cy="0"/>
+          <a:chOff x="0" y="0"/>
+          <a:chExt cx="0" cy="0"/>
+        </a:xfrm>
+      </p:grpSpPr>
+      <p:pic>
+        <p:nvPicPr>
+          <p:cNvPr id="2" name="Image 0" descr="preencoded.png">    </p:cNvPr>
+          <p:cNvPicPr>
+            <a:picLocks noChangeAspect="1"/>
+          </p:cNvPicPr>
+          <p:nvPr/>
+        </p:nvPicPr>
+        <p:blipFill>
+          <a:blip r:embed="rId1"/>
+          <a:stretch>
+            <a:fillRect/>
+          </a:stretch>
+        </p:blipFill>
+        <p:spPr>
+          <a:xfrm>
+            <a:off x="11109960" y="228600"/>
+            <a:ext cx="777240" cy="548640"/>
+          </a:xfrm>
+          <a:prstGeom prst="rect">
+            <a:avLst/>
+          </a:prstGeom>
+        </p:spPr>
+      </p:pic>
+      <p:sp>
+        <p:nvSpPr>
+          <p:cNvPr id="3" name="Shape 0"/>
+          <p:cNvSpPr/>
+          <p:nvPr/>
+        </p:nvSpPr>
+        <p:spPr>
+          <a:xfrm>
+            <a:off x="9418320" y="274320"/>
+            <a:ext cx="2423160" cy="384048"/>
+          </a:xfrm>
+          <a:prstGeom prst="roundRect">
+            <a:avLst>
+              <a:gd name="adj" fmla="val 19048"/>
+            </a:avLst>
+          </a:prstGeom>
+          <a:solidFill>
+            <a:srgbClr val="C8A951"/>
+          </a:solidFill>
+          <a:ln/>
+        </p:spPr>
+      </p:sp>
+      <p:sp>
+        <p:nvSpPr>
+          <p:cNvPr id="4" name="Text 1"/>
+          <p:cNvSpPr/>
+          <p:nvPr/>
+        </p:nvSpPr>
+        <p:spPr>
+          <a:xfrm>
+            <a:off x="9418320" y="274320"/>
+            <a:ext cx="2423160" cy="384048"/>
+          </a:xfrm>
+          <a:prstGeom prst="rect">
+            <a:avLst/>
+          </a:prstGeom>
+          <a:noFill/>
+          <a:ln/>
+        </p:spPr>
+        <p:txBody>
+          <a:bodyPr wrap="square" lIns="0" tIns="0" rIns="0" bIns="0" rtlCol="0" anchor="ctr"/>
+          <a:lstStyle/>
+          <a:p>
+            <a:pPr algn="ctr" indent="0" marL="0">
+              <a:buNone/>
+            </a:pPr>
+            <a:r>
+              <a:rPr lang="en-US" sz="1200" b="1" dirty="0">
+                <a:solidFill>
+                  <a:srgbClr val="122952"/>
+                </a:solidFill>
+                <a:latin typeface="Calibri" pitchFamily="34" charset="0"/>
+                <a:ea typeface="Calibri" pitchFamily="34" charset="-122"/>
+                <a:cs typeface="Calibri" pitchFamily="34" charset="-120"/>
+              </a:rPr>
+              <a:t>B.P2/3 · B.M2/3 · B.D2/3</a:t>
+            </a:r>
+            <a:endParaRPr lang="en-US" sz="1200" dirty="0"/>
+          </a:p>
+        </p:txBody>
+      </p:sp>
+      <p:sp>
+        <p:nvSpPr>
+          <p:cNvPr id="5" name="Text 2"/>
+          <p:cNvSpPr/>
+          <p:nvPr/>
+        </p:nvSpPr>
+        <p:spPr>
+          <a:xfrm>
+            <a:off x="548640" y="320040"/>
+            <a:ext cx="8869680" cy="640080"/>
+          </a:xfrm>
+          <a:prstGeom prst="rect">
+            <a:avLst/>
+          </a:prstGeom>
+          <a:noFill/>
+          <a:ln/>
+        </p:spPr>
+        <p:txBody>
+          <a:bodyPr wrap="square" rtlCol="0" anchor="ctr"/>
+          <a:lstStyle/>
+          <a:p>
+            <a:pPr indent="0" marL="0">
+              <a:buNone/>
+            </a:pPr>
+            <a:r>
+              <a:rPr lang="en-US" sz="2500" b="1" dirty="0">
+                <a:solidFill>
+                  <a:srgbClr val="122952"/>
+                </a:solidFill>
+                <a:latin typeface="Calibri" pitchFamily="34" charset="0"/>
+                <a:ea typeface="Calibri" pitchFamily="34" charset="-122"/>
+                <a:cs typeface="Calibri" pitchFamily="34" charset="-120"/>
+              </a:rPr>
+              <a:t>Recording and Reviewing Your Results</a:t>
+            </a:r>
+            <a:endParaRPr lang="en-US" sz="2500" dirty="0"/>
+          </a:p>
+        </p:txBody>
+      </p:sp>
+      <p:sp>
+        <p:nvSpPr>
+          <p:cNvPr id="6" name="Text 3"/>
+          <p:cNvSpPr/>
+          <p:nvPr/>
+        </p:nvSpPr>
+        <p:spPr>
+          <a:xfrm>
+            <a:off x="548640" y="1097280"/>
+            <a:ext cx="5303520" cy="365760"/>
+          </a:xfrm>
+          <a:prstGeom prst="rect">
+            <a:avLst/>
+          </a:prstGeom>
+          <a:noFill/>
+          <a:ln/>
+        </p:spPr>
+        <p:txBody>
+          <a:bodyPr wrap="square" rtlCol="0" anchor="ctr"/>
+          <a:lstStyle/>
+          <a:p>
+            <a:pPr indent="0" marL="0">
+              <a:buNone/>
+            </a:pPr>
+            <a:r>
+              <a:rPr lang="en-US" sz="1600" b="1" dirty="0">
+                <a:solidFill>
+                  <a:srgbClr val="122952"/>
+                </a:solidFill>
+                <a:latin typeface="Calibri" pitchFamily="34" charset="0"/>
+                <a:ea typeface="Calibri" pitchFamily="34" charset="-122"/>
+                <a:cs typeface="Calibri" pitchFamily="34" charset="-120"/>
+              </a:rPr>
+              <a:t>Recording results well means:</a:t>
+            </a:r>
+            <a:endParaRPr lang="en-US" sz="1600" dirty="0"/>
+          </a:p>
+        </p:txBody>
+      </p:sp>
+      <p:sp>
+        <p:nvSpPr>
+          <p:cNvPr id="7" name="Text 4"/>
+          <p:cNvSpPr/>
+          <p:nvPr/>
+        </p:nvSpPr>
+        <p:spPr>
+          <a:xfrm>
+            <a:off x="548640" y="1554480"/>
+            <a:ext cx="5303520" cy="457200"/>
+          </a:xfrm>
+          <a:prstGeom prst="rect">
+            <a:avLst/>
+          </a:prstGeom>
+          <a:noFill/>
+          <a:ln/>
+        </p:spPr>
+        <p:txBody>
+          <a:bodyPr wrap="square" rtlCol="0" anchor="ctr"/>
+          <a:lstStyle/>
+          <a:p>
+            <a:pPr marL="342900" indent="-342900">
+              <a:buSzPct val="100000"/>
+              <a:buChar char="▪"/>
+            </a:pPr>
+            <a:r>
+              <a:rPr lang="en-US" sz="1300" dirty="0">
+                <a:solidFill>
+                  <a:srgbClr val="2A2A2A"/>
+                </a:solidFill>
+                <a:latin typeface="Calibri" pitchFamily="34" charset="0"/>
+                <a:ea typeface="Calibri" pitchFamily="34" charset="-122"/>
+                <a:cs typeface="Calibri" pitchFamily="34" charset="-120"/>
+              </a:rPr>
+              <a:t>Correct terminology</a:t>
+            </a:r>
+            <a:endParaRPr lang="en-US" sz="1300" dirty="0"/>
+          </a:p>
+        </p:txBody>
+      </p:sp>
+      <p:sp>
+        <p:nvSpPr>
+          <p:cNvPr id="8" name="Text 5"/>
+          <p:cNvSpPr/>
+          <p:nvPr/>
+        </p:nvSpPr>
+        <p:spPr>
+          <a:xfrm>
+            <a:off x="548640" y="2057400"/>
+            <a:ext cx="5303520" cy="457200"/>
+          </a:xfrm>
+          <a:prstGeom prst="rect">
+            <a:avLst/>
+          </a:prstGeom>
+          <a:noFill/>
+          <a:ln/>
+        </p:spPr>
+        <p:txBody>
+          <a:bodyPr wrap="square" rtlCol="0" anchor="ctr"/>
+          <a:lstStyle/>
+          <a:p>
+            <a:pPr marL="342900" indent="-342900">
+              <a:buSzPct val="100000"/>
+              <a:buChar char="▪"/>
+            </a:pPr>
+            <a:r>
+              <a:rPr lang="en-US" sz="1300" dirty="0">
+                <a:solidFill>
+                  <a:srgbClr val="2A2A2A"/>
+                </a:solidFill>
+                <a:latin typeface="Calibri" pitchFamily="34" charset="0"/>
+                <a:ea typeface="Calibri" pitchFamily="34" charset="-122"/>
+                <a:cs typeface="Calibri" pitchFamily="34" charset="-120"/>
+              </a:rPr>
+              <a:t>Correct units (secs, m, kg, mmHg)</a:t>
+            </a:r>
+            <a:endParaRPr lang="en-US" sz="1300" dirty="0"/>
+          </a:p>
+        </p:txBody>
+      </p:sp>
+      <p:sp>
+        <p:nvSpPr>
+          <p:cNvPr id="9" name="Text 6"/>
+          <p:cNvSpPr/>
+          <p:nvPr/>
+        </p:nvSpPr>
+        <p:spPr>
+          <a:xfrm>
+            <a:off x="548640" y="2560320"/>
+            <a:ext cx="5303520" cy="457200"/>
+          </a:xfrm>
+          <a:prstGeom prst="rect">
+            <a:avLst/>
+          </a:prstGeom>
+          <a:noFill/>
+          <a:ln/>
+        </p:spPr>
+        <p:txBody>
+          <a:bodyPr wrap="square" rtlCol="0" anchor="ctr"/>
+          <a:lstStyle/>
+          <a:p>
+            <a:pPr marL="342900" indent="-342900">
+              <a:buSzPct val="100000"/>
+              <a:buChar char="▪"/>
+            </a:pPr>
+            <a:r>
+              <a:rPr lang="en-US" sz="1300" dirty="0">
+                <a:solidFill>
+                  <a:srgbClr val="2A2A2A"/>
+                </a:solidFill>
+                <a:latin typeface="Calibri" pitchFamily="34" charset="0"/>
+                <a:ea typeface="Calibri" pitchFamily="34" charset="-122"/>
+                <a:cs typeface="Calibri" pitchFamily="34" charset="-120"/>
+              </a:rPr>
+              <a:t>An appropriate template</a:t>
+            </a:r>
+            <a:endParaRPr lang="en-US" sz="1300" dirty="0"/>
+          </a:p>
+        </p:txBody>
+      </p:sp>
+      <p:sp>
+        <p:nvSpPr>
+          <p:cNvPr id="10" name="Text 7"/>
+          <p:cNvSpPr/>
+          <p:nvPr/>
+        </p:nvSpPr>
+        <p:spPr>
+          <a:xfrm>
+            <a:off x="548640" y="3063240"/>
+            <a:ext cx="5303520" cy="457200"/>
+          </a:xfrm>
+          <a:prstGeom prst="rect">
+            <a:avLst/>
+          </a:prstGeom>
+          <a:noFill/>
+          <a:ln/>
+        </p:spPr>
+        <p:txBody>
+          <a:bodyPr wrap="square" rtlCol="0" anchor="ctr"/>
+          <a:lstStyle/>
+          <a:p>
+            <a:pPr marL="342900" indent="-342900">
+              <a:buSzPct val="100000"/>
+              <a:buChar char="▪"/>
+            </a:pPr>
+            <a:r>
+              <a:rPr lang="en-US" sz="1300" dirty="0">
+                <a:solidFill>
+                  <a:srgbClr val="2A2A2A"/>
+                </a:solidFill>
+                <a:latin typeface="Calibri" pitchFamily="34" charset="0"/>
+                <a:ea typeface="Calibri" pitchFamily="34" charset="-122"/>
+                <a:cs typeface="Calibri" pitchFamily="34" charset="-120"/>
+              </a:rPr>
+              <a:t>Good level of detail</a:t>
+            </a:r>
+            <a:endParaRPr lang="en-US" sz="1300" dirty="0"/>
+          </a:p>
+        </p:txBody>
+      </p:sp>
+      <p:sp>
+        <p:nvSpPr>
+          <p:cNvPr id="11" name="Shape 8"/>
+          <p:cNvSpPr/>
+          <p:nvPr/>
+        </p:nvSpPr>
+        <p:spPr>
+          <a:xfrm>
+            <a:off x="6172200" y="1097280"/>
+            <a:ext cx="5440680" cy="4343400"/>
+          </a:xfrm>
+          <a:prstGeom prst="roundRect">
+            <a:avLst>
+              <a:gd name="adj" fmla="val 1684"/>
+            </a:avLst>
+          </a:prstGeom>
+          <a:solidFill>
+            <a:srgbClr val="E8EEF7"/>
+          </a:solidFill>
+          <a:ln/>
+        </p:spPr>
+      </p:sp>
+      <p:sp>
+        <p:nvSpPr>
+          <p:cNvPr id="12" name="Text 9"/>
+          <p:cNvSpPr/>
+          <p:nvPr/>
+        </p:nvSpPr>
+        <p:spPr>
+          <a:xfrm>
+            <a:off x="6446520" y="1325880"/>
+            <a:ext cx="4937760" cy="365760"/>
+          </a:xfrm>
+          <a:prstGeom prst="rect">
+            <a:avLst/>
+          </a:prstGeom>
+          <a:noFill/>
+          <a:ln/>
+        </p:spPr>
+        <p:txBody>
+          <a:bodyPr wrap="square" rtlCol="0" anchor="ctr"/>
+          <a:lstStyle/>
+          <a:p>
+            <a:pPr indent="0" marL="0">
+              <a:buNone/>
+            </a:pPr>
+            <a:r>
+              <a:rPr lang="en-US" sz="1600" b="1" dirty="0">
+                <a:solidFill>
+                  <a:srgbClr val="122952"/>
+                </a:solidFill>
+                <a:latin typeface="Calibri" pitchFamily="34" charset="0"/>
+                <a:ea typeface="Calibri" pitchFamily="34" charset="-122"/>
+                <a:cs typeface="Calibri" pitchFamily="34" charset="-120"/>
+              </a:rPr>
+              <a:t>Reviewing your performance means:</a:t>
+            </a:r>
+            <a:endParaRPr lang="en-US" sz="1600" dirty="0"/>
+          </a:p>
+        </p:txBody>
+      </p:sp>
+      <p:sp>
+        <p:nvSpPr>
+          <p:cNvPr id="13" name="Text 10"/>
+          <p:cNvSpPr/>
+          <p:nvPr/>
+        </p:nvSpPr>
+        <p:spPr>
+          <a:xfrm>
+            <a:off x="6446520" y="1874520"/>
+            <a:ext cx="4937760" cy="320040"/>
+          </a:xfrm>
+          <a:prstGeom prst="rect">
+            <a:avLst/>
+          </a:prstGeom>
+          <a:noFill/>
+          <a:ln/>
+        </p:spPr>
+        <p:txBody>
+          <a:bodyPr wrap="square" rtlCol="0" anchor="ctr"/>
+          <a:lstStyle/>
+          <a:p>
+            <a:pPr indent="0" marL="0">
+              <a:buNone/>
+            </a:pPr>
+            <a:r>
+              <a:rPr lang="en-US" sz="1300" b="1" dirty="0">
+                <a:solidFill>
+                  <a:srgbClr val="122952"/>
+                </a:solidFill>
+                <a:latin typeface="Calibri" pitchFamily="34" charset="0"/>
+                <a:ea typeface="Calibri" pitchFamily="34" charset="-122"/>
+                <a:cs typeface="Calibri" pitchFamily="34" charset="-120"/>
+              </a:rPr>
+              <a:t>Self-evaluation</a:t>
+            </a:r>
+            <a:endParaRPr lang="en-US" sz="1300" dirty="0"/>
+          </a:p>
+        </p:txBody>
+      </p:sp>
+      <p:sp>
+        <p:nvSpPr>
+          <p:cNvPr id="14" name="Text 11"/>
+          <p:cNvSpPr/>
+          <p:nvPr/>
+        </p:nvSpPr>
+        <p:spPr>
+          <a:xfrm>
+            <a:off x="6446520" y="2240280"/>
+            <a:ext cx="4937760" cy="548640"/>
+          </a:xfrm>
+          <a:prstGeom prst="rect">
+            <a:avLst/>
+          </a:prstGeom>
+          <a:noFill/>
+          <a:ln/>
+        </p:spPr>
+        <p:txBody>
+          <a:bodyPr wrap="square" rtlCol="0" anchor="ctr"/>
+          <a:lstStyle/>
+          <a:p>
+            <a:pPr indent="0" marL="0">
+              <a:buNone/>
+            </a:pPr>
+            <a:r>
+              <a:rPr lang="en-US" sz="1200" dirty="0">
+                <a:solidFill>
+                  <a:srgbClr val="2A2A2A"/>
+                </a:solidFill>
+                <a:latin typeface="Calibri" pitchFamily="34" charset="0"/>
+                <a:ea typeface="Calibri" pitchFamily="34" charset="-122"/>
+                <a:cs typeface="Calibri" pitchFamily="34" charset="-120"/>
+              </a:rPr>
+              <a:t>Comparing your own results honestly</a:t>
+            </a:r>
+            <a:endParaRPr lang="en-US" sz="1200" dirty="0"/>
+          </a:p>
+        </p:txBody>
+      </p:sp>
+      <p:sp>
+        <p:nvSpPr>
+          <p:cNvPr id="15" name="Text 12"/>
+          <p:cNvSpPr/>
+          <p:nvPr/>
+        </p:nvSpPr>
+        <p:spPr>
+          <a:xfrm>
+            <a:off x="6446520" y="2834640"/>
+            <a:ext cx="4937760" cy="320040"/>
+          </a:xfrm>
+          <a:prstGeom prst="rect">
+            <a:avLst/>
+          </a:prstGeom>
+          <a:noFill/>
+          <a:ln/>
+        </p:spPr>
+        <p:txBody>
+          <a:bodyPr wrap="square" rtlCol="0" anchor="ctr"/>
+          <a:lstStyle/>
+          <a:p>
+            <a:pPr indent="0" marL="0">
+              <a:buNone/>
+            </a:pPr>
+            <a:r>
+              <a:rPr lang="en-US" sz="1300" b="1" dirty="0">
+                <a:solidFill>
+                  <a:srgbClr val="122952"/>
+                </a:solidFill>
+                <a:latin typeface="Calibri" pitchFamily="34" charset="0"/>
+                <a:ea typeface="Calibri" pitchFamily="34" charset="-122"/>
+                <a:cs typeface="Calibri" pitchFamily="34" charset="-120"/>
+              </a:rPr>
+              <a:t>Feedback</a:t>
+            </a:r>
+            <a:endParaRPr lang="en-US" sz="1300" dirty="0"/>
+          </a:p>
+        </p:txBody>
+      </p:sp>
+      <p:sp>
+        <p:nvSpPr>
+          <p:cNvPr id="16" name="Text 13"/>
+          <p:cNvSpPr/>
+          <p:nvPr/>
+        </p:nvSpPr>
+        <p:spPr>
+          <a:xfrm>
+            <a:off x="6446520" y="3200400"/>
+            <a:ext cx="4937760" cy="548640"/>
+          </a:xfrm>
+          <a:prstGeom prst="rect">
+            <a:avLst/>
+          </a:prstGeom>
+          <a:noFill/>
+          <a:ln/>
+        </p:spPr>
+        <p:txBody>
+          <a:bodyPr wrap="square" rtlCol="0" anchor="ctr"/>
+          <a:lstStyle/>
+          <a:p>
+            <a:pPr indent="0" marL="0">
+              <a:buNone/>
+            </a:pPr>
+            <a:r>
+              <a:rPr lang="en-US" sz="1200" dirty="0">
+                <a:solidFill>
+                  <a:srgbClr val="2A2A2A"/>
+                </a:solidFill>
+                <a:latin typeface="Calibri" pitchFamily="34" charset="0"/>
+                <a:ea typeface="Calibri" pitchFamily="34" charset="-122"/>
+                <a:cs typeface="Calibri" pitchFamily="34" charset="-120"/>
+              </a:rPr>
+              <a:t>From peers or your tutor</a:t>
+            </a:r>
+            <a:endParaRPr lang="en-US" sz="1200" dirty="0"/>
+          </a:p>
+        </p:txBody>
+      </p:sp>
+      <p:sp>
+        <p:nvSpPr>
+          <p:cNvPr id="17" name="Text 14"/>
+          <p:cNvSpPr/>
+          <p:nvPr/>
+        </p:nvSpPr>
+        <p:spPr>
+          <a:xfrm>
+            <a:off x="6446520" y="3794760"/>
+            <a:ext cx="4937760" cy="320040"/>
+          </a:xfrm>
+          <a:prstGeom prst="rect">
+            <a:avLst/>
+          </a:prstGeom>
+          <a:noFill/>
+          <a:ln/>
+        </p:spPr>
+        <p:txBody>
+          <a:bodyPr wrap="square" rtlCol="0" anchor="ctr"/>
+          <a:lstStyle/>
+          <a:p>
+            <a:pPr indent="0" marL="0">
+              <a:buNone/>
+            </a:pPr>
+            <a:r>
+              <a:rPr lang="en-US" sz="1300" b="1" dirty="0">
+                <a:solidFill>
+                  <a:srgbClr val="122952"/>
+                </a:solidFill>
+                <a:latin typeface="Calibri" pitchFamily="34" charset="0"/>
+                <a:ea typeface="Calibri" pitchFamily="34" charset="-122"/>
+                <a:cs typeface="Calibri" pitchFamily="34" charset="-120"/>
+              </a:rPr>
+              <a:t>Draw conclusions</a:t>
+            </a:r>
+            <a:endParaRPr lang="en-US" sz="1300" dirty="0"/>
+          </a:p>
+        </p:txBody>
+      </p:sp>
+      <p:sp>
+        <p:nvSpPr>
+          <p:cNvPr id="18" name="Text 15"/>
+          <p:cNvSpPr/>
+          <p:nvPr/>
+        </p:nvSpPr>
+        <p:spPr>
+          <a:xfrm>
+            <a:off x="6446520" y="4160520"/>
+            <a:ext cx="4937760" cy="548640"/>
+          </a:xfrm>
+          <a:prstGeom prst="rect">
+            <a:avLst/>
+          </a:prstGeom>
+          <a:noFill/>
+          <a:ln/>
+        </p:spPr>
+        <p:txBody>
+          <a:bodyPr wrap="square" rtlCol="0" anchor="ctr"/>
+          <a:lstStyle/>
+          <a:p>
+            <a:pPr indent="0" marL="0">
+              <a:buNone/>
+            </a:pPr>
+            <a:r>
+              <a:rPr lang="en-US" sz="1200" dirty="0">
+                <a:solidFill>
+                  <a:srgbClr val="2A2A2A"/>
+                </a:solidFill>
+                <a:latin typeface="Calibri" pitchFamily="34" charset="0"/>
+                <a:ea typeface="Calibri" pitchFamily="34" charset="-122"/>
+                <a:cs typeface="Calibri" pitchFamily="34" charset="-120"/>
+              </a:rPr>
+              <a:t>What the data actually shows</a:t>
+            </a:r>
+            <a:endParaRPr lang="en-US" sz="1200" dirty="0"/>
+          </a:p>
+        </p:txBody>
+      </p:sp>
+      <p:sp>
+        <p:nvSpPr>
+          <p:cNvPr id="19" name="Text 16"/>
+          <p:cNvSpPr/>
+          <p:nvPr/>
+        </p:nvSpPr>
+        <p:spPr>
+          <a:xfrm>
+            <a:off x="6446520" y="4754880"/>
+            <a:ext cx="4937760" cy="320040"/>
+          </a:xfrm>
+          <a:prstGeom prst="rect">
+            <a:avLst/>
+          </a:prstGeom>
+          <a:noFill/>
+          <a:ln/>
+        </p:spPr>
+        <p:txBody>
+          <a:bodyPr wrap="square" rtlCol="0" anchor="ctr"/>
+          <a:lstStyle/>
+          <a:p>
+            <a:pPr indent="0" marL="0">
+              <a:buNone/>
+            </a:pPr>
+            <a:r>
+              <a:rPr lang="en-US" sz="1300" b="1" dirty="0">
+                <a:solidFill>
+                  <a:srgbClr val="122952"/>
+                </a:solidFill>
+                <a:latin typeface="Calibri" pitchFamily="34" charset="0"/>
+                <a:ea typeface="Calibri" pitchFamily="34" charset="-122"/>
+                <a:cs typeface="Calibri" pitchFamily="34" charset="-120"/>
+              </a:rPr>
+              <a:t>Recommend improvements</a:t>
+            </a:r>
+            <a:endParaRPr lang="en-US" sz="1300" dirty="0"/>
+          </a:p>
+        </p:txBody>
+      </p:sp>
+      <p:sp>
+        <p:nvSpPr>
+          <p:cNvPr id="20" name="Text 17"/>
+          <p:cNvSpPr/>
+          <p:nvPr/>
+        </p:nvSpPr>
+        <p:spPr>
+          <a:xfrm>
+            <a:off x="6446520" y="5120640"/>
+            <a:ext cx="4937760" cy="548640"/>
+          </a:xfrm>
+          <a:prstGeom prst="rect">
+            <a:avLst/>
+          </a:prstGeom>
+          <a:noFill/>
+          <a:ln/>
+        </p:spPr>
+        <p:txBody>
+          <a:bodyPr wrap="square" rtlCol="0" anchor="ctr"/>
+          <a:lstStyle/>
+          <a:p>
+            <a:pPr indent="0" marL="0">
+              <a:buNone/>
+            </a:pPr>
+            <a:r>
+              <a:rPr lang="en-US" sz="1200" dirty="0">
+                <a:solidFill>
+                  <a:srgbClr val="2A2A2A"/>
+                </a:solidFill>
+                <a:latin typeface="Calibri" pitchFamily="34" charset="0"/>
+                <a:ea typeface="Calibri" pitchFamily="34" charset="-122"/>
+                <a:cs typeface="Calibri" pitchFamily="34" charset="-120"/>
+              </a:rPr>
+              <a:t>Realistic, specific next steps</a:t>
+            </a:r>
+            <a:endParaRPr lang="en-US" sz="1200" dirty="0"/>
+          </a:p>
+        </p:txBody>
+      </p:sp>
+      <p:sp>
+        <p:nvSpPr>
+          <p:cNvPr id="21" name="Shape 18"/>
+          <p:cNvSpPr/>
+          <p:nvPr/>
+        </p:nvSpPr>
+        <p:spPr>
+          <a:xfrm>
+            <a:off x="0" y="6537960"/>
+            <a:ext cx="12188952" cy="320040"/>
+          </a:xfrm>
+          <a:prstGeom prst="rect">
+            <a:avLst/>
+          </a:prstGeom>
+          <a:solidFill>
+            <a:srgbClr val="1B3A6B"/>
+          </a:solidFill>
+          <a:ln/>
+        </p:spPr>
+      </p:sp>
+      <p:sp>
+        <p:nvSpPr>
+          <p:cNvPr id="22" name="Text 19"/>
+          <p:cNvSpPr/>
+          <p:nvPr/>
+        </p:nvSpPr>
+        <p:spPr>
+          <a:xfrm>
+            <a:off x="274320" y="6537960"/>
+            <a:ext cx="3657600" cy="320040"/>
+          </a:xfrm>
+          <a:prstGeom prst="rect">
+            <a:avLst/>
+          </a:prstGeom>
+          <a:noFill/>
+          <a:ln/>
+        </p:spPr>
+        <p:txBody>
+          <a:bodyPr wrap="square" rtlCol="0" anchor="ctr"/>
+          <a:lstStyle/>
+          <a:p>
+            <a:pPr indent="0" marL="0">
+              <a:buNone/>
+            </a:pPr>
+            <a:r>
+              <a:rPr lang="en-US" sz="1000" dirty="0">
+                <a:solidFill>
+                  <a:srgbClr val="FFFFFF"/>
+                </a:solidFill>
+                <a:latin typeface="Calibri" pitchFamily="34" charset="0"/>
+                <a:ea typeface="Calibri" pitchFamily="34" charset="-122"/>
+                <a:cs typeface="Calibri" pitchFamily="34" charset="-120"/>
+              </a:rPr>
+              <a:t>PS6</a:t>
+            </a:r>
+            <a:endParaRPr lang="en-US" sz="1000" dirty="0"/>
+          </a:p>
+        </p:txBody>
+      </p:sp>
+      <p:sp>
+        <p:nvSpPr>
+          <p:cNvPr id="23" name="Text 20"/>
+          <p:cNvSpPr/>
+          <p:nvPr/>
+        </p:nvSpPr>
+        <p:spPr>
+          <a:xfrm>
+            <a:off x="7772400" y="6537960"/>
+            <a:ext cx="4114800" cy="320040"/>
+          </a:xfrm>
+          <a:prstGeom prst="rect">
+            <a:avLst/>
+          </a:prstGeom>
+          <a:noFill/>
+          <a:ln/>
+        </p:spPr>
+        <p:txBody>
+          <a:bodyPr wrap="square" rtlCol="0" anchor="ctr"/>
+          <a:lstStyle/>
+          <a:p>
+            <a:pPr algn="r" indent="0" marL="0">
+              <a:buNone/>
+            </a:pPr>
+            <a:r>
+              <a:rPr lang="en-US" sz="1000" dirty="0">
+                <a:solidFill>
+                  <a:srgbClr val="FFFFFF"/>
+                </a:solidFill>
+                <a:latin typeface="Calibri" pitchFamily="34" charset="0"/>
+                <a:ea typeface="Calibri" pitchFamily="34" charset="-122"/>
+                <a:cs typeface="Calibri" pitchFamily="34" charset="-120"/>
+              </a:rPr>
+              <a:t>Knowledge Hub 5-6 — Recording and Reviewing</a:t>
+            </a:r>
+            <a:endParaRPr lang="en-US" sz="1000" dirty="0"/>
+          </a:p>
+        </p:txBody>
+      </p:sp>
+    </p:spTree>
+  </p:cSld>
+  <p:clrMapOvr>
+    <a:masterClrMapping/>
+  </p:clrMapOvr>
+</p:sld>
+</file>
+
+<file path=ppt/slides/slide11.xml><?xml version="1.0" encoding="utf-8"?>
+<p:sld xmlns:a="http://schemas.openxmlformats.org/drawingml/2006/main" xmlns:r="http://schemas.openxmlformats.org/officeDocument/2006/relationships" xmlns:p="http://schemas.openxmlformats.org/presentationml/2006/main">
+  <p:cSld name="Slide 11">
+    <p:spTree>
+      <p:nvGrpSpPr>
+        <p:cNvPr id="1" name=""/>
+        <p:cNvGrpSpPr/>
+        <p:nvPr/>
+      </p:nvGrpSpPr>
+      <p:grpSpPr>
+        <a:xfrm>
+          <a:off x="0" y="0"/>
+          <a:ext cx="0" cy="0"/>
+          <a:chOff x="0" y="0"/>
+          <a:chExt cx="0" cy="0"/>
+        </a:xfrm>
+      </p:grpSpPr>
+      <p:pic>
+        <p:nvPicPr>
+          <p:cNvPr id="2" name="Image 0" descr="preencoded.png">    </p:cNvPr>
+          <p:cNvPicPr>
+            <a:picLocks noChangeAspect="1"/>
+          </p:cNvPicPr>
+          <p:nvPr/>
+        </p:nvPicPr>
+        <p:blipFill>
+          <a:blip r:embed="rId1"/>
+          <a:stretch>
+            <a:fillRect/>
+          </a:stretch>
+        </p:blipFill>
+        <p:spPr>
+          <a:xfrm>
+            <a:off x="11109960" y="228600"/>
+            <a:ext cx="777240" cy="548640"/>
+          </a:xfrm>
+          <a:prstGeom prst="rect">
+            <a:avLst/>
+          </a:prstGeom>
+        </p:spPr>
+      </p:pic>
+      <p:sp>
+        <p:nvSpPr>
+          <p:cNvPr id="3" name="Shape 0"/>
+          <p:cNvSpPr/>
+          <p:nvPr/>
+        </p:nvSpPr>
+        <p:spPr>
+          <a:xfrm>
+            <a:off x="548640" y="274320"/>
+            <a:ext cx="2103120" cy="384048"/>
+          </a:xfrm>
+          <a:prstGeom prst="roundRect">
+            <a:avLst>
+              <a:gd name="adj" fmla="val 19048"/>
+            </a:avLst>
+          </a:prstGeom>
+          <a:solidFill>
+            <a:srgbClr val="1E40AF"/>
+          </a:solidFill>
+          <a:ln/>
+        </p:spPr>
+      </p:sp>
+      <p:sp>
+        <p:nvSpPr>
+          <p:cNvPr id="4" name="Text 1"/>
+          <p:cNvSpPr/>
+          <p:nvPr/>
+        </p:nvSpPr>
+        <p:spPr>
+          <a:xfrm>
+            <a:off x="548640" y="274320"/>
+            <a:ext cx="2103120" cy="384048"/>
+          </a:xfrm>
+          <a:prstGeom prst="rect">
+            <a:avLst/>
+          </a:prstGeom>
+          <a:noFill/>
+          <a:ln/>
+        </p:spPr>
+        <p:txBody>
+          <a:bodyPr wrap="square" lIns="0" tIns="0" rIns="0" bIns="0" rtlCol="0" anchor="ctr"/>
+          <a:lstStyle/>
+          <a:p>
+            <a:pPr algn="ctr" indent="0" marL="0">
+              <a:buNone/>
+            </a:pPr>
+            <a:r>
+              <a:rPr lang="en-US" sz="1100" b="1" dirty="0">
+                <a:solidFill>
+                  <a:srgbClr val="FFFFFF"/>
+                </a:solidFill>
+                <a:latin typeface="Calibri" pitchFamily="34" charset="0"/>
+                <a:ea typeface="Calibri" pitchFamily="34" charset="-122"/>
+                <a:cs typeface="Calibri" pitchFamily="34" charset="-120"/>
+              </a:rPr>
+              <a:t>WORKED EXAMPLE</a:t>
+            </a:r>
+            <a:endParaRPr lang="en-US" sz="1100" dirty="0"/>
+          </a:p>
+        </p:txBody>
+      </p:sp>
+      <p:sp>
+        <p:nvSpPr>
+          <p:cNvPr id="5" name="Text 2"/>
+          <p:cNvSpPr/>
+          <p:nvPr/>
+        </p:nvSpPr>
+        <p:spPr>
+          <a:xfrm>
+            <a:off x="548640" y="822960"/>
+            <a:ext cx="8869680" cy="640080"/>
+          </a:xfrm>
+          <a:prstGeom prst="rect">
+            <a:avLst/>
+          </a:prstGeom>
+          <a:noFill/>
+          <a:ln/>
+        </p:spPr>
+        <p:txBody>
+          <a:bodyPr wrap="square" rtlCol="0" anchor="ctr"/>
+          <a:lstStyle/>
+          <a:p>
+            <a:pPr indent="0" marL="0">
+              <a:buNone/>
+            </a:pPr>
+            <a:r>
+              <a:rPr lang="en-US" sz="2300" b="1" dirty="0">
+                <a:solidFill>
+                  <a:srgbClr val="122952"/>
+                </a:solidFill>
+                <a:latin typeface="Calibri" pitchFamily="34" charset="0"/>
+                <a:ea typeface="Calibri" pitchFamily="34" charset="-122"/>
+                <a:cs typeface="Calibri" pitchFamily="34" charset="-120"/>
+              </a:rPr>
+              <a:t>A Model Review — James and the 1.5 Mile Run</a:t>
+            </a:r>
+            <a:endParaRPr lang="en-US" sz="2300" dirty="0"/>
+          </a:p>
+        </p:txBody>
+      </p:sp>
+      <p:sp>
+        <p:nvSpPr>
+          <p:cNvPr id="6" name="Shape 3"/>
+          <p:cNvSpPr/>
+          <p:nvPr/>
+        </p:nvSpPr>
+        <p:spPr>
+          <a:xfrm>
+            <a:off x="548640" y="1508760"/>
+            <a:ext cx="11064240" cy="777240"/>
+          </a:xfrm>
+          <a:prstGeom prst="roundRect">
+            <a:avLst>
+              <a:gd name="adj" fmla="val 7059"/>
+            </a:avLst>
+          </a:prstGeom>
+          <a:solidFill>
+            <a:srgbClr val="E8EEF7"/>
+          </a:solidFill>
+          <a:ln/>
+        </p:spPr>
+      </p:sp>
+      <p:sp>
+        <p:nvSpPr>
+          <p:cNvPr id="7" name="Text 4"/>
+          <p:cNvSpPr/>
+          <p:nvPr/>
+        </p:nvSpPr>
+        <p:spPr>
+          <a:xfrm>
+            <a:off x="822960" y="1627632"/>
+            <a:ext cx="10515600" cy="548640"/>
+          </a:xfrm>
+          <a:prstGeom prst="rect">
+            <a:avLst/>
+          </a:prstGeom>
+          <a:noFill/>
+          <a:ln/>
+        </p:spPr>
+        <p:txBody>
+          <a:bodyPr wrap="square" rtlCol="0" anchor="ctr"/>
+          <a:lstStyle/>
+          <a:p>
+            <a:pPr indent="0" marL="0">
+              <a:buNone/>
+            </a:pPr>
+            <a:r>
+              <a:rPr lang="en-US" sz="1400" dirty="0">
+                <a:solidFill>
+                  <a:srgbClr val="2A2A2A"/>
+                </a:solidFill>
+                <a:latin typeface="Calibri" pitchFamily="34" charset="0"/>
+                <a:ea typeface="Calibri" pitchFamily="34" charset="-122"/>
+                <a:cs typeface="Calibri" pitchFamily="34" charset="-120"/>
+              </a:rPr>
+              <a:t>James recorded a 1.5 mile run time of 11:45. The Army entry standard is 10:30.</a:t>
+            </a:r>
+            <a:endParaRPr lang="en-US" sz="1400" dirty="0"/>
+          </a:p>
+        </p:txBody>
+      </p:sp>
+      <p:sp>
+        <p:nvSpPr>
+          <p:cNvPr id="8" name="Shape 5"/>
+          <p:cNvSpPr/>
+          <p:nvPr/>
+        </p:nvSpPr>
+        <p:spPr>
+          <a:xfrm>
+            <a:off x="548640" y="2468880"/>
+            <a:ext cx="11064240" cy="1005840"/>
+          </a:xfrm>
+          <a:prstGeom prst="roundRect">
+            <a:avLst>
+              <a:gd name="adj" fmla="val 5455"/>
+            </a:avLst>
+          </a:prstGeom>
+          <a:solidFill>
+            <a:srgbClr val="F7F9FC"/>
+          </a:solidFill>
+          <a:ln/>
+        </p:spPr>
+      </p:sp>
+      <p:sp>
+        <p:nvSpPr>
+          <p:cNvPr id="9" name="Text 6"/>
+          <p:cNvSpPr/>
+          <p:nvPr/>
+        </p:nvSpPr>
+        <p:spPr>
+          <a:xfrm>
+            <a:off x="822960" y="2578608"/>
+            <a:ext cx="2560320" cy="777240"/>
+          </a:xfrm>
+          <a:prstGeom prst="rect">
+            <a:avLst/>
+          </a:prstGeom>
+          <a:noFill/>
+          <a:ln/>
+        </p:spPr>
+        <p:txBody>
+          <a:bodyPr wrap="square" rtlCol="0" anchor="ctr"/>
+          <a:lstStyle/>
+          <a:p>
+            <a:pPr indent="0" marL="0">
+              <a:buNone/>
+            </a:pPr>
+            <a:r>
+              <a:rPr lang="en-US" sz="1300" b="1" dirty="0">
+                <a:solidFill>
+                  <a:srgbClr val="122952"/>
+                </a:solidFill>
+                <a:latin typeface="Calibri" pitchFamily="34" charset="0"/>
+                <a:ea typeface="Calibri" pitchFamily="34" charset="-122"/>
+                <a:cs typeface="Calibri" pitchFamily="34" charset="-120"/>
+              </a:rPr>
+              <a:t>Self-evaluation</a:t>
+            </a:r>
+            <a:endParaRPr lang="en-US" sz="1300" dirty="0"/>
+          </a:p>
+        </p:txBody>
+      </p:sp>
+      <p:sp>
+        <p:nvSpPr>
+          <p:cNvPr id="10" name="Text 7"/>
+          <p:cNvSpPr/>
+          <p:nvPr/>
+        </p:nvSpPr>
+        <p:spPr>
+          <a:xfrm>
+            <a:off x="3474720" y="2578608"/>
+            <a:ext cx="7955280" cy="777240"/>
+          </a:xfrm>
+          <a:prstGeom prst="rect">
+            <a:avLst/>
+          </a:prstGeom>
+          <a:noFill/>
+          <a:ln/>
+        </p:spPr>
+        <p:txBody>
+          <a:bodyPr wrap="square" rtlCol="0" anchor="ctr"/>
+          <a:lstStyle/>
+          <a:p>
+            <a:pPr indent="0" marL="0">
+              <a:buNone/>
+            </a:pPr>
+            <a:r>
+              <a:rPr lang="en-US" sz="1200" i="1" dirty="0">
+                <a:solidFill>
+                  <a:srgbClr val="2A2A2A"/>
+                </a:solidFill>
+                <a:latin typeface="Calibri" pitchFamily="34" charset="0"/>
+                <a:ea typeface="Calibri" pitchFamily="34" charset="-122"/>
+                <a:cs typeface="Calibri" pitchFamily="34" charset="-120"/>
+              </a:rPr>
+              <a:t>“I didn't reach the standard — I was 1:15 slower than the 10:30 target. My pace dropped a lot in the last 400m.”</a:t>
+            </a:r>
+            <a:endParaRPr lang="en-US" sz="1200" dirty="0"/>
+          </a:p>
+        </p:txBody>
+      </p:sp>
+      <p:sp>
+        <p:nvSpPr>
+          <p:cNvPr id="11" name="Shape 8"/>
+          <p:cNvSpPr/>
+          <p:nvPr/>
+        </p:nvSpPr>
+        <p:spPr>
+          <a:xfrm>
+            <a:off x="548640" y="3657600"/>
+            <a:ext cx="11064240" cy="1005840"/>
+          </a:xfrm>
+          <a:prstGeom prst="roundRect">
+            <a:avLst>
+              <a:gd name="adj" fmla="val 5455"/>
+            </a:avLst>
+          </a:prstGeom>
+          <a:solidFill>
+            <a:srgbClr val="F7F9FC"/>
+          </a:solidFill>
+          <a:ln/>
+        </p:spPr>
+      </p:sp>
+      <p:sp>
+        <p:nvSpPr>
+          <p:cNvPr id="12" name="Text 9"/>
+          <p:cNvSpPr/>
+          <p:nvPr/>
+        </p:nvSpPr>
+        <p:spPr>
+          <a:xfrm>
+            <a:off x="822960" y="3767328"/>
+            <a:ext cx="2560320" cy="777240"/>
+          </a:xfrm>
+          <a:prstGeom prst="rect">
+            <a:avLst/>
+          </a:prstGeom>
+          <a:noFill/>
+          <a:ln/>
+        </p:spPr>
+        <p:txBody>
+          <a:bodyPr wrap="square" rtlCol="0" anchor="ctr"/>
+          <a:lstStyle/>
+          <a:p>
+            <a:pPr indent="0" marL="0">
+              <a:buNone/>
+            </a:pPr>
+            <a:r>
+              <a:rPr lang="en-US" sz="1300" b="1" dirty="0">
+                <a:solidFill>
+                  <a:srgbClr val="122952"/>
+                </a:solidFill>
+                <a:latin typeface="Calibri" pitchFamily="34" charset="0"/>
+                <a:ea typeface="Calibri" pitchFamily="34" charset="-122"/>
+                <a:cs typeface="Calibri" pitchFamily="34" charset="-120"/>
+              </a:rPr>
+              <a:t>Draw a conclusion</a:t>
+            </a:r>
+            <a:endParaRPr lang="en-US" sz="1300" dirty="0"/>
+          </a:p>
+        </p:txBody>
+      </p:sp>
+      <p:sp>
+        <p:nvSpPr>
+          <p:cNvPr id="13" name="Text 10"/>
+          <p:cNvSpPr/>
+          <p:nvPr/>
+        </p:nvSpPr>
+        <p:spPr>
+          <a:xfrm>
+            <a:off x="3474720" y="3767328"/>
+            <a:ext cx="7955280" cy="777240"/>
+          </a:xfrm>
+          <a:prstGeom prst="rect">
+            <a:avLst/>
+          </a:prstGeom>
+          <a:noFill/>
+          <a:ln/>
+        </p:spPr>
+        <p:txBody>
+          <a:bodyPr wrap="square" rtlCol="0" anchor="ctr"/>
+          <a:lstStyle/>
+          <a:p>
+            <a:pPr indent="0" marL="0">
+              <a:buNone/>
+            </a:pPr>
+            <a:r>
+              <a:rPr lang="en-US" sz="1200" i="1" dirty="0">
+                <a:solidFill>
+                  <a:srgbClr val="2A2A2A"/>
+                </a:solidFill>
+                <a:latin typeface="Calibri" pitchFamily="34" charset="0"/>
+                <a:ea typeface="Calibri" pitchFamily="34" charset="-122"/>
+                <a:cs typeface="Calibri" pitchFamily="34" charset="-120"/>
+              </a:rPr>
+              <a:t>“My problem isn't top speed — it's stamina holding pace over the full distance. I went off too fast in the first 400m.”</a:t>
+            </a:r>
+            <a:endParaRPr lang="en-US" sz="1200" dirty="0"/>
+          </a:p>
+        </p:txBody>
+      </p:sp>
+      <p:sp>
+        <p:nvSpPr>
+          <p:cNvPr id="14" name="Shape 11"/>
+          <p:cNvSpPr/>
+          <p:nvPr/>
+        </p:nvSpPr>
+        <p:spPr>
+          <a:xfrm>
+            <a:off x="548640" y="4846320"/>
+            <a:ext cx="11064240" cy="1005840"/>
+          </a:xfrm>
+          <a:prstGeom prst="roundRect">
+            <a:avLst>
+              <a:gd name="adj" fmla="val 5455"/>
+            </a:avLst>
+          </a:prstGeom>
+          <a:solidFill>
+            <a:srgbClr val="F7F9FC"/>
+          </a:solidFill>
+          <a:ln/>
+        </p:spPr>
+      </p:sp>
+      <p:sp>
+        <p:nvSpPr>
+          <p:cNvPr id="15" name="Text 12"/>
+          <p:cNvSpPr/>
+          <p:nvPr/>
+        </p:nvSpPr>
+        <p:spPr>
+          <a:xfrm>
+            <a:off x="822960" y="4956048"/>
+            <a:ext cx="2560320" cy="777240"/>
+          </a:xfrm>
+          <a:prstGeom prst="rect">
+            <a:avLst/>
+          </a:prstGeom>
+          <a:noFill/>
+          <a:ln/>
+        </p:spPr>
+        <p:txBody>
+          <a:bodyPr wrap="square" rtlCol="0" anchor="ctr"/>
+          <a:lstStyle/>
+          <a:p>
+            <a:pPr indent="0" marL="0">
+              <a:buNone/>
+            </a:pPr>
+            <a:r>
+              <a:rPr lang="en-US" sz="1300" b="1" dirty="0">
+                <a:solidFill>
+                  <a:srgbClr val="122952"/>
+                </a:solidFill>
+                <a:latin typeface="Calibri" pitchFamily="34" charset="0"/>
+                <a:ea typeface="Calibri" pitchFamily="34" charset="-122"/>
+                <a:cs typeface="Calibri" pitchFamily="34" charset="-120"/>
+              </a:rPr>
+              <a:t>Recommend an improvement</a:t>
+            </a:r>
+            <a:endParaRPr lang="en-US" sz="1300" dirty="0"/>
+          </a:p>
+        </p:txBody>
+      </p:sp>
+      <p:sp>
+        <p:nvSpPr>
+          <p:cNvPr id="16" name="Text 13"/>
+          <p:cNvSpPr/>
+          <p:nvPr/>
+        </p:nvSpPr>
+        <p:spPr>
+          <a:xfrm>
+            <a:off x="3474720" y="4956048"/>
+            <a:ext cx="7955280" cy="777240"/>
+          </a:xfrm>
+          <a:prstGeom prst="rect">
+            <a:avLst/>
+          </a:prstGeom>
+          <a:noFill/>
+          <a:ln/>
+        </p:spPr>
+        <p:txBody>
+          <a:bodyPr wrap="square" rtlCol="0" anchor="ctr"/>
+          <a:lstStyle/>
+          <a:p>
+            <a:pPr indent="0" marL="0">
+              <a:buNone/>
+            </a:pPr>
+            <a:r>
+              <a:rPr lang="en-US" sz="1200" i="1" dirty="0">
+                <a:solidFill>
+                  <a:srgbClr val="2A2A2A"/>
+                </a:solidFill>
+                <a:latin typeface="Calibri" pitchFamily="34" charset="0"/>
+                <a:ea typeface="Calibri" pitchFamily="34" charset="-122"/>
+                <a:cs typeface="Calibri" pitchFamily="34" charset="-120"/>
+              </a:rPr>
+              <a:t>“I'll add one interval session a week (400m repeats) and practise even pacing, then retest in four weeks.”</a:t>
+            </a:r>
+            <a:endParaRPr lang="en-US" sz="1200" dirty="0"/>
+          </a:p>
+        </p:txBody>
+      </p:sp>
+      <p:sp>
+        <p:nvSpPr>
+          <p:cNvPr id="17" name="Shape 14"/>
+          <p:cNvSpPr/>
+          <p:nvPr/>
+        </p:nvSpPr>
+        <p:spPr>
+          <a:xfrm>
+            <a:off x="548640" y="6080760"/>
+            <a:ext cx="11064240" cy="594360"/>
+          </a:xfrm>
+          <a:prstGeom prst="roundRect">
+            <a:avLst>
+              <a:gd name="adj" fmla="val 9231"/>
+            </a:avLst>
+          </a:prstGeom>
+          <a:solidFill>
+            <a:srgbClr val="F0FDF4"/>
+          </a:solidFill>
+          <a:ln/>
+        </p:spPr>
+      </p:sp>
+      <p:sp>
+        <p:nvSpPr>
+          <p:cNvPr id="18" name="Text 15"/>
+          <p:cNvSpPr/>
+          <p:nvPr/>
+        </p:nvSpPr>
+        <p:spPr>
+          <a:xfrm>
+            <a:off x="822960" y="6153912"/>
+            <a:ext cx="10515600" cy="411480"/>
+          </a:xfrm>
+          <a:prstGeom prst="rect">
+            <a:avLst/>
+          </a:prstGeom>
+          <a:noFill/>
+          <a:ln/>
+        </p:spPr>
+        <p:txBody>
+          <a:bodyPr wrap="square" rtlCol="0" anchor="ctr"/>
+          <a:lstStyle/>
+          <a:p>
+            <a:pPr indent="0" marL="0">
+              <a:buNone/>
+            </a:pPr>
+            <a:r>
+              <a:rPr lang="en-US" sz="1250" b="1" dirty="0">
+                <a:solidFill>
+                  <a:srgbClr val="16A34A"/>
+                </a:solidFill>
+                <a:latin typeface="Calibri" pitchFamily="34" charset="0"/>
+                <a:ea typeface="Calibri" pitchFamily="34" charset="-122"/>
+                <a:cs typeface="Calibri" pitchFamily="34" charset="-120"/>
+              </a:rPr>
+              <a:t>Notice:  </a:t>
+            </a:r>
+            <a:pPr indent="0" marL="0">
+              <a:buNone/>
+            </a:pPr>
+            <a:r>
+              <a:rPr lang="en-US" sz="1250" dirty="0">
+                <a:solidFill>
+                  <a:srgbClr val="2A2A2A"/>
+                </a:solidFill>
+                <a:latin typeface="Calibri" pitchFamily="34" charset="0"/>
+                <a:ea typeface="Calibri" pitchFamily="34" charset="-122"/>
+                <a:cs typeface="Calibri" pitchFamily="34" charset="-120"/>
+              </a:rPr>
+              <a:t>James doesn't just say what happened — he explains why, and gives a specific, realistic next step. That's the difference between Pass and Distinction.</a:t>
+            </a:r>
+            <a:endParaRPr lang="en-US" sz="1250" dirty="0"/>
+          </a:p>
+        </p:txBody>
+      </p:sp>
+      <p:sp>
+        <p:nvSpPr>
+          <p:cNvPr id="19" name="Shape 16"/>
+          <p:cNvSpPr/>
+          <p:nvPr/>
+        </p:nvSpPr>
+        <p:spPr>
+          <a:xfrm>
+            <a:off x="0" y="6537960"/>
+            <a:ext cx="12188952" cy="320040"/>
+          </a:xfrm>
+          <a:prstGeom prst="rect">
+            <a:avLst/>
+          </a:prstGeom>
+          <a:solidFill>
+            <a:srgbClr val="1B3A6B"/>
+          </a:solidFill>
+          <a:ln/>
+        </p:spPr>
+      </p:sp>
+      <p:sp>
+        <p:nvSpPr>
+          <p:cNvPr id="20" name="Text 17"/>
+          <p:cNvSpPr/>
+          <p:nvPr/>
+        </p:nvSpPr>
+        <p:spPr>
+          <a:xfrm>
+            <a:off x="274320" y="6537960"/>
+            <a:ext cx="3657600" cy="320040"/>
+          </a:xfrm>
+          <a:prstGeom prst="rect">
+            <a:avLst/>
+          </a:prstGeom>
+          <a:noFill/>
+          <a:ln/>
+        </p:spPr>
+        <p:txBody>
+          <a:bodyPr wrap="square" rtlCol="0" anchor="ctr"/>
+          <a:lstStyle/>
+          <a:p>
+            <a:pPr indent="0" marL="0">
+              <a:buNone/>
+            </a:pPr>
+            <a:r>
+              <a:rPr lang="en-US" sz="1000" dirty="0">
+                <a:solidFill>
+                  <a:srgbClr val="FFFFFF"/>
+                </a:solidFill>
+                <a:latin typeface="Calibri" pitchFamily="34" charset="0"/>
+                <a:ea typeface="Calibri" pitchFamily="34" charset="-122"/>
+                <a:cs typeface="Calibri" pitchFamily="34" charset="-120"/>
+              </a:rPr>
+              <a:t>PS6</a:t>
+            </a:r>
+            <a:endParaRPr lang="en-US" sz="1000" dirty="0"/>
+          </a:p>
+        </p:txBody>
+      </p:sp>
+      <p:sp>
+        <p:nvSpPr>
+          <p:cNvPr id="21" name="Text 18"/>
+          <p:cNvSpPr/>
+          <p:nvPr/>
+        </p:nvSpPr>
+        <p:spPr>
+          <a:xfrm>
+            <a:off x="7772400" y="6537960"/>
+            <a:ext cx="4114800" cy="320040"/>
+          </a:xfrm>
+          <a:prstGeom prst="rect">
+            <a:avLst/>
+          </a:prstGeom>
+          <a:noFill/>
+          <a:ln/>
+        </p:spPr>
+        <p:txBody>
+          <a:bodyPr wrap="square" rtlCol="0" anchor="ctr"/>
+          <a:lstStyle/>
+          <a:p>
+            <a:pPr algn="r" indent="0" marL="0">
+              <a:buNone/>
+            </a:pPr>
+            <a:r>
+              <a:rPr lang="en-US" sz="1000" dirty="0">
+                <a:solidFill>
+                  <a:srgbClr val="FFFFFF"/>
+                </a:solidFill>
+                <a:latin typeface="Calibri" pitchFamily="34" charset="0"/>
+                <a:ea typeface="Calibri" pitchFamily="34" charset="-122"/>
+                <a:cs typeface="Calibri" pitchFamily="34" charset="-120"/>
+              </a:rPr>
+              <a:t>Knowledge Hub 6 — Model Review</a:t>
+            </a:r>
+            <a:endParaRPr lang="en-US" sz="1000" dirty="0"/>
+          </a:p>
+        </p:txBody>
+      </p:sp>
+    </p:spTree>
+  </p:cSld>
+  <p:clrMapOvr>
+    <a:masterClrMapping/>
+  </p:clrMapOvr>
+</p:sld>
+</file>
+
+<file path=ppt/slides/slide12.xml><?xml version="1.0" encoding="utf-8"?>
+<p:sld xmlns:a="http://schemas.openxmlformats.org/drawingml/2006/main" xmlns:r="http://schemas.openxmlformats.org/officeDocument/2006/relationships" xmlns:p="http://schemas.openxmlformats.org/presentationml/2006/main">
+  <p:cSld name="Slide 12">
+    <p:spTree>
+      <p:nvGrpSpPr>
+        <p:cNvPr id="1" name=""/>
+        <p:cNvGrpSpPr/>
+        <p:nvPr/>
+      </p:nvGrpSpPr>
+      <p:grpSpPr>
+        <a:xfrm>
+          <a:off x="0" y="0"/>
+          <a:ext cx="0" cy="0"/>
+          <a:chOff x="0" y="0"/>
+          <a:chExt cx="0" cy="0"/>
+        </a:xfrm>
+      </p:grpSpPr>
+      <p:pic>
+        <p:nvPicPr>
+          <p:cNvPr id="2" name="Image 0" descr="preencoded.png">    </p:cNvPr>
+          <p:cNvPicPr>
+            <a:picLocks noChangeAspect="1"/>
+          </p:cNvPicPr>
+          <p:nvPr/>
+        </p:nvPicPr>
+        <p:blipFill>
+          <a:blip r:embed="rId1"/>
+          <a:stretch>
+            <a:fillRect/>
+          </a:stretch>
+        </p:blipFill>
+        <p:spPr>
+          <a:xfrm>
+            <a:off x="11109960" y="228600"/>
+            <a:ext cx="777240" cy="548640"/>
+          </a:xfrm>
+          <a:prstGeom prst="rect">
+            <a:avLst/>
+          </a:prstGeom>
+        </p:spPr>
+      </p:pic>
+      <p:sp>
+        <p:nvSpPr>
+          <p:cNvPr id="3" name="Text 0"/>
+          <p:cNvSpPr/>
+          <p:nvPr/>
+        </p:nvSpPr>
+        <p:spPr>
+          <a:xfrm>
+            <a:off x="548640" y="320040"/>
+            <a:ext cx="8869680" cy="548640"/>
+          </a:xfrm>
+          <a:prstGeom prst="rect">
+            <a:avLst/>
+          </a:prstGeom>
+          <a:noFill/>
+          <a:ln/>
+        </p:spPr>
+        <p:txBody>
+          <a:bodyPr wrap="square" rtlCol="0" anchor="ctr"/>
+          <a:lstStyle/>
+          <a:p>
+            <a:pPr indent="0" marL="0">
+              <a:buNone/>
+            </a:pPr>
+            <a:r>
+              <a:rPr lang="en-US" sz="2800" b="1" dirty="0">
+                <a:solidFill>
+                  <a:srgbClr val="122952"/>
+                </a:solidFill>
+                <a:latin typeface="Calibri" pitchFamily="34" charset="0"/>
+                <a:ea typeface="Calibri" pitchFamily="34" charset="-122"/>
+                <a:cs typeface="Calibri" pitchFamily="34" charset="-120"/>
+              </a:rPr>
+              <a:t>Revision — Key Terms</a:t>
+            </a:r>
+            <a:endParaRPr lang="en-US" sz="2800" dirty="0"/>
+          </a:p>
+        </p:txBody>
+      </p:sp>
+      <p:sp>
+        <p:nvSpPr>
+          <p:cNvPr id="4" name="Shape 1"/>
+          <p:cNvSpPr/>
+          <p:nvPr/>
+        </p:nvSpPr>
+        <p:spPr>
+          <a:xfrm>
+            <a:off x="548640" y="1161288"/>
+            <a:ext cx="5440680" cy="676656"/>
+          </a:xfrm>
+          <a:prstGeom prst="roundRect">
+            <a:avLst>
+              <a:gd name="adj" fmla="val 6757"/>
+            </a:avLst>
+          </a:prstGeom>
+          <a:solidFill>
+            <a:srgbClr val="E8EEF7"/>
+          </a:solidFill>
+          <a:ln/>
+        </p:spPr>
+      </p:sp>
+      <p:sp>
+        <p:nvSpPr>
+          <p:cNvPr id="5" name="Text 2"/>
+          <p:cNvSpPr/>
+          <p:nvPr/>
+        </p:nvSpPr>
+        <p:spPr>
+          <a:xfrm>
+            <a:off x="685800" y="1161288"/>
+            <a:ext cx="1828800" cy="676656"/>
+          </a:xfrm>
+          <a:prstGeom prst="rect">
+            <a:avLst/>
+          </a:prstGeom>
+          <a:noFill/>
+          <a:ln/>
+        </p:spPr>
+        <p:txBody>
+          <a:bodyPr wrap="square" rtlCol="0" anchor="ctr"/>
+          <a:lstStyle/>
+          <a:p>
+            <a:pPr indent="0" marL="0">
+              <a:buNone/>
+            </a:pPr>
+            <a:r>
+              <a:rPr lang="en-US" sz="1200" b="1" dirty="0">
+                <a:solidFill>
+                  <a:srgbClr val="122952"/>
+                </a:solidFill>
+                <a:latin typeface="Calibri" pitchFamily="34" charset="0"/>
+                <a:ea typeface="Calibri" pitchFamily="34" charset="-122"/>
+                <a:cs typeface="Calibri" pitchFamily="34" charset="-120"/>
+              </a:rPr>
+              <a:t>BMI</a:t>
+            </a:r>
+            <a:endParaRPr lang="en-US" sz="1200" dirty="0"/>
+          </a:p>
+        </p:txBody>
+      </p:sp>
+      <p:sp>
+        <p:nvSpPr>
+          <p:cNvPr id="6" name="Text 3"/>
+          <p:cNvSpPr/>
+          <p:nvPr/>
+        </p:nvSpPr>
+        <p:spPr>
+          <a:xfrm>
+            <a:off x="2560320" y="1161288"/>
+            <a:ext cx="3291840" cy="676656"/>
+          </a:xfrm>
+          <a:prstGeom prst="rect">
+            <a:avLst/>
+          </a:prstGeom>
+          <a:noFill/>
+          <a:ln/>
+        </p:spPr>
+        <p:txBody>
+          <a:bodyPr wrap="square" rtlCol="0" anchor="ctr"/>
+          <a:lstStyle/>
+          <a:p>
+            <a:pPr indent="0" marL="0">
+              <a:buNone/>
+            </a:pPr>
+            <a:r>
+              <a:rPr lang="en-US" sz="1100" dirty="0">
+                <a:solidFill>
+                  <a:srgbClr val="2A2A2A"/>
+                </a:solidFill>
+                <a:latin typeface="Calibri" pitchFamily="34" charset="0"/>
+                <a:ea typeface="Calibri" pitchFamily="34" charset="-122"/>
+                <a:cs typeface="Calibri" pitchFamily="34" charset="-120"/>
+              </a:rPr>
+              <a:t>Body Mass Index — a measure of body fat</a:t>
+            </a:r>
+            <a:endParaRPr lang="en-US" sz="1100" dirty="0"/>
+          </a:p>
+        </p:txBody>
+      </p:sp>
+      <p:sp>
+        <p:nvSpPr>
+          <p:cNvPr id="7" name="Shape 4"/>
+          <p:cNvSpPr/>
+          <p:nvPr/>
+        </p:nvSpPr>
+        <p:spPr>
+          <a:xfrm>
+            <a:off x="6263640" y="1161288"/>
+            <a:ext cx="5440680" cy="676656"/>
+          </a:xfrm>
+          <a:prstGeom prst="roundRect">
+            <a:avLst>
+              <a:gd name="adj" fmla="val 6757"/>
+            </a:avLst>
+          </a:prstGeom>
+          <a:solidFill>
+            <a:srgbClr val="E8EEF7"/>
+          </a:solidFill>
+          <a:ln/>
+        </p:spPr>
+      </p:sp>
+      <p:sp>
+        <p:nvSpPr>
+          <p:cNvPr id="8" name="Text 5"/>
+          <p:cNvSpPr/>
+          <p:nvPr/>
+        </p:nvSpPr>
+        <p:spPr>
+          <a:xfrm>
+            <a:off x="6400800" y="1161288"/>
+            <a:ext cx="1828800" cy="676656"/>
+          </a:xfrm>
+          <a:prstGeom prst="rect">
+            <a:avLst/>
+          </a:prstGeom>
+          <a:noFill/>
+          <a:ln/>
+        </p:spPr>
+        <p:txBody>
+          <a:bodyPr wrap="square" rtlCol="0" anchor="ctr"/>
+          <a:lstStyle/>
+          <a:p>
+            <a:pPr indent="0" marL="0">
+              <a:buNone/>
+            </a:pPr>
+            <a:r>
+              <a:rPr lang="en-US" sz="1200" b="1" dirty="0">
+                <a:solidFill>
+                  <a:srgbClr val="122952"/>
+                </a:solidFill>
+                <a:latin typeface="Calibri" pitchFamily="34" charset="0"/>
+                <a:ea typeface="Calibri" pitchFamily="34" charset="-122"/>
+                <a:cs typeface="Calibri" pitchFamily="34" charset="-120"/>
+              </a:rPr>
+              <a:t>Lung capacity</a:t>
+            </a:r>
+            <a:endParaRPr lang="en-US" sz="1200" dirty="0"/>
+          </a:p>
+        </p:txBody>
+      </p:sp>
+      <p:sp>
+        <p:nvSpPr>
+          <p:cNvPr id="9" name="Text 6"/>
+          <p:cNvSpPr/>
+          <p:nvPr/>
+        </p:nvSpPr>
+        <p:spPr>
+          <a:xfrm>
+            <a:off x="8275320" y="1161288"/>
+            <a:ext cx="3291840" cy="676656"/>
+          </a:xfrm>
+          <a:prstGeom prst="rect">
+            <a:avLst/>
+          </a:prstGeom>
+          <a:noFill/>
+          <a:ln/>
+        </p:spPr>
+        <p:txBody>
+          <a:bodyPr wrap="square" rtlCol="0" anchor="ctr"/>
+          <a:lstStyle/>
+          <a:p>
+            <a:pPr indent="0" marL="0">
+              <a:buNone/>
+            </a:pPr>
+            <a:r>
+              <a:rPr lang="en-US" sz="1100" dirty="0">
+                <a:solidFill>
+                  <a:srgbClr val="2A2A2A"/>
+                </a:solidFill>
+                <a:latin typeface="Calibri" pitchFamily="34" charset="0"/>
+                <a:ea typeface="Calibri" pitchFamily="34" charset="-122"/>
+                <a:cs typeface="Calibri" pitchFamily="34" charset="-120"/>
+              </a:rPr>
+              <a:t>Total amount of air the lungs can hold</a:t>
+            </a:r>
+            <a:endParaRPr lang="en-US" sz="1100" dirty="0"/>
+          </a:p>
+        </p:txBody>
+      </p:sp>
+      <p:sp>
+        <p:nvSpPr>
+          <p:cNvPr id="10" name="Shape 7"/>
+          <p:cNvSpPr/>
+          <p:nvPr/>
+        </p:nvSpPr>
+        <p:spPr>
+          <a:xfrm>
+            <a:off x="548640" y="1947672"/>
+            <a:ext cx="5440680" cy="676656"/>
+          </a:xfrm>
+          <a:prstGeom prst="roundRect">
+            <a:avLst>
+              <a:gd name="adj" fmla="val 6757"/>
+            </a:avLst>
+          </a:prstGeom>
+          <a:solidFill>
+            <a:srgbClr val="F7F9FC"/>
+          </a:solidFill>
+          <a:ln/>
+        </p:spPr>
+      </p:sp>
+      <p:sp>
+        <p:nvSpPr>
+          <p:cNvPr id="11" name="Text 8"/>
+          <p:cNvSpPr/>
+          <p:nvPr/>
+        </p:nvSpPr>
+        <p:spPr>
+          <a:xfrm>
+            <a:off x="685800" y="1947672"/>
+            <a:ext cx="1828800" cy="676656"/>
+          </a:xfrm>
+          <a:prstGeom prst="rect">
+            <a:avLst/>
+          </a:prstGeom>
+          <a:noFill/>
+          <a:ln/>
+        </p:spPr>
+        <p:txBody>
+          <a:bodyPr wrap="square" rtlCol="0" anchor="ctr"/>
+          <a:lstStyle/>
+          <a:p>
+            <a:pPr indent="0" marL="0">
+              <a:buNone/>
+            </a:pPr>
+            <a:r>
+              <a:rPr lang="en-US" sz="1200" b="1" dirty="0">
+                <a:solidFill>
+                  <a:srgbClr val="122952"/>
+                </a:solidFill>
+                <a:latin typeface="Calibri" pitchFamily="34" charset="0"/>
+                <a:ea typeface="Calibri" pitchFamily="34" charset="-122"/>
+                <a:cs typeface="Calibri" pitchFamily="34" charset="-120"/>
+              </a:rPr>
+              <a:t>Aerobic exercise</a:t>
+            </a:r>
+            <a:endParaRPr lang="en-US" sz="1200" dirty="0"/>
+          </a:p>
+        </p:txBody>
+      </p:sp>
+      <p:sp>
+        <p:nvSpPr>
+          <p:cNvPr id="12" name="Text 9"/>
+          <p:cNvSpPr/>
+          <p:nvPr/>
+        </p:nvSpPr>
+        <p:spPr>
+          <a:xfrm>
+            <a:off x="2560320" y="1947672"/>
+            <a:ext cx="3291840" cy="676656"/>
+          </a:xfrm>
+          <a:prstGeom prst="rect">
+            <a:avLst/>
+          </a:prstGeom>
+          <a:noFill/>
+          <a:ln/>
+        </p:spPr>
+        <p:txBody>
+          <a:bodyPr wrap="square" rtlCol="0" anchor="ctr"/>
+          <a:lstStyle/>
+          <a:p>
+            <a:pPr indent="0" marL="0">
+              <a:buNone/>
+            </a:pPr>
+            <a:r>
+              <a:rPr lang="en-US" sz="1100" dirty="0">
+                <a:solidFill>
+                  <a:srgbClr val="2A2A2A"/>
+                </a:solidFill>
+                <a:latin typeface="Calibri" pitchFamily="34" charset="0"/>
+                <a:ea typeface="Calibri" pitchFamily="34" charset="-122"/>
+                <a:cs typeface="Calibri" pitchFamily="34" charset="-120"/>
+              </a:rPr>
+              <a:t>Sustained exercise using oxygen for energy</a:t>
+            </a:r>
+            <a:endParaRPr lang="en-US" sz="1100" dirty="0"/>
+          </a:p>
+        </p:txBody>
+      </p:sp>
+      <p:sp>
+        <p:nvSpPr>
+          <p:cNvPr id="13" name="Shape 10"/>
+          <p:cNvSpPr/>
+          <p:nvPr/>
+        </p:nvSpPr>
+        <p:spPr>
+          <a:xfrm>
+            <a:off x="6263640" y="1947672"/>
+            <a:ext cx="5440680" cy="676656"/>
+          </a:xfrm>
+          <a:prstGeom prst="roundRect">
+            <a:avLst>
+              <a:gd name="adj" fmla="val 6757"/>
+            </a:avLst>
+          </a:prstGeom>
+          <a:solidFill>
+            <a:srgbClr val="F7F9FC"/>
+          </a:solidFill>
+          <a:ln/>
+        </p:spPr>
+      </p:sp>
+      <p:sp>
+        <p:nvSpPr>
+          <p:cNvPr id="14" name="Text 11"/>
+          <p:cNvSpPr/>
+          <p:nvPr/>
+        </p:nvSpPr>
+        <p:spPr>
+          <a:xfrm>
+            <a:off x="6400800" y="1947672"/>
+            <a:ext cx="1828800" cy="676656"/>
+          </a:xfrm>
+          <a:prstGeom prst="rect">
+            <a:avLst/>
+          </a:prstGeom>
+          <a:noFill/>
+          <a:ln/>
+        </p:spPr>
+        <p:txBody>
+          <a:bodyPr wrap="square" rtlCol="0" anchor="ctr"/>
+          <a:lstStyle/>
+          <a:p>
+            <a:pPr indent="0" marL="0">
+              <a:buNone/>
+            </a:pPr>
+            <a:r>
+              <a:rPr lang="en-US" sz="1200" b="1" dirty="0">
+                <a:solidFill>
+                  <a:srgbClr val="122952"/>
+                </a:solidFill>
+                <a:latin typeface="Calibri" pitchFamily="34" charset="0"/>
+                <a:ea typeface="Calibri" pitchFamily="34" charset="-122"/>
+                <a:cs typeface="Calibri" pitchFamily="34" charset="-120"/>
+              </a:rPr>
+              <a:t>Bleep test</a:t>
+            </a:r>
+            <a:endParaRPr lang="en-US" sz="1200" dirty="0"/>
+          </a:p>
+        </p:txBody>
+      </p:sp>
+      <p:sp>
+        <p:nvSpPr>
+          <p:cNvPr id="15" name="Text 12"/>
+          <p:cNvSpPr/>
+          <p:nvPr/>
+        </p:nvSpPr>
+        <p:spPr>
+          <a:xfrm>
+            <a:off x="8275320" y="1947672"/>
+            <a:ext cx="3291840" cy="676656"/>
+          </a:xfrm>
+          <a:prstGeom prst="rect">
+            <a:avLst/>
+          </a:prstGeom>
+          <a:noFill/>
+          <a:ln/>
+        </p:spPr>
+        <p:txBody>
+          <a:bodyPr wrap="square" rtlCol="0" anchor="ctr"/>
+          <a:lstStyle/>
+          <a:p>
+            <a:pPr indent="0" marL="0">
+              <a:buNone/>
+            </a:pPr>
+            <a:r>
+              <a:rPr lang="en-US" sz="1100" dirty="0">
+                <a:solidFill>
+                  <a:srgbClr val="2A2A2A"/>
+                </a:solidFill>
+                <a:latin typeface="Calibri" pitchFamily="34" charset="0"/>
+                <a:ea typeface="Calibri" pitchFamily="34" charset="-122"/>
+                <a:cs typeface="Calibri" pitchFamily="34" charset="-120"/>
+              </a:rPr>
+              <a:t>Multi-stage fitness test for aerobic capacity</a:t>
+            </a:r>
+            <a:endParaRPr lang="en-US" sz="1100" dirty="0"/>
+          </a:p>
+        </p:txBody>
+      </p:sp>
+      <p:sp>
+        <p:nvSpPr>
+          <p:cNvPr id="16" name="Shape 13"/>
+          <p:cNvSpPr/>
+          <p:nvPr/>
+        </p:nvSpPr>
+        <p:spPr>
+          <a:xfrm>
+            <a:off x="548640" y="2734056"/>
+            <a:ext cx="5440680" cy="676656"/>
+          </a:xfrm>
+          <a:prstGeom prst="roundRect">
+            <a:avLst>
+              <a:gd name="adj" fmla="val 6757"/>
+            </a:avLst>
+          </a:prstGeom>
+          <a:solidFill>
+            <a:srgbClr val="E8EEF7"/>
+          </a:solidFill>
+          <a:ln/>
+        </p:spPr>
+      </p:sp>
+      <p:sp>
+        <p:nvSpPr>
+          <p:cNvPr id="17" name="Text 14"/>
+          <p:cNvSpPr/>
+          <p:nvPr/>
+        </p:nvSpPr>
+        <p:spPr>
+          <a:xfrm>
+            <a:off x="685800" y="2734056"/>
+            <a:ext cx="1828800" cy="676656"/>
+          </a:xfrm>
+          <a:prstGeom prst="rect">
+            <a:avLst/>
+          </a:prstGeom>
+          <a:noFill/>
+          <a:ln/>
+        </p:spPr>
+        <p:txBody>
+          <a:bodyPr wrap="square" rtlCol="0" anchor="ctr"/>
+          <a:lstStyle/>
+          <a:p>
+            <a:pPr indent="0" marL="0">
+              <a:buNone/>
+            </a:pPr>
+            <a:r>
+              <a:rPr lang="en-US" sz="1200" b="1" dirty="0">
+                <a:solidFill>
+                  <a:srgbClr val="122952"/>
+                </a:solidFill>
+                <a:latin typeface="Calibri" pitchFamily="34" charset="0"/>
+                <a:ea typeface="Calibri" pitchFamily="34" charset="-122"/>
+                <a:cs typeface="Calibri" pitchFamily="34" charset="-120"/>
+              </a:rPr>
+              <a:t>Warm-up</a:t>
+            </a:r>
+            <a:endParaRPr lang="en-US" sz="1200" dirty="0"/>
+          </a:p>
+        </p:txBody>
+      </p:sp>
+      <p:sp>
+        <p:nvSpPr>
+          <p:cNvPr id="18" name="Text 15"/>
+          <p:cNvSpPr/>
+          <p:nvPr/>
+        </p:nvSpPr>
+        <p:spPr>
+          <a:xfrm>
+            <a:off x="2560320" y="2734056"/>
+            <a:ext cx="3291840" cy="676656"/>
+          </a:xfrm>
+          <a:prstGeom prst="rect">
+            <a:avLst/>
+          </a:prstGeom>
+          <a:noFill/>
+          <a:ln/>
+        </p:spPr>
+        <p:txBody>
+          <a:bodyPr wrap="square" rtlCol="0" anchor="ctr"/>
+          <a:lstStyle/>
+          <a:p>
+            <a:pPr indent="0" marL="0">
+              <a:buNone/>
+            </a:pPr>
+            <a:r>
+              <a:rPr lang="en-US" sz="1100" dirty="0">
+                <a:solidFill>
+                  <a:srgbClr val="2A2A2A"/>
+                </a:solidFill>
+                <a:latin typeface="Calibri" pitchFamily="34" charset="0"/>
+                <a:ea typeface="Calibri" pitchFamily="34" charset="-122"/>
+                <a:cs typeface="Calibri" pitchFamily="34" charset="-120"/>
+              </a:rPr>
+              <a:t>Stretching and pulse-raising before exercise</a:t>
+            </a:r>
+            <a:endParaRPr lang="en-US" sz="1100" dirty="0"/>
+          </a:p>
+        </p:txBody>
+      </p:sp>
+      <p:sp>
+        <p:nvSpPr>
+          <p:cNvPr id="19" name="Shape 16"/>
+          <p:cNvSpPr/>
+          <p:nvPr/>
+        </p:nvSpPr>
+        <p:spPr>
+          <a:xfrm>
+            <a:off x="6263640" y="2734056"/>
+            <a:ext cx="5440680" cy="676656"/>
+          </a:xfrm>
+          <a:prstGeom prst="roundRect">
+            <a:avLst>
+              <a:gd name="adj" fmla="val 6757"/>
+            </a:avLst>
+          </a:prstGeom>
+          <a:solidFill>
+            <a:srgbClr val="E8EEF7"/>
+          </a:solidFill>
+          <a:ln/>
+        </p:spPr>
+      </p:sp>
+      <p:sp>
+        <p:nvSpPr>
+          <p:cNvPr id="20" name="Text 17"/>
+          <p:cNvSpPr/>
+          <p:nvPr/>
+        </p:nvSpPr>
+        <p:spPr>
+          <a:xfrm>
+            <a:off x="6400800" y="2734056"/>
+            <a:ext cx="1828800" cy="676656"/>
+          </a:xfrm>
+          <a:prstGeom prst="rect">
+            <a:avLst/>
+          </a:prstGeom>
+          <a:noFill/>
+          <a:ln/>
+        </p:spPr>
+        <p:txBody>
+          <a:bodyPr wrap="square" rtlCol="0" anchor="ctr"/>
+          <a:lstStyle/>
+          <a:p>
+            <a:pPr indent="0" marL="0">
+              <a:buNone/>
+            </a:pPr>
+            <a:r>
+              <a:rPr lang="en-US" sz="1200" b="1" dirty="0">
+                <a:solidFill>
+                  <a:srgbClr val="122952"/>
+                </a:solidFill>
+                <a:latin typeface="Calibri" pitchFamily="34" charset="0"/>
+                <a:ea typeface="Calibri" pitchFamily="34" charset="-122"/>
+                <a:cs typeface="Calibri" pitchFamily="34" charset="-120"/>
+              </a:rPr>
+              <a:t>Cool-down</a:t>
+            </a:r>
+            <a:endParaRPr lang="en-US" sz="1200" dirty="0"/>
+          </a:p>
+        </p:txBody>
+      </p:sp>
+      <p:sp>
+        <p:nvSpPr>
+          <p:cNvPr id="21" name="Text 18"/>
+          <p:cNvSpPr/>
+          <p:nvPr/>
+        </p:nvSpPr>
+        <p:spPr>
+          <a:xfrm>
+            <a:off x="8275320" y="2734056"/>
+            <a:ext cx="3291840" cy="676656"/>
+          </a:xfrm>
+          <a:prstGeom prst="rect">
+            <a:avLst/>
+          </a:prstGeom>
+          <a:noFill/>
+          <a:ln/>
+        </p:spPr>
+        <p:txBody>
+          <a:bodyPr wrap="square" rtlCol="0" anchor="ctr"/>
+          <a:lstStyle/>
+          <a:p>
+            <a:pPr indent="0" marL="0">
+              <a:buNone/>
+            </a:pPr>
+            <a:r>
+              <a:rPr lang="en-US" sz="1100" dirty="0">
+                <a:solidFill>
+                  <a:srgbClr val="2A2A2A"/>
+                </a:solidFill>
+                <a:latin typeface="Calibri" pitchFamily="34" charset="0"/>
+                <a:ea typeface="Calibri" pitchFamily="34" charset="-122"/>
+                <a:cs typeface="Calibri" pitchFamily="34" charset="-120"/>
+              </a:rPr>
+              <a:t>Stretching and recovery after exercise</a:t>
+            </a:r>
+            <a:endParaRPr lang="en-US" sz="1100" dirty="0"/>
+          </a:p>
+        </p:txBody>
+      </p:sp>
+      <p:sp>
+        <p:nvSpPr>
+          <p:cNvPr id="22" name="Shape 19"/>
+          <p:cNvSpPr/>
+          <p:nvPr/>
+        </p:nvSpPr>
+        <p:spPr>
+          <a:xfrm>
+            <a:off x="548640" y="3520440"/>
+            <a:ext cx="5440680" cy="676656"/>
+          </a:xfrm>
+          <a:prstGeom prst="roundRect">
+            <a:avLst>
+              <a:gd name="adj" fmla="val 6757"/>
+            </a:avLst>
+          </a:prstGeom>
+          <a:solidFill>
+            <a:srgbClr val="F7F9FC"/>
+          </a:solidFill>
+          <a:ln/>
+        </p:spPr>
+      </p:sp>
+      <p:sp>
+        <p:nvSpPr>
+          <p:cNvPr id="23" name="Text 20"/>
+          <p:cNvSpPr/>
+          <p:nvPr/>
+        </p:nvSpPr>
+        <p:spPr>
+          <a:xfrm>
+            <a:off x="685800" y="3520440"/>
+            <a:ext cx="1828800" cy="676656"/>
+          </a:xfrm>
+          <a:prstGeom prst="rect">
+            <a:avLst/>
+          </a:prstGeom>
+          <a:noFill/>
+          <a:ln/>
+        </p:spPr>
+        <p:txBody>
+          <a:bodyPr wrap="square" rtlCol="0" anchor="ctr"/>
+          <a:lstStyle/>
+          <a:p>
+            <a:pPr indent="0" marL="0">
+              <a:buNone/>
+            </a:pPr>
+            <a:r>
+              <a:rPr lang="en-US" sz="1200" b="1" dirty="0">
+                <a:solidFill>
+                  <a:srgbClr val="122952"/>
+                </a:solidFill>
+                <a:latin typeface="Calibri" pitchFamily="34" charset="0"/>
+                <a:ea typeface="Calibri" pitchFamily="34" charset="-122"/>
+                <a:cs typeface="Calibri" pitchFamily="34" charset="-120"/>
+              </a:rPr>
+              <a:t>Frequency</a:t>
+            </a:r>
+            <a:endParaRPr lang="en-US" sz="1200" dirty="0"/>
+          </a:p>
+        </p:txBody>
+      </p:sp>
+      <p:sp>
+        <p:nvSpPr>
+          <p:cNvPr id="24" name="Text 21"/>
+          <p:cNvSpPr/>
+          <p:nvPr/>
+        </p:nvSpPr>
+        <p:spPr>
+          <a:xfrm>
+            <a:off x="2560320" y="3520440"/>
+            <a:ext cx="3291840" cy="676656"/>
+          </a:xfrm>
+          <a:prstGeom prst="rect">
+            <a:avLst/>
+          </a:prstGeom>
+          <a:noFill/>
+          <a:ln/>
+        </p:spPr>
+        <p:txBody>
+          <a:bodyPr wrap="square" rtlCol="0" anchor="ctr"/>
+          <a:lstStyle/>
+          <a:p>
+            <a:pPr indent="0" marL="0">
+              <a:buNone/>
+            </a:pPr>
+            <a:r>
+              <a:rPr lang="en-US" sz="1100" dirty="0">
+                <a:solidFill>
+                  <a:srgbClr val="2A2A2A"/>
+                </a:solidFill>
+                <a:latin typeface="Calibri" pitchFamily="34" charset="0"/>
+                <a:ea typeface="Calibri" pitchFamily="34" charset="-122"/>
+                <a:cs typeface="Calibri" pitchFamily="34" charset="-120"/>
+              </a:rPr>
+              <a:t>How often a session is carried out</a:t>
+            </a:r>
+            <a:endParaRPr lang="en-US" sz="1100" dirty="0"/>
+          </a:p>
+        </p:txBody>
+      </p:sp>
+      <p:sp>
+        <p:nvSpPr>
+          <p:cNvPr id="25" name="Shape 22"/>
+          <p:cNvSpPr/>
+          <p:nvPr/>
+        </p:nvSpPr>
+        <p:spPr>
+          <a:xfrm>
+            <a:off x="6263640" y="3520440"/>
+            <a:ext cx="5440680" cy="676656"/>
+          </a:xfrm>
+          <a:prstGeom prst="roundRect">
+            <a:avLst>
+              <a:gd name="adj" fmla="val 6757"/>
+            </a:avLst>
+          </a:prstGeom>
+          <a:solidFill>
+            <a:srgbClr val="F7F9FC"/>
+          </a:solidFill>
+          <a:ln/>
+        </p:spPr>
+      </p:sp>
+      <p:sp>
+        <p:nvSpPr>
+          <p:cNvPr id="26" name="Text 23"/>
+          <p:cNvSpPr/>
+          <p:nvPr/>
+        </p:nvSpPr>
+        <p:spPr>
+          <a:xfrm>
+            <a:off x="6400800" y="3520440"/>
+            <a:ext cx="1828800" cy="676656"/>
+          </a:xfrm>
+          <a:prstGeom prst="rect">
+            <a:avLst/>
+          </a:prstGeom>
+          <a:noFill/>
+          <a:ln/>
+        </p:spPr>
+        <p:txBody>
+          <a:bodyPr wrap="square" rtlCol="0" anchor="ctr"/>
+          <a:lstStyle/>
+          <a:p>
+            <a:pPr indent="0" marL="0">
+              <a:buNone/>
+            </a:pPr>
+            <a:r>
+              <a:rPr lang="en-US" sz="1200" b="1" dirty="0">
+                <a:solidFill>
+                  <a:srgbClr val="122952"/>
+                </a:solidFill>
+                <a:latin typeface="Calibri" pitchFamily="34" charset="0"/>
+                <a:ea typeface="Calibri" pitchFamily="34" charset="-122"/>
+                <a:cs typeface="Calibri" pitchFamily="34" charset="-120"/>
+              </a:rPr>
+              <a:t>Intensity</a:t>
+            </a:r>
+            <a:endParaRPr lang="en-US" sz="1200" dirty="0"/>
+          </a:p>
+        </p:txBody>
+      </p:sp>
+      <p:sp>
+        <p:nvSpPr>
+          <p:cNvPr id="27" name="Text 24"/>
+          <p:cNvSpPr/>
+          <p:nvPr/>
+        </p:nvSpPr>
+        <p:spPr>
+          <a:xfrm>
+            <a:off x="8275320" y="3520440"/>
+            <a:ext cx="3291840" cy="676656"/>
+          </a:xfrm>
+          <a:prstGeom prst="rect">
+            <a:avLst/>
+          </a:prstGeom>
+          <a:noFill/>
+          <a:ln/>
+        </p:spPr>
+        <p:txBody>
+          <a:bodyPr wrap="square" rtlCol="0" anchor="ctr"/>
+          <a:lstStyle/>
+          <a:p>
+            <a:pPr indent="0" marL="0">
+              <a:buNone/>
+            </a:pPr>
+            <a:r>
+              <a:rPr lang="en-US" sz="1100" dirty="0">
+                <a:solidFill>
+                  <a:srgbClr val="2A2A2A"/>
+                </a:solidFill>
+                <a:latin typeface="Calibri" pitchFamily="34" charset="0"/>
+                <a:ea typeface="Calibri" pitchFamily="34" charset="-122"/>
+                <a:cs typeface="Calibri" pitchFamily="34" charset="-120"/>
+              </a:rPr>
+              <a:t>How hard a session is</a:t>
+            </a:r>
+            <a:endParaRPr lang="en-US" sz="1100" dirty="0"/>
+          </a:p>
+        </p:txBody>
+      </p:sp>
+      <p:sp>
+        <p:nvSpPr>
+          <p:cNvPr id="28" name="Shape 25"/>
+          <p:cNvSpPr/>
+          <p:nvPr/>
+        </p:nvSpPr>
+        <p:spPr>
+          <a:xfrm>
+            <a:off x="548640" y="4306824"/>
+            <a:ext cx="5440680" cy="676656"/>
+          </a:xfrm>
+          <a:prstGeom prst="roundRect">
+            <a:avLst>
+              <a:gd name="adj" fmla="val 6757"/>
+            </a:avLst>
+          </a:prstGeom>
+          <a:solidFill>
+            <a:srgbClr val="E8EEF7"/>
+          </a:solidFill>
+          <a:ln/>
+        </p:spPr>
+      </p:sp>
+      <p:sp>
+        <p:nvSpPr>
+          <p:cNvPr id="29" name="Text 26"/>
+          <p:cNvSpPr/>
+          <p:nvPr/>
+        </p:nvSpPr>
+        <p:spPr>
+          <a:xfrm>
+            <a:off x="685800" y="4306824"/>
+            <a:ext cx="1828800" cy="676656"/>
+          </a:xfrm>
+          <a:prstGeom prst="rect">
+            <a:avLst/>
+          </a:prstGeom>
+          <a:noFill/>
+          <a:ln/>
+        </p:spPr>
+        <p:txBody>
+          <a:bodyPr wrap="square" rtlCol="0" anchor="ctr"/>
+          <a:lstStyle/>
+          <a:p>
+            <a:pPr indent="0" marL="0">
+              <a:buNone/>
+            </a:pPr>
+            <a:r>
+              <a:rPr lang="en-US" sz="1200" b="1" dirty="0">
+                <a:solidFill>
+                  <a:srgbClr val="122952"/>
+                </a:solidFill>
+                <a:latin typeface="Calibri" pitchFamily="34" charset="0"/>
+                <a:ea typeface="Calibri" pitchFamily="34" charset="-122"/>
+                <a:cs typeface="Calibri" pitchFamily="34" charset="-120"/>
+              </a:rPr>
+              <a:t>Duration</a:t>
+            </a:r>
+            <a:endParaRPr lang="en-US" sz="1200" dirty="0"/>
+          </a:p>
+        </p:txBody>
+      </p:sp>
+      <p:sp>
+        <p:nvSpPr>
+          <p:cNvPr id="30" name="Text 27"/>
+          <p:cNvSpPr/>
+          <p:nvPr/>
+        </p:nvSpPr>
+        <p:spPr>
+          <a:xfrm>
+            <a:off x="2560320" y="4306824"/>
+            <a:ext cx="3291840" cy="676656"/>
+          </a:xfrm>
+          <a:prstGeom prst="rect">
+            <a:avLst/>
+          </a:prstGeom>
+          <a:noFill/>
+          <a:ln/>
+        </p:spPr>
+        <p:txBody>
+          <a:bodyPr wrap="square" rtlCol="0" anchor="ctr"/>
+          <a:lstStyle/>
+          <a:p>
+            <a:pPr indent="0" marL="0">
+              <a:buNone/>
+            </a:pPr>
+            <a:r>
+              <a:rPr lang="en-US" sz="1100" dirty="0">
+                <a:solidFill>
+                  <a:srgbClr val="2A2A2A"/>
+                </a:solidFill>
+                <a:latin typeface="Calibri" pitchFamily="34" charset="0"/>
+                <a:ea typeface="Calibri" pitchFamily="34" charset="-122"/>
+                <a:cs typeface="Calibri" pitchFamily="34" charset="-120"/>
+              </a:rPr>
+              <a:t>How long a session lasts</a:t>
+            </a:r>
+            <a:endParaRPr lang="en-US" sz="1100" dirty="0"/>
+          </a:p>
+        </p:txBody>
+      </p:sp>
+      <p:sp>
+        <p:nvSpPr>
+          <p:cNvPr id="31" name="Shape 28"/>
+          <p:cNvSpPr/>
+          <p:nvPr/>
+        </p:nvSpPr>
+        <p:spPr>
+          <a:xfrm>
+            <a:off x="6263640" y="4306824"/>
+            <a:ext cx="5440680" cy="676656"/>
+          </a:xfrm>
+          <a:prstGeom prst="roundRect">
+            <a:avLst>
+              <a:gd name="adj" fmla="val 6757"/>
+            </a:avLst>
+          </a:prstGeom>
+          <a:solidFill>
+            <a:srgbClr val="E8EEF7"/>
+          </a:solidFill>
+          <a:ln/>
+        </p:spPr>
+      </p:sp>
+      <p:sp>
+        <p:nvSpPr>
+          <p:cNvPr id="32" name="Text 29"/>
+          <p:cNvSpPr/>
+          <p:nvPr/>
+        </p:nvSpPr>
+        <p:spPr>
+          <a:xfrm>
+            <a:off x="6400800" y="4306824"/>
+            <a:ext cx="1828800" cy="676656"/>
+          </a:xfrm>
+          <a:prstGeom prst="rect">
+            <a:avLst/>
+          </a:prstGeom>
+          <a:noFill/>
+          <a:ln/>
+        </p:spPr>
+        <p:txBody>
+          <a:bodyPr wrap="square" rtlCol="0" anchor="ctr"/>
+          <a:lstStyle/>
+          <a:p>
+            <a:pPr indent="0" marL="0">
+              <a:buNone/>
+            </a:pPr>
+            <a:r>
+              <a:rPr lang="en-US" sz="1200" b="1" dirty="0">
+                <a:solidFill>
+                  <a:srgbClr val="122952"/>
+                </a:solidFill>
+                <a:latin typeface="Calibri" pitchFamily="34" charset="0"/>
+                <a:ea typeface="Calibri" pitchFamily="34" charset="-122"/>
+                <a:cs typeface="Calibri" pitchFamily="34" charset="-120"/>
+              </a:rPr>
+              <a:t>Self-evaluation</a:t>
+            </a:r>
+            <a:endParaRPr lang="en-US" sz="1200" dirty="0"/>
+          </a:p>
+        </p:txBody>
+      </p:sp>
+      <p:sp>
+        <p:nvSpPr>
+          <p:cNvPr id="33" name="Text 30"/>
+          <p:cNvSpPr/>
+          <p:nvPr/>
+        </p:nvSpPr>
+        <p:spPr>
+          <a:xfrm>
+            <a:off x="8275320" y="4306824"/>
+            <a:ext cx="3291840" cy="676656"/>
+          </a:xfrm>
+          <a:prstGeom prst="rect">
+            <a:avLst/>
+          </a:prstGeom>
+          <a:noFill/>
+          <a:ln/>
+        </p:spPr>
+        <p:txBody>
+          <a:bodyPr wrap="square" rtlCol="0" anchor="ctr"/>
+          <a:lstStyle/>
+          <a:p>
+            <a:pPr indent="0" marL="0">
+              <a:buNone/>
+            </a:pPr>
+            <a:r>
+              <a:rPr lang="en-US" sz="1100" dirty="0">
+                <a:solidFill>
+                  <a:srgbClr val="2A2A2A"/>
+                </a:solidFill>
+                <a:latin typeface="Calibri" pitchFamily="34" charset="0"/>
+                <a:ea typeface="Calibri" pitchFamily="34" charset="-122"/>
+                <a:cs typeface="Calibri" pitchFamily="34" charset="-120"/>
+              </a:rPr>
+              <a:t>Judging your own performance</a:t>
+            </a:r>
+            <a:endParaRPr lang="en-US" sz="1100" dirty="0"/>
+          </a:p>
+        </p:txBody>
+      </p:sp>
+      <p:sp>
+        <p:nvSpPr>
+          <p:cNvPr id="34" name="Shape 31"/>
+          <p:cNvSpPr/>
+          <p:nvPr/>
+        </p:nvSpPr>
+        <p:spPr>
+          <a:xfrm>
+            <a:off x="0" y="6537960"/>
+            <a:ext cx="12188952" cy="320040"/>
+          </a:xfrm>
+          <a:prstGeom prst="rect">
+            <a:avLst/>
+          </a:prstGeom>
+          <a:solidFill>
+            <a:srgbClr val="1B3A6B"/>
+          </a:solidFill>
+          <a:ln/>
+        </p:spPr>
+      </p:sp>
+      <p:sp>
+        <p:nvSpPr>
+          <p:cNvPr id="35" name="Text 32"/>
+          <p:cNvSpPr/>
+          <p:nvPr/>
+        </p:nvSpPr>
+        <p:spPr>
+          <a:xfrm>
+            <a:off x="274320" y="6537960"/>
+            <a:ext cx="3657600" cy="320040"/>
+          </a:xfrm>
+          <a:prstGeom prst="rect">
+            <a:avLst/>
+          </a:prstGeom>
+          <a:noFill/>
+          <a:ln/>
+        </p:spPr>
+        <p:txBody>
+          <a:bodyPr wrap="square" rtlCol="0" anchor="ctr"/>
+          <a:lstStyle/>
+          <a:p>
+            <a:pPr indent="0" marL="0">
+              <a:buNone/>
+            </a:pPr>
+            <a:r>
+              <a:rPr lang="en-US" sz="1000" dirty="0">
+                <a:solidFill>
+                  <a:srgbClr val="FFFFFF"/>
+                </a:solidFill>
+                <a:latin typeface="Calibri" pitchFamily="34" charset="0"/>
+                <a:ea typeface="Calibri" pitchFamily="34" charset="-122"/>
+                <a:cs typeface="Calibri" pitchFamily="34" charset="-120"/>
+              </a:rPr>
+              <a:t>PS6</a:t>
+            </a:r>
+            <a:endParaRPr lang="en-US" sz="1000" dirty="0"/>
+          </a:p>
+        </p:txBody>
+      </p:sp>
+      <p:sp>
+        <p:nvSpPr>
+          <p:cNvPr id="36" name="Text 33"/>
+          <p:cNvSpPr/>
+          <p:nvPr/>
+        </p:nvSpPr>
+        <p:spPr>
+          <a:xfrm>
+            <a:off x="7772400" y="6537960"/>
+            <a:ext cx="4114800" cy="320040"/>
+          </a:xfrm>
+          <a:prstGeom prst="rect">
+            <a:avLst/>
+          </a:prstGeom>
+          <a:noFill/>
+          <a:ln/>
+        </p:spPr>
+        <p:txBody>
+          <a:bodyPr wrap="square" rtlCol="0" anchor="ctr"/>
+          <a:lstStyle/>
+          <a:p>
+            <a:pPr algn="r" indent="0" marL="0">
+              <a:buNone/>
+            </a:pPr>
+            <a:r>
+              <a:rPr lang="en-US" sz="1000" dirty="0">
+                <a:solidFill>
+                  <a:srgbClr val="FFFFFF"/>
+                </a:solidFill>
+                <a:latin typeface="Calibri" pitchFamily="34" charset="0"/>
+                <a:ea typeface="Calibri" pitchFamily="34" charset="-122"/>
+                <a:cs typeface="Calibri" pitchFamily="34" charset="-120"/>
+              </a:rPr>
+              <a:t>Revision Summary</a:t>
+            </a:r>
+            <a:endParaRPr lang="en-US" sz="1000" dirty="0"/>
+          </a:p>
+        </p:txBody>
+      </p:sp>
+    </p:spTree>
+  </p:cSld>
+  <p:clrMapOvr>
+    <a:masterClrMapping/>
+  </p:clrMapOvr>
+</p:sld>
+</file>
+
+<file path=ppt/slides/slide13.xml><?xml version="1.0" encoding="utf-8"?>
+<p:sld xmlns:a="http://schemas.openxmlformats.org/drawingml/2006/main" xmlns:r="http://schemas.openxmlformats.org/officeDocument/2006/relationships" xmlns:p="http://schemas.openxmlformats.org/presentationml/2006/main">
+  <p:cSld name="Slide 13">
     <p:spTree>
       <p:nvGrpSpPr>
         <p:cNvPr id="1" name=""/>
@@ -3201,7 +6156,7 @@
               <a:buNone/>
             </a:pPr>
             <a:r>
-              <a:rPr lang="en-US" sz="3000" b="1" dirty="0">
+              <a:rPr lang="en-US" sz="3200" b="1" dirty="0">
                 <a:solidFill>
                   <a:srgbClr val="FFFFFF"/>
                 </a:solidFill>
@@ -3211,7 +6166,7 @@
               </a:rPr>
               <a:t>Plan and Take Part in Fitness Testing Activities</a:t>
             </a:r>
-            <a:endParaRPr lang="en-US" sz="3000" dirty="0"/>
+            <a:endParaRPr lang="en-US" sz="3200" dirty="0"/>
           </a:p>
         </p:txBody>
       </p:sp>
@@ -3373,7 +6328,7 @@
         <p:spPr>
           <a:xfrm>
             <a:off x="548640" y="320040"/>
-            <a:ext cx="8869680" cy="640080"/>
+            <a:ext cx="8869680" cy="822960"/>
           </a:xfrm>
           <a:prstGeom prst="rect">
             <a:avLst/>
@@ -3397,7 +6352,7 @@
                 <a:ea typeface="Calibri" pitchFamily="34" charset="-122"/>
                 <a:cs typeface="Calibri" pitchFamily="34" charset="-120"/>
               </a:rPr>
-              <a:t>Health and Fitness Requirements by Service</a:t>
+              <a:t>Why Do Public Services Fitness-Test at All?</a:t>
             </a:r>
             <a:endParaRPr lang="en-US" sz="2500" dirty="0"/>
           </a:p>
@@ -3405,18 +6360,57 @@
       </p:sp>
       <p:sp>
         <p:nvSpPr>
-          <p:cNvPr id="6" name="Shape 3"/>
-          <p:cNvSpPr/>
-          <p:nvPr/>
-        </p:nvSpPr>
-        <p:spPr>
-          <a:xfrm>
-            <a:off x="548640" y="1188720"/>
-            <a:ext cx="11064240" cy="960120"/>
+          <p:cNvPr id="6" name="Text 3"/>
+          <p:cNvSpPr/>
+          <p:nvPr/>
+        </p:nvSpPr>
+        <p:spPr>
+          <a:xfrm>
+            <a:off x="548640" y="1051560"/>
+            <a:ext cx="10789920" cy="411480"/>
+          </a:xfrm>
+          <a:prstGeom prst="rect">
+            <a:avLst/>
+          </a:prstGeom>
+          <a:noFill/>
+          <a:ln/>
+        </p:spPr>
+        <p:txBody>
+          <a:bodyPr wrap="square" rtlCol="0" anchor="ctr"/>
+          <a:lstStyle/>
+          <a:p>
+            <a:pPr indent="0" marL="0">
+              <a:buNone/>
+            </a:pPr>
+            <a:r>
+              <a:rPr lang="en-US" sz="1400" i="1" dirty="0">
+                <a:solidFill>
+                  <a:srgbClr val="6B7B8C"/>
+                </a:solidFill>
+                <a:latin typeface="Calibri" pitchFamily="34" charset="0"/>
+                <a:ea typeface="Calibri" pitchFamily="34" charset="-122"/>
+                <a:cs typeface="Calibri" pitchFamily="34" charset="-120"/>
+              </a:rPr>
+              <a:t>It isn't a hurdle for its own sake — it's evidence a recruit can do the job safely.</a:t>
+            </a:r>
+            <a:endParaRPr lang="en-US" sz="1400" dirty="0"/>
+          </a:p>
+        </p:txBody>
+      </p:sp>
+      <p:sp>
+        <p:nvSpPr>
+          <p:cNvPr id="7" name="Shape 4"/>
+          <p:cNvSpPr/>
+          <p:nvPr/>
+        </p:nvSpPr>
+        <p:spPr>
+          <a:xfrm>
+            <a:off x="548640" y="1691640"/>
+            <a:ext cx="11064240" cy="1234440"/>
           </a:xfrm>
           <a:prstGeom prst="roundRect">
             <a:avLst>
-              <a:gd name="adj" fmla="val 5714"/>
+              <a:gd name="adj" fmla="val 4444"/>
             </a:avLst>
           </a:prstGeom>
           <a:solidFill>
@@ -3427,30 +6421,30 @@
       </p:sp>
       <p:sp>
         <p:nvSpPr>
-          <p:cNvPr id="7" name="Text 4"/>
-          <p:cNvSpPr/>
-          <p:nvPr/>
-        </p:nvSpPr>
-        <p:spPr>
-          <a:xfrm>
-            <a:off x="822960" y="1280160"/>
-            <a:ext cx="3108960" cy="777240"/>
-          </a:xfrm>
-          <a:prstGeom prst="rect">
-            <a:avLst/>
-          </a:prstGeom>
-          <a:noFill/>
-          <a:ln/>
-        </p:spPr>
-        <p:txBody>
-          <a:bodyPr wrap="square" rtlCol="0" anchor="ctr"/>
-          <a:lstStyle/>
-          <a:p>
-            <a:pPr indent="0" marL="0">
-              <a:buNone/>
-            </a:pPr>
-            <a:r>
-              <a:rPr lang="en-US" sz="1500" b="1" dirty="0">
+          <p:cNvPr id="8" name="Text 5"/>
+          <p:cNvSpPr/>
+          <p:nvPr/>
+        </p:nvSpPr>
+        <p:spPr>
+          <a:xfrm>
+            <a:off x="822960" y="1801368"/>
+            <a:ext cx="2926080" cy="1005840"/>
+          </a:xfrm>
+          <a:prstGeom prst="rect">
+            <a:avLst/>
+          </a:prstGeom>
+          <a:noFill/>
+          <a:ln/>
+        </p:spPr>
+        <p:txBody>
+          <a:bodyPr wrap="square" rtlCol="0" anchor="ctr"/>
+          <a:lstStyle/>
+          <a:p>
+            <a:pPr indent="0" marL="0">
+              <a:buNone/>
+            </a:pPr>
+            <a:r>
+              <a:rPr lang="en-US" sz="1400" b="1" dirty="0">
                 <a:solidFill>
                   <a:srgbClr val="122952"/>
                 </a:solidFill>
@@ -3458,38 +6452,38 @@
                 <a:ea typeface="Calibri" pitchFamily="34" charset="-122"/>
                 <a:cs typeface="Calibri" pitchFamily="34" charset="-120"/>
               </a:rPr>
-              <a:t>Emergency services</a:t>
-            </a:r>
-            <a:endParaRPr lang="en-US" sz="1500" dirty="0"/>
-          </a:p>
-        </p:txBody>
-      </p:sp>
-      <p:sp>
-        <p:nvSpPr>
-          <p:cNvPr id="8" name="Text 5"/>
-          <p:cNvSpPr/>
-          <p:nvPr/>
-        </p:nvSpPr>
-        <p:spPr>
-          <a:xfrm>
-            <a:off x="4023360" y="1280160"/>
-            <a:ext cx="7406640" cy="777240"/>
-          </a:xfrm>
-          <a:prstGeom prst="rect">
-            <a:avLst/>
-          </a:prstGeom>
-          <a:noFill/>
-          <a:ln/>
-        </p:spPr>
-        <p:txBody>
-          <a:bodyPr wrap="square" rtlCol="0" anchor="ctr"/>
-          <a:lstStyle/>
-          <a:p>
-            <a:pPr indent="0" marL="0">
-              <a:buNone/>
-            </a:pPr>
-            <a:r>
-              <a:rPr lang="en-US" sz="1300" dirty="0">
+              <a:t>Public protection</a:t>
+            </a:r>
+            <a:endParaRPr lang="en-US" sz="1400" dirty="0"/>
+          </a:p>
+        </p:txBody>
+      </p:sp>
+      <p:sp>
+        <p:nvSpPr>
+          <p:cNvPr id="9" name="Text 6"/>
+          <p:cNvSpPr/>
+          <p:nvPr/>
+        </p:nvSpPr>
+        <p:spPr>
+          <a:xfrm>
+            <a:off x="3840480" y="1801368"/>
+            <a:ext cx="7589520" cy="1005840"/>
+          </a:xfrm>
+          <a:prstGeom prst="rect">
+            <a:avLst/>
+          </a:prstGeom>
+          <a:noFill/>
+          <a:ln/>
+        </p:spPr>
+        <p:txBody>
+          <a:bodyPr wrap="square" rtlCol="0" anchor="ctr"/>
+          <a:lstStyle/>
+          <a:p>
+            <a:pPr indent="0" marL="0">
+              <a:buNone/>
+            </a:pPr>
+            <a:r>
+              <a:rPr lang="en-US" sz="1250" dirty="0">
                 <a:solidFill>
                   <a:srgbClr val="2A2A2A"/>
                 </a:solidFill>
@@ -3497,26 +6491,26 @@
                 <a:ea typeface="Calibri" pitchFamily="34" charset="-122"/>
                 <a:cs typeface="Calibri" pitchFamily="34" charset="-120"/>
               </a:rPr>
-              <a:t>Fire and rescue, police, ambulance, coastguard</a:t>
-            </a:r>
-            <a:endParaRPr lang="en-US" sz="1300" dirty="0"/>
-          </a:p>
-        </p:txBody>
-      </p:sp>
-      <p:sp>
-        <p:nvSpPr>
-          <p:cNvPr id="9" name="Shape 6"/>
-          <p:cNvSpPr/>
-          <p:nvPr/>
-        </p:nvSpPr>
-        <p:spPr>
-          <a:xfrm>
-            <a:off x="548640" y="2304288"/>
-            <a:ext cx="11064240" cy="960120"/>
+              <a:t>A firefighter who can't carry a casualty down a ladder, or an officer who can't restrain a suspect safely, puts other people at risk — not just themselves.</a:t>
+            </a:r>
+            <a:endParaRPr lang="en-US" sz="1250" dirty="0"/>
+          </a:p>
+        </p:txBody>
+      </p:sp>
+      <p:sp>
+        <p:nvSpPr>
+          <p:cNvPr id="10" name="Shape 7"/>
+          <p:cNvSpPr/>
+          <p:nvPr/>
+        </p:nvSpPr>
+        <p:spPr>
+          <a:xfrm>
+            <a:off x="548640" y="3108960"/>
+            <a:ext cx="11064240" cy="1234440"/>
           </a:xfrm>
           <a:prstGeom prst="roundRect">
             <a:avLst>
-              <a:gd name="adj" fmla="val 5714"/>
+              <a:gd name="adj" fmla="val 4444"/>
             </a:avLst>
           </a:prstGeom>
           <a:solidFill>
@@ -3527,30 +6521,30 @@
       </p:sp>
       <p:sp>
         <p:nvSpPr>
-          <p:cNvPr id="10" name="Text 7"/>
-          <p:cNvSpPr/>
-          <p:nvPr/>
-        </p:nvSpPr>
-        <p:spPr>
-          <a:xfrm>
-            <a:off x="822960" y="2395728"/>
-            <a:ext cx="3108960" cy="777240"/>
-          </a:xfrm>
-          <a:prstGeom prst="rect">
-            <a:avLst/>
-          </a:prstGeom>
-          <a:noFill/>
-          <a:ln/>
-        </p:spPr>
-        <p:txBody>
-          <a:bodyPr wrap="square" rtlCol="0" anchor="ctr"/>
-          <a:lstStyle/>
-          <a:p>
-            <a:pPr indent="0" marL="0">
-              <a:buNone/>
-            </a:pPr>
-            <a:r>
-              <a:rPr lang="en-US" sz="1500" b="1" dirty="0">
+          <p:cNvPr id="11" name="Text 8"/>
+          <p:cNvSpPr/>
+          <p:nvPr/>
+        </p:nvSpPr>
+        <p:spPr>
+          <a:xfrm>
+            <a:off x="822960" y="3218688"/>
+            <a:ext cx="2926080" cy="1005840"/>
+          </a:xfrm>
+          <a:prstGeom prst="rect">
+            <a:avLst/>
+          </a:prstGeom>
+          <a:noFill/>
+          <a:ln/>
+        </p:spPr>
+        <p:txBody>
+          <a:bodyPr wrap="square" rtlCol="0" anchor="ctr"/>
+          <a:lstStyle/>
+          <a:p>
+            <a:pPr indent="0" marL="0">
+              <a:buNone/>
+            </a:pPr>
+            <a:r>
+              <a:rPr lang="en-US" sz="1400" b="1" dirty="0">
                 <a:solidFill>
                   <a:srgbClr val="122952"/>
                 </a:solidFill>
@@ -3558,38 +6552,38 @@
                 <a:ea typeface="Calibri" pitchFamily="34" charset="-122"/>
                 <a:cs typeface="Calibri" pitchFamily="34" charset="-120"/>
               </a:rPr>
-              <a:t>Armed services</a:t>
-            </a:r>
-            <a:endParaRPr lang="en-US" sz="1500" dirty="0"/>
-          </a:p>
-        </p:txBody>
-      </p:sp>
-      <p:sp>
-        <p:nvSpPr>
-          <p:cNvPr id="11" name="Text 8"/>
-          <p:cNvSpPr/>
-          <p:nvPr/>
-        </p:nvSpPr>
-        <p:spPr>
-          <a:xfrm>
-            <a:off x="4023360" y="2395728"/>
-            <a:ext cx="7406640" cy="777240"/>
-          </a:xfrm>
-          <a:prstGeom prst="rect">
-            <a:avLst/>
-          </a:prstGeom>
-          <a:noFill/>
-          <a:ln/>
-        </p:spPr>
-        <p:txBody>
-          <a:bodyPr wrap="square" rtlCol="0" anchor="ctr"/>
-          <a:lstStyle/>
-          <a:p>
-            <a:pPr indent="0" marL="0">
-              <a:buNone/>
-            </a:pPr>
-            <a:r>
-              <a:rPr lang="en-US" sz="1300" dirty="0">
+              <a:t>Self-protection</a:t>
+            </a:r>
+            <a:endParaRPr lang="en-US" sz="1400" dirty="0"/>
+          </a:p>
+        </p:txBody>
+      </p:sp>
+      <p:sp>
+        <p:nvSpPr>
+          <p:cNvPr id="12" name="Text 9"/>
+          <p:cNvSpPr/>
+          <p:nvPr/>
+        </p:nvSpPr>
+        <p:spPr>
+          <a:xfrm>
+            <a:off x="3840480" y="3218688"/>
+            <a:ext cx="7589520" cy="1005840"/>
+          </a:xfrm>
+          <a:prstGeom prst="rect">
+            <a:avLst/>
+          </a:prstGeom>
+          <a:noFill/>
+          <a:ln/>
+        </p:spPr>
+        <p:txBody>
+          <a:bodyPr wrap="square" rtlCol="0" anchor="ctr"/>
+          <a:lstStyle/>
+          <a:p>
+            <a:pPr indent="0" marL="0">
+              <a:buNone/>
+            </a:pPr>
+            <a:r>
+              <a:rPr lang="en-US" sz="1250" dirty="0">
                 <a:solidFill>
                   <a:srgbClr val="2A2A2A"/>
                 </a:solidFill>
@@ -3597,26 +6591,26 @@
                 <a:ea typeface="Calibri" pitchFamily="34" charset="-122"/>
                 <a:cs typeface="Calibri" pitchFamily="34" charset="-120"/>
               </a:rPr>
-              <a:t>Royal Navy, Royal Marines, Army, Royal Air Force</a:t>
-            </a:r>
-            <a:endParaRPr lang="en-US" sz="1300" dirty="0"/>
-          </a:p>
-        </p:txBody>
-      </p:sp>
-      <p:sp>
-        <p:nvSpPr>
-          <p:cNvPr id="12" name="Shape 9"/>
-          <p:cNvSpPr/>
-          <p:nvPr/>
-        </p:nvSpPr>
-        <p:spPr>
-          <a:xfrm>
-            <a:off x="548640" y="3419856"/>
-            <a:ext cx="11064240" cy="960120"/>
+              <a:t>Physically demanding roles carry injury risk. Minimum fitness standards exist to reduce that risk for the person doing the job.</a:t>
+            </a:r>
+            <a:endParaRPr lang="en-US" sz="1250" dirty="0"/>
+          </a:p>
+        </p:txBody>
+      </p:sp>
+      <p:sp>
+        <p:nvSpPr>
+          <p:cNvPr id="13" name="Shape 10"/>
+          <p:cNvSpPr/>
+          <p:nvPr/>
+        </p:nvSpPr>
+        <p:spPr>
+          <a:xfrm>
+            <a:off x="548640" y="4526280"/>
+            <a:ext cx="11064240" cy="1234440"/>
           </a:xfrm>
           <a:prstGeom prst="roundRect">
             <a:avLst>
-              <a:gd name="adj" fmla="val 5714"/>
+              <a:gd name="adj" fmla="val 4444"/>
             </a:avLst>
           </a:prstGeom>
           <a:solidFill>
@@ -3627,30 +6621,30 @@
       </p:sp>
       <p:sp>
         <p:nvSpPr>
-          <p:cNvPr id="13" name="Text 10"/>
-          <p:cNvSpPr/>
-          <p:nvPr/>
-        </p:nvSpPr>
-        <p:spPr>
-          <a:xfrm>
-            <a:off x="822960" y="3511296"/>
-            <a:ext cx="3108960" cy="777240"/>
-          </a:xfrm>
-          <a:prstGeom prst="rect">
-            <a:avLst/>
-          </a:prstGeom>
-          <a:noFill/>
-          <a:ln/>
-        </p:spPr>
-        <p:txBody>
-          <a:bodyPr wrap="square" rtlCol="0" anchor="ctr"/>
-          <a:lstStyle/>
-          <a:p>
-            <a:pPr indent="0" marL="0">
-              <a:buNone/>
-            </a:pPr>
-            <a:r>
-              <a:rPr lang="en-US" sz="1500" b="1" dirty="0">
+          <p:cNvPr id="14" name="Text 11"/>
+          <p:cNvSpPr/>
+          <p:nvPr/>
+        </p:nvSpPr>
+        <p:spPr>
+          <a:xfrm>
+            <a:off x="822960" y="4636008"/>
+            <a:ext cx="2926080" cy="1005840"/>
+          </a:xfrm>
+          <a:prstGeom prst="rect">
+            <a:avLst/>
+          </a:prstGeom>
+          <a:noFill/>
+          <a:ln/>
+        </p:spPr>
+        <p:txBody>
+          <a:bodyPr wrap="square" rtlCol="0" anchor="ctr"/>
+          <a:lstStyle/>
+          <a:p>
+            <a:pPr indent="0" marL="0">
+              <a:buNone/>
+            </a:pPr>
+            <a:r>
+              <a:rPr lang="en-US" sz="1400" b="1" dirty="0">
                 <a:solidFill>
                   <a:srgbClr val="122952"/>
                 </a:solidFill>
@@ -3658,38 +6652,38 @@
                 <a:ea typeface="Calibri" pitchFamily="34" charset="-122"/>
                 <a:cs typeface="Calibri" pitchFamily="34" charset="-120"/>
               </a:rPr>
-              <a:t>Voluntary services</a:t>
-            </a:r>
-            <a:endParaRPr lang="en-US" sz="1500" dirty="0"/>
-          </a:p>
-        </p:txBody>
-      </p:sp>
-      <p:sp>
-        <p:nvSpPr>
-          <p:cNvPr id="14" name="Text 11"/>
-          <p:cNvSpPr/>
-          <p:nvPr/>
-        </p:nvSpPr>
-        <p:spPr>
-          <a:xfrm>
-            <a:off x="4023360" y="3511296"/>
-            <a:ext cx="7406640" cy="777240"/>
-          </a:xfrm>
-          <a:prstGeom prst="rect">
-            <a:avLst/>
-          </a:prstGeom>
-          <a:noFill/>
-          <a:ln/>
-        </p:spPr>
-        <p:txBody>
-          <a:bodyPr wrap="square" rtlCol="0" anchor="ctr"/>
-          <a:lstStyle/>
-          <a:p>
-            <a:pPr indent="0" marL="0">
-              <a:buNone/>
-            </a:pPr>
-            <a:r>
-              <a:rPr lang="en-US" sz="1300" dirty="0">
+              <a:t>Evidence-based, not arbitrary</a:t>
+            </a:r>
+            <a:endParaRPr lang="en-US" sz="1400" dirty="0"/>
+          </a:p>
+        </p:txBody>
+      </p:sp>
+      <p:sp>
+        <p:nvSpPr>
+          <p:cNvPr id="15" name="Text 12"/>
+          <p:cNvSpPr/>
+          <p:nvPr/>
+        </p:nvSpPr>
+        <p:spPr>
+          <a:xfrm>
+            <a:off x="3840480" y="4636008"/>
+            <a:ext cx="7589520" cy="1005840"/>
+          </a:xfrm>
+          <a:prstGeom prst="rect">
+            <a:avLst/>
+          </a:prstGeom>
+          <a:noFill/>
+          <a:ln/>
+        </p:spPr>
+        <p:txBody>
+          <a:bodyPr wrap="square" rtlCol="0" anchor="ctr"/>
+          <a:lstStyle/>
+          <a:p>
+            <a:pPr indent="0" marL="0">
+              <a:buNone/>
+            </a:pPr>
+            <a:r>
+              <a:rPr lang="en-US" sz="1250" dirty="0">
                 <a:solidFill>
                   <a:srgbClr val="2A2A2A"/>
                 </a:solidFill>
@@ -3697,115 +6691,15 @@
                 <a:ea typeface="Calibri" pitchFamily="34" charset="-122"/>
                 <a:cs typeface="Calibri" pitchFamily="34" charset="-120"/>
               </a:rPr>
-              <a:t>HM Prison Service, Mountain Rescue, RNLI, St John Ambulance</a:t>
-            </a:r>
-            <a:endParaRPr lang="en-US" sz="1300" dirty="0"/>
-          </a:p>
-        </p:txBody>
-      </p:sp>
-      <p:sp>
-        <p:nvSpPr>
-          <p:cNvPr id="15" name="Shape 12"/>
-          <p:cNvSpPr/>
-          <p:nvPr/>
-        </p:nvSpPr>
-        <p:spPr>
-          <a:xfrm>
-            <a:off x="548640" y="4626864"/>
-            <a:ext cx="11064240" cy="1280160"/>
-          </a:xfrm>
-          <a:prstGeom prst="roundRect">
-            <a:avLst>
-              <a:gd name="adj" fmla="val 4286"/>
-            </a:avLst>
-          </a:prstGeom>
-          <a:solidFill>
-            <a:srgbClr val="F0FDF4"/>
-          </a:solidFill>
-          <a:ln/>
-        </p:spPr>
-      </p:sp>
-      <p:sp>
-        <p:nvSpPr>
-          <p:cNvPr id="16" name="Text 13"/>
-          <p:cNvSpPr/>
-          <p:nvPr/>
-        </p:nvSpPr>
-        <p:spPr>
-          <a:xfrm>
-            <a:off x="822960" y="4764024"/>
-            <a:ext cx="10515600" cy="320040"/>
-          </a:xfrm>
-          <a:prstGeom prst="rect">
-            <a:avLst/>
-          </a:prstGeom>
-          <a:noFill/>
-          <a:ln/>
-        </p:spPr>
-        <p:txBody>
-          <a:bodyPr wrap="square" rtlCol="0" anchor="ctr"/>
-          <a:lstStyle/>
-          <a:p>
-            <a:pPr indent="0" marL="0">
-              <a:buNone/>
-            </a:pPr>
-            <a:r>
-              <a:rPr lang="en-US" sz="1300" b="1" dirty="0">
-                <a:solidFill>
-                  <a:srgbClr val="16A34A"/>
-                </a:solidFill>
-                <a:latin typeface="Calibri" pitchFamily="34" charset="0"/>
-                <a:ea typeface="Calibri" pitchFamily="34" charset="-122"/>
-                <a:cs typeface="Calibri" pitchFamily="34" charset="-120"/>
-              </a:rPr>
-              <a:t>Health requirements commonly checked:</a:t>
-            </a:r>
-            <a:endParaRPr lang="en-US" sz="1300" dirty="0"/>
-          </a:p>
-        </p:txBody>
-      </p:sp>
-      <p:sp>
-        <p:nvSpPr>
-          <p:cNvPr id="17" name="Text 14"/>
-          <p:cNvSpPr/>
-          <p:nvPr/>
-        </p:nvSpPr>
-        <p:spPr>
-          <a:xfrm>
-            <a:off x="822960" y="5129784"/>
-            <a:ext cx="10515600" cy="640080"/>
-          </a:xfrm>
-          <a:prstGeom prst="rect">
-            <a:avLst/>
-          </a:prstGeom>
-          <a:noFill/>
-          <a:ln/>
-        </p:spPr>
-        <p:txBody>
-          <a:bodyPr wrap="square" rtlCol="0" anchor="t"/>
-          <a:lstStyle/>
-          <a:p>
-            <a:pPr indent="0" marL="0">
-              <a:buNone/>
-            </a:pPr>
-            <a:r>
-              <a:rPr lang="en-US" sz="1400" dirty="0">
-                <a:solidFill>
-                  <a:srgbClr val="2A2A2A"/>
-                </a:solidFill>
-                <a:latin typeface="Calibri" pitchFamily="34" charset="0"/>
-                <a:ea typeface="Calibri" pitchFamily="34" charset="-122"/>
-                <a:cs typeface="Calibri" pitchFamily="34" charset="-120"/>
-              </a:rPr>
-              <a:t>Body fat percentage   ·   Lung capacity   ·   Blood pressure   ·   Body Mass Index (BMI)</a:t>
-            </a:r>
-            <a:endParaRPr lang="en-US" sz="1400" dirty="0"/>
-          </a:p>
-        </p:txBody>
-      </p:sp>
-      <p:sp>
-        <p:nvSpPr>
-          <p:cNvPr id="18" name="Shape 15"/>
+              <a:t>Standards like the police bleep test level are set from research into what the job actually demands — not picked as an arbitrary hurdle.</a:t>
+            </a:r>
+            <a:endParaRPr lang="en-US" sz="1250" dirty="0"/>
+          </a:p>
+        </p:txBody>
+      </p:sp>
+      <p:sp>
+        <p:nvSpPr>
+          <p:cNvPr id="16" name="Shape 13"/>
           <p:cNvSpPr/>
           <p:nvPr/>
         </p:nvSpPr>
@@ -3825,7 +6719,7 @@
       </p:sp>
       <p:sp>
         <p:nvSpPr>
-          <p:cNvPr id="19" name="Text 16"/>
+          <p:cNvPr id="17" name="Text 14"/>
           <p:cNvSpPr/>
           <p:nvPr/>
         </p:nvSpPr>
@@ -3864,7 +6758,7 @@
       </p:sp>
       <p:sp>
         <p:nvSpPr>
-          <p:cNvPr id="20" name="Text 17"/>
+          <p:cNvPr id="18" name="Text 15"/>
           <p:cNvSpPr/>
           <p:nvPr/>
         </p:nvSpPr>
@@ -4036,7 +6930,7 @@
               <a:buNone/>
             </a:pPr>
             <a:r>
-              <a:rPr lang="en-US" sz="2600" b="1" dirty="0">
+              <a:rPr lang="en-US" sz="2500" b="1" dirty="0">
                 <a:solidFill>
                   <a:srgbClr val="122952"/>
                 </a:solidFill>
@@ -4044,404 +6938,26 @@
                 <a:ea typeface="Calibri" pitchFamily="34" charset="-122"/>
                 <a:cs typeface="Calibri" pitchFamily="34" charset="-120"/>
               </a:rPr>
-              <a:t>Structure of a Fitness Activity Plan</a:t>
-            </a:r>
-            <a:endParaRPr lang="en-US" sz="2600" dirty="0"/>
-          </a:p>
-        </p:txBody>
-      </p:sp>
-      <p:sp>
-        <p:nvSpPr>
-          <p:cNvPr id="6" name="Text 3"/>
-          <p:cNvSpPr/>
-          <p:nvPr/>
-        </p:nvSpPr>
-        <p:spPr>
-          <a:xfrm>
-            <a:off x="548640" y="960120"/>
-            <a:ext cx="10789920" cy="365760"/>
-          </a:xfrm>
-          <a:prstGeom prst="rect">
-            <a:avLst/>
-          </a:prstGeom>
-          <a:noFill/>
-          <a:ln/>
-        </p:spPr>
-        <p:txBody>
-          <a:bodyPr wrap="square" rtlCol="0" anchor="ctr"/>
-          <a:lstStyle/>
-          <a:p>
-            <a:pPr indent="0" marL="0">
-              <a:buNone/>
-            </a:pPr>
-            <a:r>
-              <a:rPr lang="en-US" sz="1400" i="1" dirty="0">
-                <a:solidFill>
-                  <a:srgbClr val="6B7B8C"/>
-                </a:solidFill>
-                <a:latin typeface="Calibri" pitchFamily="34" charset="0"/>
-                <a:ea typeface="Calibri" pitchFamily="34" charset="-122"/>
-                <a:cs typeface="Calibri" pitchFamily="34" charset="-120"/>
-              </a:rPr>
-              <a:t>Every plan needs three phases, in this order.</a:t>
-            </a:r>
-            <a:endParaRPr lang="en-US" sz="1400" dirty="0"/>
-          </a:p>
-        </p:txBody>
-      </p:sp>
-      <p:sp>
-        <p:nvSpPr>
-          <p:cNvPr id="7" name="Shape 4"/>
-          <p:cNvSpPr/>
-          <p:nvPr/>
-        </p:nvSpPr>
-        <p:spPr>
-          <a:xfrm>
-            <a:off x="548640" y="1600200"/>
-            <a:ext cx="3520440" cy="2011680"/>
+              <a:t>Health and Fitness Requirements by Service</a:t>
+            </a:r>
+            <a:endParaRPr lang="en-US" sz="2500" dirty="0"/>
+          </a:p>
+        </p:txBody>
+      </p:sp>
+      <p:sp>
+        <p:nvSpPr>
+          <p:cNvPr id="6" name="Shape 3"/>
+          <p:cNvSpPr/>
+          <p:nvPr/>
+        </p:nvSpPr>
+        <p:spPr>
+          <a:xfrm>
+            <a:off x="548640" y="1188720"/>
+            <a:ext cx="11064240" cy="960120"/>
           </a:xfrm>
           <a:prstGeom prst="roundRect">
             <a:avLst>
-              <a:gd name="adj" fmla="val 3636"/>
-            </a:avLst>
-          </a:prstGeom>
-          <a:solidFill>
-            <a:srgbClr val="3E6BA8"/>
-          </a:solidFill>
-          <a:ln/>
-        </p:spPr>
-      </p:sp>
-      <p:sp>
-        <p:nvSpPr>
-          <p:cNvPr id="8" name="Text 5"/>
-          <p:cNvSpPr/>
-          <p:nvPr/>
-        </p:nvSpPr>
-        <p:spPr>
-          <a:xfrm>
-            <a:off x="777240" y="1828800"/>
-            <a:ext cx="3063240" cy="457200"/>
-          </a:xfrm>
-          <a:prstGeom prst="rect">
-            <a:avLst/>
-          </a:prstGeom>
-          <a:noFill/>
-          <a:ln/>
-        </p:spPr>
-        <p:txBody>
-          <a:bodyPr wrap="square" rtlCol="0" anchor="ctr"/>
-          <a:lstStyle/>
-          <a:p>
-            <a:pPr indent="0" marL="0">
-              <a:buNone/>
-            </a:pPr>
-            <a:r>
-              <a:rPr lang="en-US" sz="1700" b="1" dirty="0">
-                <a:solidFill>
-                  <a:srgbClr val="FFFFFF"/>
-                </a:solidFill>
-                <a:latin typeface="Calibri" pitchFamily="34" charset="0"/>
-                <a:ea typeface="Calibri" pitchFamily="34" charset="-122"/>
-                <a:cs typeface="Calibri" pitchFamily="34" charset="-120"/>
-              </a:rPr>
-              <a:t>1. Warm-up</a:t>
-            </a:r>
-            <a:endParaRPr lang="en-US" sz="1700" dirty="0"/>
-          </a:p>
-        </p:txBody>
-      </p:sp>
-      <p:sp>
-        <p:nvSpPr>
-          <p:cNvPr id="9" name="Text 6"/>
-          <p:cNvSpPr/>
-          <p:nvPr/>
-        </p:nvSpPr>
-        <p:spPr>
-          <a:xfrm>
-            <a:off x="777240" y="2377440"/>
-            <a:ext cx="3063240" cy="1097280"/>
-          </a:xfrm>
-          <a:prstGeom prst="rect">
-            <a:avLst/>
-          </a:prstGeom>
-          <a:noFill/>
-          <a:ln/>
-        </p:spPr>
-        <p:txBody>
-          <a:bodyPr wrap="square" rtlCol="0" anchor="ctr"/>
-          <a:lstStyle/>
-          <a:p>
-            <a:pPr indent="0" marL="0">
-              <a:buNone/>
-            </a:pPr>
-            <a:r>
-              <a:rPr lang="en-US" sz="1300" dirty="0">
-                <a:solidFill>
-                  <a:srgbClr val="FFFFFF"/>
-                </a:solidFill>
-                <a:latin typeface="Calibri" pitchFamily="34" charset="0"/>
-                <a:ea typeface="Calibri" pitchFamily="34" charset="-122"/>
-                <a:cs typeface="Calibri" pitchFamily="34" charset="-120"/>
-              </a:rPr>
-              <a:t>Dynamic stretching, pulse raiser, skill familiarisation</a:t>
-            </a:r>
-            <a:endParaRPr lang="en-US" sz="1300" dirty="0"/>
-          </a:p>
-        </p:txBody>
-      </p:sp>
-      <p:sp>
-        <p:nvSpPr>
-          <p:cNvPr id="10" name="Shape 7"/>
-          <p:cNvSpPr/>
-          <p:nvPr/>
-        </p:nvSpPr>
-        <p:spPr>
-          <a:xfrm>
-            <a:off x="4343400" y="1600200"/>
-            <a:ext cx="3520440" cy="2011680"/>
-          </a:xfrm>
-          <a:prstGeom prst="roundRect">
-            <a:avLst>
-              <a:gd name="adj" fmla="val 3636"/>
-            </a:avLst>
-          </a:prstGeom>
-          <a:solidFill>
-            <a:srgbClr val="122952"/>
-          </a:solidFill>
-          <a:ln/>
-        </p:spPr>
-      </p:sp>
-      <p:sp>
-        <p:nvSpPr>
-          <p:cNvPr id="11" name="Text 8"/>
-          <p:cNvSpPr/>
-          <p:nvPr/>
-        </p:nvSpPr>
-        <p:spPr>
-          <a:xfrm>
-            <a:off x="4572000" y="1828800"/>
-            <a:ext cx="3063240" cy="457200"/>
-          </a:xfrm>
-          <a:prstGeom prst="rect">
-            <a:avLst/>
-          </a:prstGeom>
-          <a:noFill/>
-          <a:ln/>
-        </p:spPr>
-        <p:txBody>
-          <a:bodyPr wrap="square" rtlCol="0" anchor="ctr"/>
-          <a:lstStyle/>
-          <a:p>
-            <a:pPr indent="0" marL="0">
-              <a:buNone/>
-            </a:pPr>
-            <a:r>
-              <a:rPr lang="en-US" sz="1700" b="1" dirty="0">
-                <a:solidFill>
-                  <a:srgbClr val="FFFFFF"/>
-                </a:solidFill>
-                <a:latin typeface="Calibri" pitchFamily="34" charset="0"/>
-                <a:ea typeface="Calibri" pitchFamily="34" charset="-122"/>
-                <a:cs typeface="Calibri" pitchFamily="34" charset="-120"/>
-              </a:rPr>
-              <a:t>2. Main part</a:t>
-            </a:r>
-            <a:endParaRPr lang="en-US" sz="1700" dirty="0"/>
-          </a:p>
-        </p:txBody>
-      </p:sp>
-      <p:sp>
-        <p:nvSpPr>
-          <p:cNvPr id="12" name="Text 9"/>
-          <p:cNvSpPr/>
-          <p:nvPr/>
-        </p:nvSpPr>
-        <p:spPr>
-          <a:xfrm>
-            <a:off x="4572000" y="2377440"/>
-            <a:ext cx="3063240" cy="1097280"/>
-          </a:xfrm>
-          <a:prstGeom prst="rect">
-            <a:avLst/>
-          </a:prstGeom>
-          <a:noFill/>
-          <a:ln/>
-        </p:spPr>
-        <p:txBody>
-          <a:bodyPr wrap="square" rtlCol="0" anchor="ctr"/>
-          <a:lstStyle/>
-          <a:p>
-            <a:pPr indent="0" marL="0">
-              <a:buNone/>
-            </a:pPr>
-            <a:r>
-              <a:rPr lang="en-US" sz="1300" dirty="0">
-                <a:solidFill>
-                  <a:srgbClr val="FFFFFF"/>
-                </a:solidFill>
-                <a:latin typeface="Calibri" pitchFamily="34" charset="0"/>
-                <a:ea typeface="Calibri" pitchFamily="34" charset="-122"/>
-                <a:cs typeface="Calibri" pitchFamily="34" charset="-120"/>
-              </a:rPr>
-              <a:t>The fitness development activity itself</a:t>
-            </a:r>
-            <a:endParaRPr lang="en-US" sz="1300" dirty="0"/>
-          </a:p>
-        </p:txBody>
-      </p:sp>
-      <p:sp>
-        <p:nvSpPr>
-          <p:cNvPr id="13" name="Shape 10"/>
-          <p:cNvSpPr/>
-          <p:nvPr/>
-        </p:nvSpPr>
-        <p:spPr>
-          <a:xfrm>
-            <a:off x="8138160" y="1600200"/>
-            <a:ext cx="3520440" cy="2011680"/>
-          </a:xfrm>
-          <a:prstGeom prst="roundRect">
-            <a:avLst>
-              <a:gd name="adj" fmla="val 3636"/>
-            </a:avLst>
-          </a:prstGeom>
-          <a:solidFill>
-            <a:srgbClr val="8A9AAF"/>
-          </a:solidFill>
-          <a:ln/>
-        </p:spPr>
-      </p:sp>
-      <p:sp>
-        <p:nvSpPr>
-          <p:cNvPr id="14" name="Text 11"/>
-          <p:cNvSpPr/>
-          <p:nvPr/>
-        </p:nvSpPr>
-        <p:spPr>
-          <a:xfrm>
-            <a:off x="8366760" y="1828800"/>
-            <a:ext cx="3063240" cy="457200"/>
-          </a:xfrm>
-          <a:prstGeom prst="rect">
-            <a:avLst/>
-          </a:prstGeom>
-          <a:noFill/>
-          <a:ln/>
-        </p:spPr>
-        <p:txBody>
-          <a:bodyPr wrap="square" rtlCol="0" anchor="ctr"/>
-          <a:lstStyle/>
-          <a:p>
-            <a:pPr indent="0" marL="0">
-              <a:buNone/>
-            </a:pPr>
-            <a:r>
-              <a:rPr lang="en-US" sz="1700" b="1" dirty="0">
-                <a:solidFill>
-                  <a:srgbClr val="FFFFFF"/>
-                </a:solidFill>
-                <a:latin typeface="Calibri" pitchFamily="34" charset="0"/>
-                <a:ea typeface="Calibri" pitchFamily="34" charset="-122"/>
-                <a:cs typeface="Calibri" pitchFamily="34" charset="-120"/>
-              </a:rPr>
-              <a:t>3. Cool-down</a:t>
-            </a:r>
-            <a:endParaRPr lang="en-US" sz="1700" dirty="0"/>
-          </a:p>
-        </p:txBody>
-      </p:sp>
-      <p:sp>
-        <p:nvSpPr>
-          <p:cNvPr id="15" name="Text 12"/>
-          <p:cNvSpPr/>
-          <p:nvPr/>
-        </p:nvSpPr>
-        <p:spPr>
-          <a:xfrm>
-            <a:off x="8366760" y="2377440"/>
-            <a:ext cx="3063240" cy="1097280"/>
-          </a:xfrm>
-          <a:prstGeom prst="rect">
-            <a:avLst/>
-          </a:prstGeom>
-          <a:noFill/>
-          <a:ln/>
-        </p:spPr>
-        <p:txBody>
-          <a:bodyPr wrap="square" rtlCol="0" anchor="ctr"/>
-          <a:lstStyle/>
-          <a:p>
-            <a:pPr indent="0" marL="0">
-              <a:buNone/>
-            </a:pPr>
-            <a:r>
-              <a:rPr lang="en-US" sz="1300" dirty="0">
-                <a:solidFill>
-                  <a:srgbClr val="FFFFFF"/>
-                </a:solidFill>
-                <a:latin typeface="Calibri" pitchFamily="34" charset="0"/>
-                <a:ea typeface="Calibri" pitchFamily="34" charset="-122"/>
-                <a:cs typeface="Calibri" pitchFamily="34" charset="-120"/>
-              </a:rPr>
-              <a:t>Stretching and recovery</a:t>
-            </a:r>
-            <a:endParaRPr lang="en-US" sz="1300" dirty="0"/>
-          </a:p>
-        </p:txBody>
-      </p:sp>
-      <p:sp>
-        <p:nvSpPr>
-          <p:cNvPr id="16" name="Text 13"/>
-          <p:cNvSpPr/>
-          <p:nvPr/>
-        </p:nvSpPr>
-        <p:spPr>
-          <a:xfrm>
-            <a:off x="548640" y="3886200"/>
-            <a:ext cx="11064240" cy="457200"/>
-          </a:xfrm>
-          <a:prstGeom prst="rect">
-            <a:avLst/>
-          </a:prstGeom>
-          <a:noFill/>
-          <a:ln/>
-        </p:spPr>
-        <p:txBody>
-          <a:bodyPr wrap="square" rtlCol="0" anchor="ctr"/>
-          <a:lstStyle/>
-          <a:p>
-            <a:pPr indent="0" marL="0">
-              <a:buNone/>
-            </a:pPr>
-            <a:r>
-              <a:rPr lang="en-US" sz="1400" b="1" dirty="0">
-                <a:solidFill>
-                  <a:srgbClr val="122952"/>
-                </a:solidFill>
-                <a:latin typeface="Calibri" pitchFamily="34" charset="0"/>
-                <a:ea typeface="Calibri" pitchFamily="34" charset="-122"/>
-                <a:cs typeface="Calibri" pitchFamily="34" charset="-120"/>
-              </a:rPr>
-              <a:t>Also plan for: frequency (how often)  ·  intensity (how hard)  ·  duration (how long)</a:t>
-            </a:r>
-            <a:endParaRPr lang="en-US" sz="1400" dirty="0"/>
-          </a:p>
-        </p:txBody>
-      </p:sp>
-      <p:sp>
-        <p:nvSpPr>
-          <p:cNvPr id="17" name="Shape 14"/>
-          <p:cNvSpPr/>
-          <p:nvPr/>
-        </p:nvSpPr>
-        <p:spPr>
-          <a:xfrm>
-            <a:off x="548640" y="4434840"/>
-            <a:ext cx="11064240" cy="1005840"/>
-          </a:xfrm>
-          <a:prstGeom prst="roundRect">
-            <a:avLst>
-              <a:gd name="adj" fmla="val 5455"/>
+              <a:gd name="adj" fmla="val 5714"/>
             </a:avLst>
           </a:prstGeom>
           <a:solidFill>
@@ -4452,14 +6968,53 @@
       </p:sp>
       <p:sp>
         <p:nvSpPr>
-          <p:cNvPr id="18" name="Text 15"/>
-          <p:cNvSpPr/>
-          <p:nvPr/>
-        </p:nvSpPr>
-        <p:spPr>
-          <a:xfrm>
-            <a:off x="822960" y="4572000"/>
-            <a:ext cx="10515600" cy="731520"/>
+          <p:cNvPr id="7" name="Text 4"/>
+          <p:cNvSpPr/>
+          <p:nvPr/>
+        </p:nvSpPr>
+        <p:spPr>
+          <a:xfrm>
+            <a:off x="822960" y="1280160"/>
+            <a:ext cx="3108960" cy="777240"/>
+          </a:xfrm>
+          <a:prstGeom prst="rect">
+            <a:avLst/>
+          </a:prstGeom>
+          <a:noFill/>
+          <a:ln/>
+        </p:spPr>
+        <p:txBody>
+          <a:bodyPr wrap="square" rtlCol="0" anchor="ctr"/>
+          <a:lstStyle/>
+          <a:p>
+            <a:pPr indent="0" marL="0">
+              <a:buNone/>
+            </a:pPr>
+            <a:r>
+              <a:rPr lang="en-US" sz="1500" b="1" dirty="0">
+                <a:solidFill>
+                  <a:srgbClr val="122952"/>
+                </a:solidFill>
+                <a:latin typeface="Calibri" pitchFamily="34" charset="0"/>
+                <a:ea typeface="Calibri" pitchFamily="34" charset="-122"/>
+                <a:cs typeface="Calibri" pitchFamily="34" charset="-120"/>
+              </a:rPr>
+              <a:t>Emergency services</a:t>
+            </a:r>
+            <a:endParaRPr lang="en-US" sz="1500" dirty="0"/>
+          </a:p>
+        </p:txBody>
+      </p:sp>
+      <p:sp>
+        <p:nvSpPr>
+          <p:cNvPr id="8" name="Text 5"/>
+          <p:cNvSpPr/>
+          <p:nvPr/>
+        </p:nvSpPr>
+        <p:spPr>
+          <a:xfrm>
+            <a:off x="4023360" y="1280160"/>
+            <a:ext cx="7406640" cy="777240"/>
           </a:xfrm>
           <a:prstGeom prst="rect">
             <a:avLst/>
@@ -4483,7 +7038,7 @@
                 <a:ea typeface="Calibri" pitchFamily="34" charset="-122"/>
                 <a:cs typeface="Calibri" pitchFamily="34" charset="-120"/>
               </a:rPr>
-              <a:t>Factors that influence fitness: nutrition, hydration, sleep, exercise levels, smoking, alcohol.</a:t>
+              <a:t>Fire and rescue, police, ambulance, coastguard</a:t>
             </a:r>
             <a:endParaRPr lang="en-US" sz="1300" dirty="0"/>
           </a:p>
@@ -4491,7 +7046,307 @@
       </p:sp>
       <p:sp>
         <p:nvSpPr>
-          <p:cNvPr id="19" name="Shape 16"/>
+          <p:cNvPr id="9" name="Shape 6"/>
+          <p:cNvSpPr/>
+          <p:nvPr/>
+        </p:nvSpPr>
+        <p:spPr>
+          <a:xfrm>
+            <a:off x="548640" y="2304288"/>
+            <a:ext cx="11064240" cy="960120"/>
+          </a:xfrm>
+          <a:prstGeom prst="roundRect">
+            <a:avLst>
+              <a:gd name="adj" fmla="val 5714"/>
+            </a:avLst>
+          </a:prstGeom>
+          <a:solidFill>
+            <a:srgbClr val="E8EEF7"/>
+          </a:solidFill>
+          <a:ln/>
+        </p:spPr>
+      </p:sp>
+      <p:sp>
+        <p:nvSpPr>
+          <p:cNvPr id="10" name="Text 7"/>
+          <p:cNvSpPr/>
+          <p:nvPr/>
+        </p:nvSpPr>
+        <p:spPr>
+          <a:xfrm>
+            <a:off x="822960" y="2395728"/>
+            <a:ext cx="3108960" cy="777240"/>
+          </a:xfrm>
+          <a:prstGeom prst="rect">
+            <a:avLst/>
+          </a:prstGeom>
+          <a:noFill/>
+          <a:ln/>
+        </p:spPr>
+        <p:txBody>
+          <a:bodyPr wrap="square" rtlCol="0" anchor="ctr"/>
+          <a:lstStyle/>
+          <a:p>
+            <a:pPr indent="0" marL="0">
+              <a:buNone/>
+            </a:pPr>
+            <a:r>
+              <a:rPr lang="en-US" sz="1500" b="1" dirty="0">
+                <a:solidFill>
+                  <a:srgbClr val="122952"/>
+                </a:solidFill>
+                <a:latin typeface="Calibri" pitchFamily="34" charset="0"/>
+                <a:ea typeface="Calibri" pitchFamily="34" charset="-122"/>
+                <a:cs typeface="Calibri" pitchFamily="34" charset="-120"/>
+              </a:rPr>
+              <a:t>Armed services</a:t>
+            </a:r>
+            <a:endParaRPr lang="en-US" sz="1500" dirty="0"/>
+          </a:p>
+        </p:txBody>
+      </p:sp>
+      <p:sp>
+        <p:nvSpPr>
+          <p:cNvPr id="11" name="Text 8"/>
+          <p:cNvSpPr/>
+          <p:nvPr/>
+        </p:nvSpPr>
+        <p:spPr>
+          <a:xfrm>
+            <a:off x="4023360" y="2395728"/>
+            <a:ext cx="7406640" cy="777240"/>
+          </a:xfrm>
+          <a:prstGeom prst="rect">
+            <a:avLst/>
+          </a:prstGeom>
+          <a:noFill/>
+          <a:ln/>
+        </p:spPr>
+        <p:txBody>
+          <a:bodyPr wrap="square" rtlCol="0" anchor="ctr"/>
+          <a:lstStyle/>
+          <a:p>
+            <a:pPr indent="0" marL="0">
+              <a:buNone/>
+            </a:pPr>
+            <a:r>
+              <a:rPr lang="en-US" sz="1300" dirty="0">
+                <a:solidFill>
+                  <a:srgbClr val="2A2A2A"/>
+                </a:solidFill>
+                <a:latin typeface="Calibri" pitchFamily="34" charset="0"/>
+                <a:ea typeface="Calibri" pitchFamily="34" charset="-122"/>
+                <a:cs typeface="Calibri" pitchFamily="34" charset="-120"/>
+              </a:rPr>
+              <a:t>Royal Navy, Royal Marines, Army, Royal Air Force</a:t>
+            </a:r>
+            <a:endParaRPr lang="en-US" sz="1300" dirty="0"/>
+          </a:p>
+        </p:txBody>
+      </p:sp>
+      <p:sp>
+        <p:nvSpPr>
+          <p:cNvPr id="12" name="Shape 9"/>
+          <p:cNvSpPr/>
+          <p:nvPr/>
+        </p:nvSpPr>
+        <p:spPr>
+          <a:xfrm>
+            <a:off x="548640" y="3419856"/>
+            <a:ext cx="11064240" cy="960120"/>
+          </a:xfrm>
+          <a:prstGeom prst="roundRect">
+            <a:avLst>
+              <a:gd name="adj" fmla="val 5714"/>
+            </a:avLst>
+          </a:prstGeom>
+          <a:solidFill>
+            <a:srgbClr val="E8EEF7"/>
+          </a:solidFill>
+          <a:ln/>
+        </p:spPr>
+      </p:sp>
+      <p:sp>
+        <p:nvSpPr>
+          <p:cNvPr id="13" name="Text 10"/>
+          <p:cNvSpPr/>
+          <p:nvPr/>
+        </p:nvSpPr>
+        <p:spPr>
+          <a:xfrm>
+            <a:off x="822960" y="3511296"/>
+            <a:ext cx="3108960" cy="777240"/>
+          </a:xfrm>
+          <a:prstGeom prst="rect">
+            <a:avLst/>
+          </a:prstGeom>
+          <a:noFill/>
+          <a:ln/>
+        </p:spPr>
+        <p:txBody>
+          <a:bodyPr wrap="square" rtlCol="0" anchor="ctr"/>
+          <a:lstStyle/>
+          <a:p>
+            <a:pPr indent="0" marL="0">
+              <a:buNone/>
+            </a:pPr>
+            <a:r>
+              <a:rPr lang="en-US" sz="1500" b="1" dirty="0">
+                <a:solidFill>
+                  <a:srgbClr val="122952"/>
+                </a:solidFill>
+                <a:latin typeface="Calibri" pitchFamily="34" charset="0"/>
+                <a:ea typeface="Calibri" pitchFamily="34" charset="-122"/>
+                <a:cs typeface="Calibri" pitchFamily="34" charset="-120"/>
+              </a:rPr>
+              <a:t>Voluntary services</a:t>
+            </a:r>
+            <a:endParaRPr lang="en-US" sz="1500" dirty="0"/>
+          </a:p>
+        </p:txBody>
+      </p:sp>
+      <p:sp>
+        <p:nvSpPr>
+          <p:cNvPr id="14" name="Text 11"/>
+          <p:cNvSpPr/>
+          <p:nvPr/>
+        </p:nvSpPr>
+        <p:spPr>
+          <a:xfrm>
+            <a:off x="4023360" y="3511296"/>
+            <a:ext cx="7406640" cy="777240"/>
+          </a:xfrm>
+          <a:prstGeom prst="rect">
+            <a:avLst/>
+          </a:prstGeom>
+          <a:noFill/>
+          <a:ln/>
+        </p:spPr>
+        <p:txBody>
+          <a:bodyPr wrap="square" rtlCol="0" anchor="ctr"/>
+          <a:lstStyle/>
+          <a:p>
+            <a:pPr indent="0" marL="0">
+              <a:buNone/>
+            </a:pPr>
+            <a:r>
+              <a:rPr lang="en-US" sz="1300" dirty="0">
+                <a:solidFill>
+                  <a:srgbClr val="2A2A2A"/>
+                </a:solidFill>
+                <a:latin typeface="Calibri" pitchFamily="34" charset="0"/>
+                <a:ea typeface="Calibri" pitchFamily="34" charset="-122"/>
+                <a:cs typeface="Calibri" pitchFamily="34" charset="-120"/>
+              </a:rPr>
+              <a:t>HM Prison Service, Mountain Rescue, RNLI, St John Ambulance</a:t>
+            </a:r>
+            <a:endParaRPr lang="en-US" sz="1300" dirty="0"/>
+          </a:p>
+        </p:txBody>
+      </p:sp>
+      <p:sp>
+        <p:nvSpPr>
+          <p:cNvPr id="15" name="Shape 12"/>
+          <p:cNvSpPr/>
+          <p:nvPr/>
+        </p:nvSpPr>
+        <p:spPr>
+          <a:xfrm>
+            <a:off x="548640" y="4626864"/>
+            <a:ext cx="11064240" cy="1280160"/>
+          </a:xfrm>
+          <a:prstGeom prst="roundRect">
+            <a:avLst>
+              <a:gd name="adj" fmla="val 4286"/>
+            </a:avLst>
+          </a:prstGeom>
+          <a:solidFill>
+            <a:srgbClr val="F0FDF4"/>
+          </a:solidFill>
+          <a:ln/>
+        </p:spPr>
+      </p:sp>
+      <p:sp>
+        <p:nvSpPr>
+          <p:cNvPr id="16" name="Text 13"/>
+          <p:cNvSpPr/>
+          <p:nvPr/>
+        </p:nvSpPr>
+        <p:spPr>
+          <a:xfrm>
+            <a:off x="822960" y="4764024"/>
+            <a:ext cx="10515600" cy="320040"/>
+          </a:xfrm>
+          <a:prstGeom prst="rect">
+            <a:avLst/>
+          </a:prstGeom>
+          <a:noFill/>
+          <a:ln/>
+        </p:spPr>
+        <p:txBody>
+          <a:bodyPr wrap="square" rtlCol="0" anchor="ctr"/>
+          <a:lstStyle/>
+          <a:p>
+            <a:pPr indent="0" marL="0">
+              <a:buNone/>
+            </a:pPr>
+            <a:r>
+              <a:rPr lang="en-US" sz="1300" b="1" dirty="0">
+                <a:solidFill>
+                  <a:srgbClr val="16A34A"/>
+                </a:solidFill>
+                <a:latin typeface="Calibri" pitchFamily="34" charset="0"/>
+                <a:ea typeface="Calibri" pitchFamily="34" charset="-122"/>
+                <a:cs typeface="Calibri" pitchFamily="34" charset="-120"/>
+              </a:rPr>
+              <a:t>Health requirements commonly checked:</a:t>
+            </a:r>
+            <a:endParaRPr lang="en-US" sz="1300" dirty="0"/>
+          </a:p>
+        </p:txBody>
+      </p:sp>
+      <p:sp>
+        <p:nvSpPr>
+          <p:cNvPr id="17" name="Text 14"/>
+          <p:cNvSpPr/>
+          <p:nvPr/>
+        </p:nvSpPr>
+        <p:spPr>
+          <a:xfrm>
+            <a:off x="822960" y="5129784"/>
+            <a:ext cx="10515600" cy="640080"/>
+          </a:xfrm>
+          <a:prstGeom prst="rect">
+            <a:avLst/>
+          </a:prstGeom>
+          <a:noFill/>
+          <a:ln/>
+        </p:spPr>
+        <p:txBody>
+          <a:bodyPr wrap="square" rtlCol="0" anchor="t"/>
+          <a:lstStyle/>
+          <a:p>
+            <a:pPr indent="0" marL="0">
+              <a:buNone/>
+            </a:pPr>
+            <a:r>
+              <a:rPr lang="en-US" sz="1400" dirty="0">
+                <a:solidFill>
+                  <a:srgbClr val="2A2A2A"/>
+                </a:solidFill>
+                <a:latin typeface="Calibri" pitchFamily="34" charset="0"/>
+                <a:ea typeface="Calibri" pitchFamily="34" charset="-122"/>
+                <a:cs typeface="Calibri" pitchFamily="34" charset="-120"/>
+              </a:rPr>
+              <a:t>Body fat percentage   ·   Lung capacity   ·   Blood pressure   ·   Body Mass Index (BMI)</a:t>
+            </a:r>
+            <a:endParaRPr lang="en-US" sz="1400" dirty="0"/>
+          </a:p>
+        </p:txBody>
+      </p:sp>
+      <p:sp>
+        <p:nvSpPr>
+          <p:cNvPr id="18" name="Shape 15"/>
           <p:cNvSpPr/>
           <p:nvPr/>
         </p:nvSpPr>
@@ -4511,7 +7366,7 @@
       </p:sp>
       <p:sp>
         <p:nvSpPr>
-          <p:cNvPr id="20" name="Text 17"/>
+          <p:cNvPr id="19" name="Text 16"/>
           <p:cNvSpPr/>
           <p:nvPr/>
         </p:nvSpPr>
@@ -4550,7 +7405,7 @@
       </p:sp>
       <p:sp>
         <p:nvSpPr>
-          <p:cNvPr id="21" name="Text 18"/>
+          <p:cNvPr id="20" name="Text 17"/>
           <p:cNvSpPr/>
           <p:nvPr/>
         </p:nvSpPr>
@@ -4581,7 +7436,7 @@
                 <a:ea typeface="Calibri" pitchFamily="34" charset="-122"/>
                 <a:cs typeface="Calibri" pitchFamily="34" charset="-120"/>
               </a:rPr>
-              <a:t>Knowledge Hub 2 — Planning Personal Fitness Testing Activities</a:t>
+              <a:t>Knowledge Hub 1 — Health and Fitness Requirements</a:t>
             </a:r>
             <a:endParaRPr lang="en-US" sz="1000" dirty="0"/>
           </a:p>
@@ -4722,7 +7577,7 @@
               <a:buNone/>
             </a:pPr>
             <a:r>
-              <a:rPr lang="en-US" sz="2500" b="1" dirty="0">
+              <a:rPr lang="en-US" sz="2600" b="1" dirty="0">
                 <a:solidFill>
                   <a:srgbClr val="122952"/>
                 </a:solidFill>
@@ -4730,26 +7585,404 @@
                 <a:ea typeface="Calibri" pitchFamily="34" charset="-122"/>
                 <a:cs typeface="Calibri" pitchFamily="34" charset="-120"/>
               </a:rPr>
-              <a:t>Fitness Tests Used by Public Services</a:t>
-            </a:r>
-            <a:endParaRPr lang="en-US" sz="2500" dirty="0"/>
-          </a:p>
-        </p:txBody>
-      </p:sp>
-      <p:sp>
-        <p:nvSpPr>
-          <p:cNvPr id="6" name="Shape 3"/>
-          <p:cNvSpPr/>
-          <p:nvPr/>
-        </p:nvSpPr>
-        <p:spPr>
-          <a:xfrm>
-            <a:off x="548640" y="1234440"/>
-            <a:ext cx="11064240" cy="868680"/>
+              <a:t>Structure of a Fitness Activity Plan</a:t>
+            </a:r>
+            <a:endParaRPr lang="en-US" sz="2600" dirty="0"/>
+          </a:p>
+        </p:txBody>
+      </p:sp>
+      <p:sp>
+        <p:nvSpPr>
+          <p:cNvPr id="6" name="Text 3"/>
+          <p:cNvSpPr/>
+          <p:nvPr/>
+        </p:nvSpPr>
+        <p:spPr>
+          <a:xfrm>
+            <a:off x="548640" y="960120"/>
+            <a:ext cx="10789920" cy="365760"/>
+          </a:xfrm>
+          <a:prstGeom prst="rect">
+            <a:avLst/>
+          </a:prstGeom>
+          <a:noFill/>
+          <a:ln/>
+        </p:spPr>
+        <p:txBody>
+          <a:bodyPr wrap="square" rtlCol="0" anchor="ctr"/>
+          <a:lstStyle/>
+          <a:p>
+            <a:pPr indent="0" marL="0">
+              <a:buNone/>
+            </a:pPr>
+            <a:r>
+              <a:rPr lang="en-US" sz="1400" i="1" dirty="0">
+                <a:solidFill>
+                  <a:srgbClr val="6B7B8C"/>
+                </a:solidFill>
+                <a:latin typeface="Calibri" pitchFamily="34" charset="0"/>
+                <a:ea typeface="Calibri" pitchFamily="34" charset="-122"/>
+                <a:cs typeface="Calibri" pitchFamily="34" charset="-120"/>
+              </a:rPr>
+              <a:t>Each phase has a physiological job to do — this is why the order matters.</a:t>
+            </a:r>
+            <a:endParaRPr lang="en-US" sz="1400" dirty="0"/>
+          </a:p>
+        </p:txBody>
+      </p:sp>
+      <p:sp>
+        <p:nvSpPr>
+          <p:cNvPr id="7" name="Shape 4"/>
+          <p:cNvSpPr/>
+          <p:nvPr/>
+        </p:nvSpPr>
+        <p:spPr>
+          <a:xfrm>
+            <a:off x="548640" y="1463040"/>
+            <a:ext cx="3520440" cy="2377440"/>
           </a:xfrm>
           <a:prstGeom prst="roundRect">
             <a:avLst>
-              <a:gd name="adj" fmla="val 6316"/>
+              <a:gd name="adj" fmla="val 3077"/>
+            </a:avLst>
+          </a:prstGeom>
+          <a:solidFill>
+            <a:srgbClr val="3E6BA8"/>
+          </a:solidFill>
+          <a:ln/>
+        </p:spPr>
+      </p:sp>
+      <p:sp>
+        <p:nvSpPr>
+          <p:cNvPr id="8" name="Text 5"/>
+          <p:cNvSpPr/>
+          <p:nvPr/>
+        </p:nvSpPr>
+        <p:spPr>
+          <a:xfrm>
+            <a:off x="777240" y="1691640"/>
+            <a:ext cx="3063240" cy="457200"/>
+          </a:xfrm>
+          <a:prstGeom prst="rect">
+            <a:avLst/>
+          </a:prstGeom>
+          <a:noFill/>
+          <a:ln/>
+        </p:spPr>
+        <p:txBody>
+          <a:bodyPr wrap="square" rtlCol="0" anchor="ctr"/>
+          <a:lstStyle/>
+          <a:p>
+            <a:pPr indent="0" marL="0">
+              <a:buNone/>
+            </a:pPr>
+            <a:r>
+              <a:rPr lang="en-US" sz="1700" b="1" dirty="0">
+                <a:solidFill>
+                  <a:srgbClr val="FFFFFF"/>
+                </a:solidFill>
+                <a:latin typeface="Calibri" pitchFamily="34" charset="0"/>
+                <a:ea typeface="Calibri" pitchFamily="34" charset="-122"/>
+                <a:cs typeface="Calibri" pitchFamily="34" charset="-120"/>
+              </a:rPr>
+              <a:t>1. Warm-up</a:t>
+            </a:r>
+            <a:endParaRPr lang="en-US" sz="1700" dirty="0"/>
+          </a:p>
+        </p:txBody>
+      </p:sp>
+      <p:sp>
+        <p:nvSpPr>
+          <p:cNvPr id="9" name="Text 6"/>
+          <p:cNvSpPr/>
+          <p:nvPr/>
+        </p:nvSpPr>
+        <p:spPr>
+          <a:xfrm>
+            <a:off x="777240" y="2194560"/>
+            <a:ext cx="3063240" cy="1554480"/>
+          </a:xfrm>
+          <a:prstGeom prst="rect">
+            <a:avLst/>
+          </a:prstGeom>
+          <a:noFill/>
+          <a:ln/>
+        </p:spPr>
+        <p:txBody>
+          <a:bodyPr wrap="square" rtlCol="0" anchor="ctr"/>
+          <a:lstStyle/>
+          <a:p>
+            <a:pPr indent="0" marL="0">
+              <a:buNone/>
+            </a:pPr>
+            <a:r>
+              <a:rPr lang="en-US" sz="1200" dirty="0">
+                <a:solidFill>
+                  <a:srgbClr val="FFFFFF"/>
+                </a:solidFill>
+                <a:latin typeface="Calibri" pitchFamily="34" charset="0"/>
+                <a:ea typeface="Calibri" pitchFamily="34" charset="-122"/>
+                <a:cs typeface="Calibri" pitchFamily="34" charset="-120"/>
+              </a:rPr>
+              <a:t>Raises heart rate and blood flow to muscles gradually. Skipping it means asking cold muscles for maximum effort — a leading cause of strains.</a:t>
+            </a:r>
+            <a:endParaRPr lang="en-US" sz="1200" dirty="0"/>
+          </a:p>
+        </p:txBody>
+      </p:sp>
+      <p:sp>
+        <p:nvSpPr>
+          <p:cNvPr id="10" name="Shape 7"/>
+          <p:cNvSpPr/>
+          <p:nvPr/>
+        </p:nvSpPr>
+        <p:spPr>
+          <a:xfrm>
+            <a:off x="4343400" y="1463040"/>
+            <a:ext cx="3520440" cy="2377440"/>
+          </a:xfrm>
+          <a:prstGeom prst="roundRect">
+            <a:avLst>
+              <a:gd name="adj" fmla="val 3077"/>
+            </a:avLst>
+          </a:prstGeom>
+          <a:solidFill>
+            <a:srgbClr val="122952"/>
+          </a:solidFill>
+          <a:ln/>
+        </p:spPr>
+      </p:sp>
+      <p:sp>
+        <p:nvSpPr>
+          <p:cNvPr id="11" name="Text 8"/>
+          <p:cNvSpPr/>
+          <p:nvPr/>
+        </p:nvSpPr>
+        <p:spPr>
+          <a:xfrm>
+            <a:off x="4572000" y="1691640"/>
+            <a:ext cx="3063240" cy="457200"/>
+          </a:xfrm>
+          <a:prstGeom prst="rect">
+            <a:avLst/>
+          </a:prstGeom>
+          <a:noFill/>
+          <a:ln/>
+        </p:spPr>
+        <p:txBody>
+          <a:bodyPr wrap="square" rtlCol="0" anchor="ctr"/>
+          <a:lstStyle/>
+          <a:p>
+            <a:pPr indent="0" marL="0">
+              <a:buNone/>
+            </a:pPr>
+            <a:r>
+              <a:rPr lang="en-US" sz="1700" b="1" dirty="0">
+                <a:solidFill>
+                  <a:srgbClr val="FFFFFF"/>
+                </a:solidFill>
+                <a:latin typeface="Calibri" pitchFamily="34" charset="0"/>
+                <a:ea typeface="Calibri" pitchFamily="34" charset="-122"/>
+                <a:cs typeface="Calibri" pitchFamily="34" charset="-120"/>
+              </a:rPr>
+              <a:t>2. Main part</a:t>
+            </a:r>
+            <a:endParaRPr lang="en-US" sz="1700" dirty="0"/>
+          </a:p>
+        </p:txBody>
+      </p:sp>
+      <p:sp>
+        <p:nvSpPr>
+          <p:cNvPr id="12" name="Text 9"/>
+          <p:cNvSpPr/>
+          <p:nvPr/>
+        </p:nvSpPr>
+        <p:spPr>
+          <a:xfrm>
+            <a:off x="4572000" y="2194560"/>
+            <a:ext cx="3063240" cy="1554480"/>
+          </a:xfrm>
+          <a:prstGeom prst="rect">
+            <a:avLst/>
+          </a:prstGeom>
+          <a:noFill/>
+          <a:ln/>
+        </p:spPr>
+        <p:txBody>
+          <a:bodyPr wrap="square" rtlCol="0" anchor="ctr"/>
+          <a:lstStyle/>
+          <a:p>
+            <a:pPr indent="0" marL="0">
+              <a:buNone/>
+            </a:pPr>
+            <a:r>
+              <a:rPr lang="en-US" sz="1200" dirty="0">
+                <a:solidFill>
+                  <a:srgbClr val="FFFFFF"/>
+                </a:solidFill>
+                <a:latin typeface="Calibri" pitchFamily="34" charset="0"/>
+                <a:ea typeface="Calibri" pitchFamily="34" charset="-122"/>
+                <a:cs typeface="Calibri" pitchFamily="34" charset="-120"/>
+              </a:rPr>
+              <a:t>The fitness development or testing activity itself, at the intensity the test or training actually requires.</a:t>
+            </a:r>
+            <a:endParaRPr lang="en-US" sz="1200" dirty="0"/>
+          </a:p>
+        </p:txBody>
+      </p:sp>
+      <p:sp>
+        <p:nvSpPr>
+          <p:cNvPr id="13" name="Shape 10"/>
+          <p:cNvSpPr/>
+          <p:nvPr/>
+        </p:nvSpPr>
+        <p:spPr>
+          <a:xfrm>
+            <a:off x="8138160" y="1463040"/>
+            <a:ext cx="3520440" cy="2377440"/>
+          </a:xfrm>
+          <a:prstGeom prst="roundRect">
+            <a:avLst>
+              <a:gd name="adj" fmla="val 3077"/>
+            </a:avLst>
+          </a:prstGeom>
+          <a:solidFill>
+            <a:srgbClr val="8A9AAF"/>
+          </a:solidFill>
+          <a:ln/>
+        </p:spPr>
+      </p:sp>
+      <p:sp>
+        <p:nvSpPr>
+          <p:cNvPr id="14" name="Text 11"/>
+          <p:cNvSpPr/>
+          <p:nvPr/>
+        </p:nvSpPr>
+        <p:spPr>
+          <a:xfrm>
+            <a:off x="8366760" y="1691640"/>
+            <a:ext cx="3063240" cy="457200"/>
+          </a:xfrm>
+          <a:prstGeom prst="rect">
+            <a:avLst/>
+          </a:prstGeom>
+          <a:noFill/>
+          <a:ln/>
+        </p:spPr>
+        <p:txBody>
+          <a:bodyPr wrap="square" rtlCol="0" anchor="ctr"/>
+          <a:lstStyle/>
+          <a:p>
+            <a:pPr indent="0" marL="0">
+              <a:buNone/>
+            </a:pPr>
+            <a:r>
+              <a:rPr lang="en-US" sz="1700" b="1" dirty="0">
+                <a:solidFill>
+                  <a:srgbClr val="FFFFFF"/>
+                </a:solidFill>
+                <a:latin typeface="Calibri" pitchFamily="34" charset="0"/>
+                <a:ea typeface="Calibri" pitchFamily="34" charset="-122"/>
+                <a:cs typeface="Calibri" pitchFamily="34" charset="-120"/>
+              </a:rPr>
+              <a:t>3. Cool-down</a:t>
+            </a:r>
+            <a:endParaRPr lang="en-US" sz="1700" dirty="0"/>
+          </a:p>
+        </p:txBody>
+      </p:sp>
+      <p:sp>
+        <p:nvSpPr>
+          <p:cNvPr id="15" name="Text 12"/>
+          <p:cNvSpPr/>
+          <p:nvPr/>
+        </p:nvSpPr>
+        <p:spPr>
+          <a:xfrm>
+            <a:off x="8366760" y="2194560"/>
+            <a:ext cx="3063240" cy="1554480"/>
+          </a:xfrm>
+          <a:prstGeom prst="rect">
+            <a:avLst/>
+          </a:prstGeom>
+          <a:noFill/>
+          <a:ln/>
+        </p:spPr>
+        <p:txBody>
+          <a:bodyPr wrap="square" rtlCol="0" anchor="ctr"/>
+          <a:lstStyle/>
+          <a:p>
+            <a:pPr indent="0" marL="0">
+              <a:buNone/>
+            </a:pPr>
+            <a:r>
+              <a:rPr lang="en-US" sz="1200" dirty="0">
+                <a:solidFill>
+                  <a:srgbClr val="FFFFFF"/>
+                </a:solidFill>
+                <a:latin typeface="Calibri" pitchFamily="34" charset="0"/>
+                <a:ea typeface="Calibri" pitchFamily="34" charset="-122"/>
+                <a:cs typeface="Calibri" pitchFamily="34" charset="-120"/>
+              </a:rPr>
+              <a:t>Brings heart rate down gradually and helps clear lactic acid — stopping dead after hard effort can cause dizziness or fainting.</a:t>
+            </a:r>
+            <a:endParaRPr lang="en-US" sz="1200" dirty="0"/>
+          </a:p>
+        </p:txBody>
+      </p:sp>
+      <p:sp>
+        <p:nvSpPr>
+          <p:cNvPr id="16" name="Text 13"/>
+          <p:cNvSpPr/>
+          <p:nvPr/>
+        </p:nvSpPr>
+        <p:spPr>
+          <a:xfrm>
+            <a:off x="548640" y="4069080"/>
+            <a:ext cx="11064240" cy="457200"/>
+          </a:xfrm>
+          <a:prstGeom prst="rect">
+            <a:avLst/>
+          </a:prstGeom>
+          <a:noFill/>
+          <a:ln/>
+        </p:spPr>
+        <p:txBody>
+          <a:bodyPr wrap="square" rtlCol="0" anchor="ctr"/>
+          <a:lstStyle/>
+          <a:p>
+            <a:pPr indent="0" marL="0">
+              <a:buNone/>
+            </a:pPr>
+            <a:r>
+              <a:rPr lang="en-US" sz="1400" b="1" dirty="0">
+                <a:solidFill>
+                  <a:srgbClr val="122952"/>
+                </a:solidFill>
+                <a:latin typeface="Calibri" pitchFamily="34" charset="0"/>
+                <a:ea typeface="Calibri" pitchFamily="34" charset="-122"/>
+                <a:cs typeface="Calibri" pitchFamily="34" charset="-120"/>
+              </a:rPr>
+              <a:t>Also plan for: frequency (how often)  ·  intensity (how hard)  ·  duration (how long)</a:t>
+            </a:r>
+            <a:endParaRPr lang="en-US" sz="1400" dirty="0"/>
+          </a:p>
+        </p:txBody>
+      </p:sp>
+      <p:sp>
+        <p:nvSpPr>
+          <p:cNvPr id="17" name="Shape 14"/>
+          <p:cNvSpPr/>
+          <p:nvPr/>
+        </p:nvSpPr>
+        <p:spPr>
+          <a:xfrm>
+            <a:off x="548640" y="4617720"/>
+            <a:ext cx="11064240" cy="822960"/>
+          </a:xfrm>
+          <a:prstGeom prst="roundRect">
+            <a:avLst>
+              <a:gd name="adj" fmla="val 6667"/>
             </a:avLst>
           </a:prstGeom>
           <a:solidFill>
@@ -4760,53 +7993,14 @@
       </p:sp>
       <p:sp>
         <p:nvSpPr>
-          <p:cNvPr id="7" name="Text 4"/>
-          <p:cNvSpPr/>
-          <p:nvPr/>
-        </p:nvSpPr>
-        <p:spPr>
-          <a:xfrm>
-            <a:off x="822960" y="1325880"/>
-            <a:ext cx="2926080" cy="685800"/>
-          </a:xfrm>
-          <a:prstGeom prst="rect">
-            <a:avLst/>
-          </a:prstGeom>
-          <a:noFill/>
-          <a:ln/>
-        </p:spPr>
-        <p:txBody>
-          <a:bodyPr wrap="square" rtlCol="0" anchor="ctr"/>
-          <a:lstStyle/>
-          <a:p>
-            <a:pPr indent="0" marL="0">
-              <a:buNone/>
-            </a:pPr>
-            <a:r>
-              <a:rPr lang="en-US" sz="1400" b="1" dirty="0">
-                <a:solidFill>
-                  <a:srgbClr val="122952"/>
-                </a:solidFill>
-                <a:latin typeface="Calibri" pitchFamily="34" charset="0"/>
-                <a:ea typeface="Calibri" pitchFamily="34" charset="-122"/>
-                <a:cs typeface="Calibri" pitchFamily="34" charset="-120"/>
-              </a:rPr>
-              <a:t>Armed services</a:t>
-            </a:r>
-            <a:endParaRPr lang="en-US" sz="1400" dirty="0"/>
-          </a:p>
-        </p:txBody>
-      </p:sp>
-      <p:sp>
-        <p:nvSpPr>
-          <p:cNvPr id="8" name="Text 5"/>
-          <p:cNvSpPr/>
-          <p:nvPr/>
-        </p:nvSpPr>
-        <p:spPr>
-          <a:xfrm>
-            <a:off x="3840480" y="1325880"/>
-            <a:ext cx="7589520" cy="685800"/>
+          <p:cNvPr id="18" name="Text 15"/>
+          <p:cNvSpPr/>
+          <p:nvPr/>
+        </p:nvSpPr>
+        <p:spPr>
+          <a:xfrm>
+            <a:off x="822960" y="4754880"/>
+            <a:ext cx="10515600" cy="548640"/>
           </a:xfrm>
           <a:prstGeom prst="rect">
             <a:avLst/>
@@ -4830,7 +8024,7 @@
                 <a:ea typeface="Calibri" pitchFamily="34" charset="-122"/>
                 <a:cs typeface="Calibri" pitchFamily="34" charset="-120"/>
               </a:rPr>
-              <a:t>Static lift, Jerry can carry, 1.5 mile run</a:t>
+              <a:t>Factors that influence fitness: nutrition, hydration, sleep, exercise levels, smoking, alcohol.</a:t>
             </a:r>
             <a:endParaRPr lang="en-US" sz="1300" dirty="0"/>
           </a:p>
@@ -4838,382 +8032,7 @@
       </p:sp>
       <p:sp>
         <p:nvSpPr>
-          <p:cNvPr id="9" name="Shape 6"/>
-          <p:cNvSpPr/>
-          <p:nvPr/>
-        </p:nvSpPr>
-        <p:spPr>
-          <a:xfrm>
-            <a:off x="548640" y="2240280"/>
-            <a:ext cx="11064240" cy="868680"/>
-          </a:xfrm>
-          <a:prstGeom prst="roundRect">
-            <a:avLst>
-              <a:gd name="adj" fmla="val 6316"/>
-            </a:avLst>
-          </a:prstGeom>
-          <a:solidFill>
-            <a:srgbClr val="E8EEF7"/>
-          </a:solidFill>
-          <a:ln/>
-        </p:spPr>
-      </p:sp>
-      <p:sp>
-        <p:nvSpPr>
-          <p:cNvPr id="10" name="Text 7"/>
-          <p:cNvSpPr/>
-          <p:nvPr/>
-        </p:nvSpPr>
-        <p:spPr>
-          <a:xfrm>
-            <a:off x="822960" y="2331720"/>
-            <a:ext cx="2926080" cy="685800"/>
-          </a:xfrm>
-          <a:prstGeom prst="rect">
-            <a:avLst/>
-          </a:prstGeom>
-          <a:noFill/>
-          <a:ln/>
-        </p:spPr>
-        <p:txBody>
-          <a:bodyPr wrap="square" rtlCol="0" anchor="ctr"/>
-          <a:lstStyle/>
-          <a:p>
-            <a:pPr indent="0" marL="0">
-              <a:buNone/>
-            </a:pPr>
-            <a:r>
-              <a:rPr lang="en-US" sz="1400" b="1" dirty="0">
-                <a:solidFill>
-                  <a:srgbClr val="122952"/>
-                </a:solidFill>
-                <a:latin typeface="Calibri" pitchFamily="34" charset="0"/>
-                <a:ea typeface="Calibri" pitchFamily="34" charset="-122"/>
-                <a:cs typeface="Calibri" pitchFamily="34" charset="-120"/>
-              </a:rPr>
-              <a:t>Police</a:t>
-            </a:r>
-            <a:endParaRPr lang="en-US" sz="1400" dirty="0"/>
-          </a:p>
-        </p:txBody>
-      </p:sp>
-      <p:sp>
-        <p:nvSpPr>
-          <p:cNvPr id="11" name="Text 8"/>
-          <p:cNvSpPr/>
-          <p:nvPr/>
-        </p:nvSpPr>
-        <p:spPr>
-          <a:xfrm>
-            <a:off x="3840480" y="2331720"/>
-            <a:ext cx="7589520" cy="685800"/>
-          </a:xfrm>
-          <a:prstGeom prst="rect">
-            <a:avLst/>
-          </a:prstGeom>
-          <a:noFill/>
-          <a:ln/>
-        </p:spPr>
-        <p:txBody>
-          <a:bodyPr wrap="square" rtlCol="0" anchor="ctr"/>
-          <a:lstStyle/>
-          <a:p>
-            <a:pPr indent="0" marL="0">
-              <a:buNone/>
-            </a:pPr>
-            <a:r>
-              <a:rPr lang="en-US" sz="1300" dirty="0">
-                <a:solidFill>
-                  <a:srgbClr val="2A2A2A"/>
-                </a:solidFill>
-                <a:latin typeface="Calibri" pitchFamily="34" charset="0"/>
-                <a:ea typeface="Calibri" pitchFamily="34" charset="-122"/>
-                <a:cs typeface="Calibri" pitchFamily="34" charset="-120"/>
-              </a:rPr>
-              <a:t>Bleep test (multi-stage fitness test), dynamic strength test</a:t>
-            </a:r>
-            <a:endParaRPr lang="en-US" sz="1300" dirty="0"/>
-          </a:p>
-        </p:txBody>
-      </p:sp>
-      <p:sp>
-        <p:nvSpPr>
-          <p:cNvPr id="12" name="Shape 9"/>
-          <p:cNvSpPr/>
-          <p:nvPr/>
-        </p:nvSpPr>
-        <p:spPr>
-          <a:xfrm>
-            <a:off x="548640" y="3246120"/>
-            <a:ext cx="11064240" cy="868680"/>
-          </a:xfrm>
-          <a:prstGeom prst="roundRect">
-            <a:avLst>
-              <a:gd name="adj" fmla="val 6316"/>
-            </a:avLst>
-          </a:prstGeom>
-          <a:solidFill>
-            <a:srgbClr val="E8EEF7"/>
-          </a:solidFill>
-          <a:ln/>
-        </p:spPr>
-      </p:sp>
-      <p:sp>
-        <p:nvSpPr>
-          <p:cNvPr id="13" name="Text 10"/>
-          <p:cNvSpPr/>
-          <p:nvPr/>
-        </p:nvSpPr>
-        <p:spPr>
-          <a:xfrm>
-            <a:off x="822960" y="3337560"/>
-            <a:ext cx="2926080" cy="685800"/>
-          </a:xfrm>
-          <a:prstGeom prst="rect">
-            <a:avLst/>
-          </a:prstGeom>
-          <a:noFill/>
-          <a:ln/>
-        </p:spPr>
-        <p:txBody>
-          <a:bodyPr wrap="square" rtlCol="0" anchor="ctr"/>
-          <a:lstStyle/>
-          <a:p>
-            <a:pPr indent="0" marL="0">
-              <a:buNone/>
-            </a:pPr>
-            <a:r>
-              <a:rPr lang="en-US" sz="1400" b="1" dirty="0">
-                <a:solidFill>
-                  <a:srgbClr val="122952"/>
-                </a:solidFill>
-                <a:latin typeface="Calibri" pitchFamily="34" charset="0"/>
-                <a:ea typeface="Calibri" pitchFamily="34" charset="-122"/>
-                <a:cs typeface="Calibri" pitchFamily="34" charset="-120"/>
-              </a:rPr>
-              <a:t>Fire and rescue</a:t>
-            </a:r>
-            <a:endParaRPr lang="en-US" sz="1400" dirty="0"/>
-          </a:p>
-        </p:txBody>
-      </p:sp>
-      <p:sp>
-        <p:nvSpPr>
-          <p:cNvPr id="14" name="Text 11"/>
-          <p:cNvSpPr/>
-          <p:nvPr/>
-        </p:nvSpPr>
-        <p:spPr>
-          <a:xfrm>
-            <a:off x="3840480" y="3337560"/>
-            <a:ext cx="7589520" cy="685800"/>
-          </a:xfrm>
-          <a:prstGeom prst="rect">
-            <a:avLst/>
-          </a:prstGeom>
-          <a:noFill/>
-          <a:ln/>
-        </p:spPr>
-        <p:txBody>
-          <a:bodyPr wrap="square" rtlCol="0" anchor="ctr"/>
-          <a:lstStyle/>
-          <a:p>
-            <a:pPr indent="0" marL="0">
-              <a:buNone/>
-            </a:pPr>
-            <a:r>
-              <a:rPr lang="en-US" sz="1300" dirty="0">
-                <a:solidFill>
-                  <a:srgbClr val="2A2A2A"/>
-                </a:solidFill>
-                <a:latin typeface="Calibri" pitchFamily="34" charset="0"/>
-                <a:ea typeface="Calibri" pitchFamily="34" charset="-122"/>
-                <a:cs typeface="Calibri" pitchFamily="34" charset="-120"/>
-              </a:rPr>
-              <a:t>Ladder climb, casualty evacuation, equipment carry</a:t>
-            </a:r>
-            <a:endParaRPr lang="en-US" sz="1300" dirty="0"/>
-          </a:p>
-        </p:txBody>
-      </p:sp>
-      <p:sp>
-        <p:nvSpPr>
-          <p:cNvPr id="15" name="Shape 12"/>
-          <p:cNvSpPr/>
-          <p:nvPr/>
-        </p:nvSpPr>
-        <p:spPr>
-          <a:xfrm>
-            <a:off x="548640" y="4251960"/>
-            <a:ext cx="11064240" cy="868680"/>
-          </a:xfrm>
-          <a:prstGeom prst="roundRect">
-            <a:avLst>
-              <a:gd name="adj" fmla="val 6316"/>
-            </a:avLst>
-          </a:prstGeom>
-          <a:solidFill>
-            <a:srgbClr val="E8EEF7"/>
-          </a:solidFill>
-          <a:ln/>
-        </p:spPr>
-      </p:sp>
-      <p:sp>
-        <p:nvSpPr>
-          <p:cNvPr id="16" name="Text 13"/>
-          <p:cNvSpPr/>
-          <p:nvPr/>
-        </p:nvSpPr>
-        <p:spPr>
-          <a:xfrm>
-            <a:off x="822960" y="4343400"/>
-            <a:ext cx="2926080" cy="685800"/>
-          </a:xfrm>
-          <a:prstGeom prst="rect">
-            <a:avLst/>
-          </a:prstGeom>
-          <a:noFill/>
-          <a:ln/>
-        </p:spPr>
-        <p:txBody>
-          <a:bodyPr wrap="square" rtlCol="0" anchor="ctr"/>
-          <a:lstStyle/>
-          <a:p>
-            <a:pPr indent="0" marL="0">
-              <a:buNone/>
-            </a:pPr>
-            <a:r>
-              <a:rPr lang="en-US" sz="1400" b="1" dirty="0">
-                <a:solidFill>
-                  <a:srgbClr val="122952"/>
-                </a:solidFill>
-                <a:latin typeface="Calibri" pitchFamily="34" charset="0"/>
-                <a:ea typeface="Calibri" pitchFamily="34" charset="-122"/>
-                <a:cs typeface="Calibri" pitchFamily="34" charset="-120"/>
-              </a:rPr>
-              <a:t>HM Prison Service</a:t>
-            </a:r>
-            <a:endParaRPr lang="en-US" sz="1400" dirty="0"/>
-          </a:p>
-        </p:txBody>
-      </p:sp>
-      <p:sp>
-        <p:nvSpPr>
-          <p:cNvPr id="17" name="Text 14"/>
-          <p:cNvSpPr/>
-          <p:nvPr/>
-        </p:nvSpPr>
-        <p:spPr>
-          <a:xfrm>
-            <a:off x="3840480" y="4343400"/>
-            <a:ext cx="7589520" cy="685800"/>
-          </a:xfrm>
-          <a:prstGeom prst="rect">
-            <a:avLst/>
-          </a:prstGeom>
-          <a:noFill/>
-          <a:ln/>
-        </p:spPr>
-        <p:txBody>
-          <a:bodyPr wrap="square" rtlCol="0" anchor="ctr"/>
-          <a:lstStyle/>
-          <a:p>
-            <a:pPr indent="0" marL="0">
-              <a:buNone/>
-            </a:pPr>
-            <a:r>
-              <a:rPr lang="en-US" sz="1300" dirty="0">
-                <a:solidFill>
-                  <a:srgbClr val="2A2A2A"/>
-                </a:solidFill>
-                <a:latin typeface="Calibri" pitchFamily="34" charset="0"/>
-                <a:ea typeface="Calibri" pitchFamily="34" charset="-122"/>
-                <a:cs typeface="Calibri" pitchFamily="34" charset="-120"/>
-              </a:rPr>
-              <a:t>Aerobic run, grip strength, seated bench press</a:t>
-            </a:r>
-            <a:endParaRPr lang="en-US" sz="1300" dirty="0"/>
-          </a:p>
-        </p:txBody>
-      </p:sp>
-      <p:sp>
-        <p:nvSpPr>
-          <p:cNvPr id="18" name="Shape 15"/>
-          <p:cNvSpPr/>
-          <p:nvPr/>
-        </p:nvSpPr>
-        <p:spPr>
-          <a:xfrm>
-            <a:off x="548640" y="5303520"/>
-            <a:ext cx="11064240" cy="548640"/>
-          </a:xfrm>
-          <a:prstGeom prst="roundRect">
-            <a:avLst>
-              <a:gd name="adj" fmla="val 10000"/>
-            </a:avLst>
-          </a:prstGeom>
-          <a:solidFill>
-            <a:srgbClr val="F0FDF4"/>
-          </a:solidFill>
-          <a:ln/>
-        </p:spPr>
-      </p:sp>
-      <p:sp>
-        <p:nvSpPr>
-          <p:cNvPr id="19" name="Text 16"/>
-          <p:cNvSpPr/>
-          <p:nvPr/>
-        </p:nvSpPr>
-        <p:spPr>
-          <a:xfrm>
-            <a:off x="822960" y="5367528"/>
-            <a:ext cx="10515600" cy="411480"/>
-          </a:xfrm>
-          <a:prstGeom prst="rect">
-            <a:avLst/>
-          </a:prstGeom>
-          <a:noFill/>
-          <a:ln/>
-        </p:spPr>
-        <p:txBody>
-          <a:bodyPr wrap="square" rtlCol="0" anchor="ctr"/>
-          <a:lstStyle/>
-          <a:p>
-            <a:pPr indent="0" marL="0">
-              <a:buNone/>
-            </a:pPr>
-            <a:r>
-              <a:rPr lang="en-US" sz="1300" b="1" dirty="0">
-                <a:solidFill>
-                  <a:srgbClr val="16A34A"/>
-                </a:solidFill>
-                <a:latin typeface="Calibri" pitchFamily="34" charset="0"/>
-                <a:ea typeface="Calibri" pitchFamily="34" charset="-122"/>
-                <a:cs typeface="Calibri" pitchFamily="34" charset="-120"/>
-              </a:rPr>
-              <a:t>Health monitoring tests:  </a:t>
-            </a:r>
-            <a:pPr indent="0" marL="0">
-              <a:buNone/>
-            </a:pPr>
-            <a:r>
-              <a:rPr lang="en-US" sz="1300" dirty="0">
-                <a:solidFill>
-                  <a:srgbClr val="2A2A2A"/>
-                </a:solidFill>
-                <a:latin typeface="Calibri" pitchFamily="34" charset="0"/>
-                <a:ea typeface="Calibri" pitchFamily="34" charset="-122"/>
-                <a:cs typeface="Calibri" pitchFamily="34" charset="-120"/>
-              </a:rPr>
-              <a:t>height, weight, body fat %, lung capacity, blood pressure, heart rate, BMI.</a:t>
-            </a:r>
-            <a:endParaRPr lang="en-US" sz="1300" dirty="0"/>
-          </a:p>
-        </p:txBody>
-      </p:sp>
-      <p:sp>
-        <p:nvSpPr>
-          <p:cNvPr id="20" name="Shape 17"/>
+          <p:cNvPr id="19" name="Shape 16"/>
           <p:cNvSpPr/>
           <p:nvPr/>
         </p:nvSpPr>
@@ -5233,7 +8052,7 @@
       </p:sp>
       <p:sp>
         <p:nvSpPr>
-          <p:cNvPr id="21" name="Text 18"/>
+          <p:cNvPr id="20" name="Text 17"/>
           <p:cNvSpPr/>
           <p:nvPr/>
         </p:nvSpPr>
@@ -5272,7 +8091,7 @@
       </p:sp>
       <p:sp>
         <p:nvSpPr>
-          <p:cNvPr id="22" name="Text 19"/>
+          <p:cNvPr id="21" name="Text 18"/>
           <p:cNvSpPr/>
           <p:nvPr/>
         </p:nvSpPr>
@@ -5303,7 +8122,7 @@
                 <a:ea typeface="Calibri" pitchFamily="34" charset="-122"/>
                 <a:cs typeface="Calibri" pitchFamily="34" charset="-120"/>
               </a:rPr>
-              <a:t>Knowledge Hub 3 — Types of Fitness and Health Monitoring Tests</a:t>
+              <a:t>Knowledge Hub 2 — Planning Personal Fitness Testing Activities</a:t>
             </a:r>
             <a:endParaRPr lang="en-US" sz="1000" dirty="0"/>
           </a:p>
@@ -5334,130 +8153,78 @@
           <a:chExt cx="0" cy="0"/>
         </a:xfrm>
       </p:grpSpPr>
-      <p:sp>
-        <p:nvSpPr>
-          <p:cNvPr id="2" name="Shape 0"/>
-          <p:cNvSpPr/>
-          <p:nvPr/>
-        </p:nvSpPr>
-        <p:spPr>
-          <a:xfrm>
-            <a:off x="0" y="0"/>
-            <a:ext cx="12188952" cy="6858000"/>
-          </a:xfrm>
-          <a:prstGeom prst="rect">
-            <a:avLst/>
+      <p:pic>
+        <p:nvPicPr>
+          <p:cNvPr id="2" name="Image 0" descr="preencoded.png">    </p:cNvPr>
+          <p:cNvPicPr>
+            <a:picLocks noChangeAspect="1"/>
+          </p:cNvPicPr>
+          <p:nvPr/>
+        </p:nvPicPr>
+        <p:blipFill>
+          <a:blip r:embed="rId1"/>
+          <a:stretch>
+            <a:fillRect/>
+          </a:stretch>
+        </p:blipFill>
+        <p:spPr>
+          <a:xfrm>
+            <a:off x="11109960" y="228600"/>
+            <a:ext cx="777240" cy="548640"/>
+          </a:xfrm>
+          <a:prstGeom prst="rect">
+            <a:avLst/>
+          </a:prstGeom>
+        </p:spPr>
+      </p:pic>
+      <p:sp>
+        <p:nvSpPr>
+          <p:cNvPr id="3" name="Shape 0"/>
+          <p:cNvSpPr/>
+          <p:nvPr/>
+        </p:nvSpPr>
+        <p:spPr>
+          <a:xfrm>
+            <a:off x="548640" y="274320"/>
+            <a:ext cx="2103120" cy="384048"/>
+          </a:xfrm>
+          <a:prstGeom prst="roundRect">
+            <a:avLst>
+              <a:gd name="adj" fmla="val 19048"/>
+            </a:avLst>
           </a:prstGeom>
           <a:solidFill>
-            <a:srgbClr val="122952"/>
+            <a:srgbClr val="1E40AF"/>
           </a:solidFill>
           <a:ln/>
         </p:spPr>
       </p:sp>
       <p:sp>
         <p:nvSpPr>
-          <p:cNvPr id="3" name="Text 1"/>
-          <p:cNvSpPr/>
-          <p:nvPr/>
-        </p:nvSpPr>
-        <p:spPr>
-          <a:xfrm>
-            <a:off x="731520" y="1828800"/>
-            <a:ext cx="2743200" cy="2286000"/>
-          </a:xfrm>
-          <a:prstGeom prst="rect">
-            <a:avLst/>
-          </a:prstGeom>
-          <a:noFill/>
-          <a:ln/>
-        </p:spPr>
-        <p:txBody>
-          <a:bodyPr wrap="square" rtlCol="0" anchor="ctr"/>
-          <a:lstStyle/>
-          <a:p>
-            <a:pPr indent="0" marL="0">
-              <a:buNone/>
-            </a:pPr>
-            <a:r>
-              <a:rPr lang="en-US" sz="14000" b="1" dirty="0">
-                <a:solidFill>
-                  <a:srgbClr val="26538A"/>
-                </a:solidFill>
-                <a:latin typeface="Calibri" pitchFamily="34" charset="0"/>
-                <a:ea typeface="Calibri" pitchFamily="34" charset="-122"/>
-                <a:cs typeface="Calibri" pitchFamily="34" charset="-120"/>
-              </a:rPr>
-              <a:t>B</a:t>
-            </a:r>
-            <a:endParaRPr lang="en-US" sz="14000" dirty="0"/>
-          </a:p>
-        </p:txBody>
-      </p:sp>
-      <p:sp>
-        <p:nvSpPr>
-          <p:cNvPr id="4" name="Text 2"/>
-          <p:cNvSpPr/>
-          <p:nvPr/>
-        </p:nvSpPr>
-        <p:spPr>
-          <a:xfrm>
-            <a:off x="3840480" y="2377440"/>
-            <a:ext cx="7589520" cy="548640"/>
-          </a:xfrm>
-          <a:prstGeom prst="rect">
-            <a:avLst/>
-          </a:prstGeom>
-          <a:noFill/>
-          <a:ln/>
-        </p:spPr>
-        <p:txBody>
-          <a:bodyPr wrap="square" rtlCol="0" anchor="ctr"/>
-          <a:lstStyle/>
-          <a:p>
-            <a:pPr indent="0" marL="0">
-              <a:buNone/>
-            </a:pPr>
-            <a:r>
-              <a:rPr lang="en-US" sz="2000" b="1" dirty="0">
-                <a:solidFill>
-                  <a:srgbClr val="C8A951"/>
-                </a:solidFill>
-                <a:latin typeface="Calibri" pitchFamily="34" charset="0"/>
-                <a:ea typeface="Calibri" pitchFamily="34" charset="-122"/>
-                <a:cs typeface="Calibri" pitchFamily="34" charset="-120"/>
-              </a:rPr>
-              <a:t>Learning Aim B</a:t>
-            </a:r>
-            <a:endParaRPr lang="en-US" sz="2000" dirty="0"/>
-          </a:p>
-        </p:txBody>
-      </p:sp>
-      <p:sp>
-        <p:nvSpPr>
-          <p:cNvPr id="5" name="Text 3"/>
-          <p:cNvSpPr/>
-          <p:nvPr/>
-        </p:nvSpPr>
-        <p:spPr>
-          <a:xfrm>
-            <a:off x="3840480" y="2926080"/>
-            <a:ext cx="7589520" cy="1005840"/>
-          </a:xfrm>
-          <a:prstGeom prst="rect">
-            <a:avLst/>
-          </a:prstGeom>
-          <a:noFill/>
-          <a:ln/>
-        </p:spPr>
-        <p:txBody>
-          <a:bodyPr wrap="square" rtlCol="0" anchor="ctr"/>
-          <a:lstStyle/>
-          <a:p>
-            <a:pPr indent="0" marL="0">
-              <a:buNone/>
-            </a:pPr>
-            <a:r>
-              <a:rPr lang="en-US" sz="3200" b="1" dirty="0">
+          <p:cNvPr id="4" name="Text 1"/>
+          <p:cNvSpPr/>
+          <p:nvPr/>
+        </p:nvSpPr>
+        <p:spPr>
+          <a:xfrm>
+            <a:off x="548640" y="274320"/>
+            <a:ext cx="2103120" cy="384048"/>
+          </a:xfrm>
+          <a:prstGeom prst="rect">
+            <a:avLst/>
+          </a:prstGeom>
+          <a:noFill/>
+          <a:ln/>
+        </p:spPr>
+        <p:txBody>
+          <a:bodyPr wrap="square" lIns="0" tIns="0" rIns="0" bIns="0" rtlCol="0" anchor="ctr"/>
+          <a:lstStyle/>
+          <a:p>
+            <a:pPr algn="ctr" indent="0" marL="0">
+              <a:buNone/>
+            </a:pPr>
+            <a:r>
+              <a:rPr lang="en-US" sz="1100" b="1" dirty="0">
                 <a:solidFill>
                   <a:srgbClr val="FFFFFF"/>
                 </a:solidFill>
@@ -5465,22 +8232,83 @@
                 <a:ea typeface="Calibri" pitchFamily="34" charset="-122"/>
                 <a:cs typeface="Calibri" pitchFamily="34" charset="-120"/>
               </a:rPr>
-              <a:t>Record and Review Participation</a:t>
-            </a:r>
-            <a:endParaRPr lang="en-US" sz="3200" dirty="0"/>
-          </a:p>
-        </p:txBody>
-      </p:sp>
-      <p:sp>
-        <p:nvSpPr>
-          <p:cNvPr id="6" name="Text 4"/>
-          <p:cNvSpPr/>
-          <p:nvPr/>
-        </p:nvSpPr>
-        <p:spPr>
-          <a:xfrm>
-            <a:off x="3840480" y="3977640"/>
-            <a:ext cx="7589520" cy="457200"/>
+              <a:t>WORKED EXAMPLE</a:t>
+            </a:r>
+            <a:endParaRPr lang="en-US" sz="1100" dirty="0"/>
+          </a:p>
+        </p:txBody>
+      </p:sp>
+      <p:sp>
+        <p:nvSpPr>
+          <p:cNvPr id="5" name="Text 2"/>
+          <p:cNvSpPr/>
+          <p:nvPr/>
+        </p:nvSpPr>
+        <p:spPr>
+          <a:xfrm>
+            <a:off x="548640" y="822960"/>
+            <a:ext cx="8869680" cy="640080"/>
+          </a:xfrm>
+          <a:prstGeom prst="rect">
+            <a:avLst/>
+          </a:prstGeom>
+          <a:noFill/>
+          <a:ln/>
+        </p:spPr>
+        <p:txBody>
+          <a:bodyPr wrap="square" rtlCol="0" anchor="ctr"/>
+          <a:lstStyle/>
+          <a:p>
+            <a:pPr indent="0" marL="0">
+              <a:buNone/>
+            </a:pPr>
+            <a:r>
+              <a:rPr lang="en-US" sz="2500" b="1" dirty="0">
+                <a:solidFill>
+                  <a:srgbClr val="122952"/>
+                </a:solidFill>
+                <a:latin typeface="Calibri" pitchFamily="34" charset="0"/>
+                <a:ea typeface="Calibri" pitchFamily="34" charset="-122"/>
+                <a:cs typeface="Calibri" pitchFamily="34" charset="-120"/>
+              </a:rPr>
+              <a:t>Has Sarah Met the Standard?</a:t>
+            </a:r>
+            <a:endParaRPr lang="en-US" sz="2500" dirty="0"/>
+          </a:p>
+        </p:txBody>
+      </p:sp>
+      <p:sp>
+        <p:nvSpPr>
+          <p:cNvPr id="6" name="Shape 3"/>
+          <p:cNvSpPr/>
+          <p:nvPr/>
+        </p:nvSpPr>
+        <p:spPr>
+          <a:xfrm>
+            <a:off x="548640" y="1554480"/>
+            <a:ext cx="11064240" cy="1005840"/>
+          </a:xfrm>
+          <a:prstGeom prst="roundRect">
+            <a:avLst>
+              <a:gd name="adj" fmla="val 5455"/>
+            </a:avLst>
+          </a:prstGeom>
+          <a:solidFill>
+            <a:srgbClr val="E8EEF7"/>
+          </a:solidFill>
+          <a:ln/>
+        </p:spPr>
+      </p:sp>
+      <p:sp>
+        <p:nvSpPr>
+          <p:cNvPr id="7" name="Text 4"/>
+          <p:cNvSpPr/>
+          <p:nvPr/>
+        </p:nvSpPr>
+        <p:spPr>
+          <a:xfrm>
+            <a:off x="822960" y="1691640"/>
+            <a:ext cx="10515600" cy="777240"/>
           </a:xfrm>
           <a:prstGeom prst="rect">
             <a:avLst/>
@@ -5498,15 +8326,503 @@
             <a:r>
               <a:rPr lang="en-US" sz="1400" dirty="0">
                 <a:solidFill>
-                  <a:srgbClr val="9FB3D9"/>
-                </a:solidFill>
-                <a:latin typeface="Calibri" pitchFamily="34" charset="0"/>
-                <a:ea typeface="Calibri" pitchFamily="34" charset="-122"/>
-                <a:cs typeface="Calibri" pitchFamily="34" charset="-120"/>
-              </a:rPr>
-              <a:t>Covers: B.P2  ·  B.M2  ·  B.D2  ·  B.P3  ·  B.M3  ·  B.D3</a:t>
+                  <a:srgbClr val="2A2A2A"/>
+                </a:solidFill>
+                <a:latin typeface="Calibri" pitchFamily="34" charset="0"/>
+                <a:ea typeface="Calibri" pitchFamily="34" charset="-122"/>
+                <a:cs typeface="Calibri" pitchFamily="34" charset="-120"/>
+              </a:rPr>
+              <a:t>Scenario: The Police multi-stage fitness test (bleep test) entry standard is level 5.4. Sarah completes the test and reaches level 6.2 before stopping.</a:t>
             </a:r>
             <a:endParaRPr lang="en-US" sz="1400" dirty="0"/>
+          </a:p>
+        </p:txBody>
+      </p:sp>
+      <p:sp>
+        <p:nvSpPr>
+          <p:cNvPr id="8" name="Shape 5"/>
+          <p:cNvSpPr/>
+          <p:nvPr/>
+        </p:nvSpPr>
+        <p:spPr>
+          <a:xfrm>
+            <a:off x="548640" y="2743200"/>
+            <a:ext cx="11064240" cy="777240"/>
+          </a:xfrm>
+          <a:prstGeom prst="roundRect">
+            <a:avLst>
+              <a:gd name="adj" fmla="val 7059"/>
+            </a:avLst>
+          </a:prstGeom>
+          <a:solidFill>
+            <a:srgbClr val="F7F9FC"/>
+          </a:solidFill>
+          <a:ln w="12700">
+            <a:solidFill>
+              <a:srgbClr val="D4D4CC"/>
+            </a:solidFill>
+            <a:prstDash val="solid"/>
+          </a:ln>
+        </p:spPr>
+      </p:sp>
+      <p:sp>
+        <p:nvSpPr>
+          <p:cNvPr id="9" name="Text 6"/>
+          <p:cNvSpPr/>
+          <p:nvPr/>
+        </p:nvSpPr>
+        <p:spPr>
+          <a:xfrm>
+            <a:off x="822960" y="2834640"/>
+            <a:ext cx="2926080" cy="594360"/>
+          </a:xfrm>
+          <a:prstGeom prst="rect">
+            <a:avLst/>
+          </a:prstGeom>
+          <a:noFill/>
+          <a:ln/>
+        </p:spPr>
+        <p:txBody>
+          <a:bodyPr wrap="square" rtlCol="0" anchor="ctr"/>
+          <a:lstStyle/>
+          <a:p>
+            <a:pPr indent="0" marL="0">
+              <a:buNone/>
+            </a:pPr>
+            <a:r>
+              <a:rPr lang="en-US" sz="1300" b="1" dirty="0">
+                <a:solidFill>
+                  <a:srgbClr val="122952"/>
+                </a:solidFill>
+                <a:latin typeface="Calibri" pitchFamily="34" charset="0"/>
+                <a:ea typeface="Calibri" pitchFamily="34" charset="-122"/>
+                <a:cs typeface="Calibri" pitchFamily="34" charset="-120"/>
+              </a:rPr>
+              <a:t>Step 1 — Find the standard</a:t>
+            </a:r>
+            <a:endParaRPr lang="en-US" sz="1300" dirty="0"/>
+          </a:p>
+        </p:txBody>
+      </p:sp>
+      <p:sp>
+        <p:nvSpPr>
+          <p:cNvPr id="10" name="Text 7"/>
+          <p:cNvSpPr/>
+          <p:nvPr/>
+        </p:nvSpPr>
+        <p:spPr>
+          <a:xfrm>
+            <a:off x="3840480" y="2834640"/>
+            <a:ext cx="7589520" cy="594360"/>
+          </a:xfrm>
+          <a:prstGeom prst="rect">
+            <a:avLst/>
+          </a:prstGeom>
+          <a:noFill/>
+          <a:ln/>
+        </p:spPr>
+        <p:txBody>
+          <a:bodyPr wrap="square" rtlCol="0" anchor="ctr"/>
+          <a:lstStyle/>
+          <a:p>
+            <a:pPr indent="0" marL="0">
+              <a:buNone/>
+            </a:pPr>
+            <a:r>
+              <a:rPr lang="en-US" sz="1250" dirty="0">
+                <a:solidFill>
+                  <a:srgbClr val="2A2A2A"/>
+                </a:solidFill>
+                <a:latin typeface="Calibri" pitchFamily="34" charset="0"/>
+                <a:ea typeface="Calibri" pitchFamily="34" charset="-122"/>
+                <a:cs typeface="Calibri" pitchFamily="34" charset="-120"/>
+              </a:rPr>
+              <a:t>The minimum required level for this test is 5.4.</a:t>
+            </a:r>
+            <a:endParaRPr lang="en-US" sz="1250" dirty="0"/>
+          </a:p>
+        </p:txBody>
+      </p:sp>
+      <p:sp>
+        <p:nvSpPr>
+          <p:cNvPr id="11" name="Shape 8"/>
+          <p:cNvSpPr/>
+          <p:nvPr/>
+        </p:nvSpPr>
+        <p:spPr>
+          <a:xfrm>
+            <a:off x="548640" y="3657600"/>
+            <a:ext cx="11064240" cy="777240"/>
+          </a:xfrm>
+          <a:prstGeom prst="roundRect">
+            <a:avLst>
+              <a:gd name="adj" fmla="val 7059"/>
+            </a:avLst>
+          </a:prstGeom>
+          <a:solidFill>
+            <a:srgbClr val="F7F9FC"/>
+          </a:solidFill>
+          <a:ln w="12700">
+            <a:solidFill>
+              <a:srgbClr val="D4D4CC"/>
+            </a:solidFill>
+            <a:prstDash val="solid"/>
+          </a:ln>
+        </p:spPr>
+      </p:sp>
+      <p:sp>
+        <p:nvSpPr>
+          <p:cNvPr id="12" name="Text 9"/>
+          <p:cNvSpPr/>
+          <p:nvPr/>
+        </p:nvSpPr>
+        <p:spPr>
+          <a:xfrm>
+            <a:off x="822960" y="3749040"/>
+            <a:ext cx="2926080" cy="594360"/>
+          </a:xfrm>
+          <a:prstGeom prst="rect">
+            <a:avLst/>
+          </a:prstGeom>
+          <a:noFill/>
+          <a:ln/>
+        </p:spPr>
+        <p:txBody>
+          <a:bodyPr wrap="square" rtlCol="0" anchor="ctr"/>
+          <a:lstStyle/>
+          <a:p>
+            <a:pPr indent="0" marL="0">
+              <a:buNone/>
+            </a:pPr>
+            <a:r>
+              <a:rPr lang="en-US" sz="1300" b="1" dirty="0">
+                <a:solidFill>
+                  <a:srgbClr val="122952"/>
+                </a:solidFill>
+                <a:latin typeface="Calibri" pitchFamily="34" charset="0"/>
+                <a:ea typeface="Calibri" pitchFamily="34" charset="-122"/>
+                <a:cs typeface="Calibri" pitchFamily="34" charset="-120"/>
+              </a:rPr>
+              <a:t>Step 2 — Find the result</a:t>
+            </a:r>
+            <a:endParaRPr lang="en-US" sz="1300" dirty="0"/>
+          </a:p>
+        </p:txBody>
+      </p:sp>
+      <p:sp>
+        <p:nvSpPr>
+          <p:cNvPr id="13" name="Text 10"/>
+          <p:cNvSpPr/>
+          <p:nvPr/>
+        </p:nvSpPr>
+        <p:spPr>
+          <a:xfrm>
+            <a:off x="3840480" y="3749040"/>
+            <a:ext cx="7589520" cy="594360"/>
+          </a:xfrm>
+          <a:prstGeom prst="rect">
+            <a:avLst/>
+          </a:prstGeom>
+          <a:noFill/>
+          <a:ln/>
+        </p:spPr>
+        <p:txBody>
+          <a:bodyPr wrap="square" rtlCol="0" anchor="ctr"/>
+          <a:lstStyle/>
+          <a:p>
+            <a:pPr indent="0" marL="0">
+              <a:buNone/>
+            </a:pPr>
+            <a:r>
+              <a:rPr lang="en-US" sz="1250" dirty="0">
+                <a:solidFill>
+                  <a:srgbClr val="2A2A2A"/>
+                </a:solidFill>
+                <a:latin typeface="Calibri" pitchFamily="34" charset="0"/>
+                <a:ea typeface="Calibri" pitchFamily="34" charset="-122"/>
+                <a:cs typeface="Calibri" pitchFamily="34" charset="-120"/>
+              </a:rPr>
+              <a:t>Sarah's actual result is level 6.2 — higher than 5.4.</a:t>
+            </a:r>
+            <a:endParaRPr lang="en-US" sz="1250" dirty="0"/>
+          </a:p>
+        </p:txBody>
+      </p:sp>
+      <p:sp>
+        <p:nvSpPr>
+          <p:cNvPr id="14" name="Shape 11"/>
+          <p:cNvSpPr/>
+          <p:nvPr/>
+        </p:nvSpPr>
+        <p:spPr>
+          <a:xfrm>
+            <a:off x="548640" y="4572000"/>
+            <a:ext cx="11064240" cy="777240"/>
+          </a:xfrm>
+          <a:prstGeom prst="roundRect">
+            <a:avLst>
+              <a:gd name="adj" fmla="val 7059"/>
+            </a:avLst>
+          </a:prstGeom>
+          <a:solidFill>
+            <a:srgbClr val="F7F9FC"/>
+          </a:solidFill>
+          <a:ln w="12700">
+            <a:solidFill>
+              <a:srgbClr val="D4D4CC"/>
+            </a:solidFill>
+            <a:prstDash val="solid"/>
+          </a:ln>
+        </p:spPr>
+      </p:sp>
+      <p:sp>
+        <p:nvSpPr>
+          <p:cNvPr id="15" name="Text 12"/>
+          <p:cNvSpPr/>
+          <p:nvPr/>
+        </p:nvSpPr>
+        <p:spPr>
+          <a:xfrm>
+            <a:off x="822960" y="4663440"/>
+            <a:ext cx="2926080" cy="594360"/>
+          </a:xfrm>
+          <a:prstGeom prst="rect">
+            <a:avLst/>
+          </a:prstGeom>
+          <a:noFill/>
+          <a:ln/>
+        </p:spPr>
+        <p:txBody>
+          <a:bodyPr wrap="square" rtlCol="0" anchor="ctr"/>
+          <a:lstStyle/>
+          <a:p>
+            <a:pPr indent="0" marL="0">
+              <a:buNone/>
+            </a:pPr>
+            <a:r>
+              <a:rPr lang="en-US" sz="1300" b="1" dirty="0">
+                <a:solidFill>
+                  <a:srgbClr val="122952"/>
+                </a:solidFill>
+                <a:latin typeface="Calibri" pitchFamily="34" charset="0"/>
+                <a:ea typeface="Calibri" pitchFamily="34" charset="-122"/>
+                <a:cs typeface="Calibri" pitchFamily="34" charset="-120"/>
+              </a:rPr>
+              <a:t>Step 3 — Compare</a:t>
+            </a:r>
+            <a:endParaRPr lang="en-US" sz="1300" dirty="0"/>
+          </a:p>
+        </p:txBody>
+      </p:sp>
+      <p:sp>
+        <p:nvSpPr>
+          <p:cNvPr id="16" name="Text 13"/>
+          <p:cNvSpPr/>
+          <p:nvPr/>
+        </p:nvSpPr>
+        <p:spPr>
+          <a:xfrm>
+            <a:off x="3840480" y="4663440"/>
+            <a:ext cx="7589520" cy="594360"/>
+          </a:xfrm>
+          <a:prstGeom prst="rect">
+            <a:avLst/>
+          </a:prstGeom>
+          <a:noFill/>
+          <a:ln/>
+        </p:spPr>
+        <p:txBody>
+          <a:bodyPr wrap="square" rtlCol="0" anchor="ctr"/>
+          <a:lstStyle/>
+          <a:p>
+            <a:pPr indent="0" marL="0">
+              <a:buNone/>
+            </a:pPr>
+            <a:r>
+              <a:rPr lang="en-US" sz="1250" dirty="0">
+                <a:solidFill>
+                  <a:srgbClr val="2A2A2A"/>
+                </a:solidFill>
+                <a:latin typeface="Calibri" pitchFamily="34" charset="0"/>
+                <a:ea typeface="Calibri" pitchFamily="34" charset="-122"/>
+                <a:cs typeface="Calibri" pitchFamily="34" charset="-120"/>
+              </a:rPr>
+              <a:t>6.2 is higher than 5.4, so Sarah has met the minimum standard, with room above it.</a:t>
+            </a:r>
+            <a:endParaRPr lang="en-US" sz="1250" dirty="0"/>
+          </a:p>
+        </p:txBody>
+      </p:sp>
+      <p:sp>
+        <p:nvSpPr>
+          <p:cNvPr id="17" name="Shape 14"/>
+          <p:cNvSpPr/>
+          <p:nvPr/>
+        </p:nvSpPr>
+        <p:spPr>
+          <a:xfrm>
+            <a:off x="548640" y="5532120"/>
+            <a:ext cx="11064240" cy="685800"/>
+          </a:xfrm>
+          <a:prstGeom prst="roundRect">
+            <a:avLst>
+              <a:gd name="adj" fmla="val 8000"/>
+            </a:avLst>
+          </a:prstGeom>
+          <a:solidFill>
+            <a:srgbClr val="F0FDF4"/>
+          </a:solidFill>
+          <a:ln/>
+        </p:spPr>
+      </p:sp>
+      <p:sp>
+        <p:nvSpPr>
+          <p:cNvPr id="18" name="Text 15"/>
+          <p:cNvSpPr/>
+          <p:nvPr/>
+        </p:nvSpPr>
+        <p:spPr>
+          <a:xfrm>
+            <a:off x="822960" y="5623560"/>
+            <a:ext cx="10515600" cy="502920"/>
+          </a:xfrm>
+          <a:prstGeom prst="rect">
+            <a:avLst/>
+          </a:prstGeom>
+          <a:noFill/>
+          <a:ln/>
+        </p:spPr>
+        <p:txBody>
+          <a:bodyPr wrap="square" rtlCol="0" anchor="ctr"/>
+          <a:lstStyle/>
+          <a:p>
+            <a:pPr indent="0" marL="0">
+              <a:buNone/>
+            </a:pPr>
+            <a:r>
+              <a:rPr lang="en-US" sz="1300" b="1" dirty="0">
+                <a:solidFill>
+                  <a:srgbClr val="16A34A"/>
+                </a:solidFill>
+                <a:latin typeface="Calibri" pitchFamily="34" charset="0"/>
+                <a:ea typeface="Calibri" pitchFamily="34" charset="-122"/>
+                <a:cs typeface="Calibri" pitchFamily="34" charset="-120"/>
+              </a:rPr>
+              <a:t>Answer:  </a:t>
+            </a:r>
+            <a:pPr indent="0" marL="0">
+              <a:buNone/>
+            </a:pPr>
+            <a:r>
+              <a:rPr lang="en-US" sz="1300" dirty="0">
+                <a:solidFill>
+                  <a:srgbClr val="2A2A2A"/>
+                </a:solidFill>
+                <a:latin typeface="Calibri" pitchFamily="34" charset="0"/>
+                <a:ea typeface="Calibri" pitchFamily="34" charset="-122"/>
+                <a:cs typeface="Calibri" pitchFamily="34" charset="-120"/>
+              </a:rPr>
+              <a:t>Yes — Sarah passed. Compare your own results to the standard the same way in your workbook: find the standard, find your result, compare.</a:t>
+            </a:r>
+            <a:endParaRPr lang="en-US" sz="1300" dirty="0"/>
+          </a:p>
+        </p:txBody>
+      </p:sp>
+      <p:sp>
+        <p:nvSpPr>
+          <p:cNvPr id="19" name="Shape 16"/>
+          <p:cNvSpPr/>
+          <p:nvPr/>
+        </p:nvSpPr>
+        <p:spPr>
+          <a:xfrm>
+            <a:off x="0" y="6537960"/>
+            <a:ext cx="12188952" cy="320040"/>
+          </a:xfrm>
+          <a:prstGeom prst="rect">
+            <a:avLst/>
+          </a:prstGeom>
+          <a:solidFill>
+            <a:srgbClr val="1B3A6B"/>
+          </a:solidFill>
+          <a:ln/>
+        </p:spPr>
+      </p:sp>
+      <p:sp>
+        <p:nvSpPr>
+          <p:cNvPr id="20" name="Text 17"/>
+          <p:cNvSpPr/>
+          <p:nvPr/>
+        </p:nvSpPr>
+        <p:spPr>
+          <a:xfrm>
+            <a:off x="274320" y="6537960"/>
+            <a:ext cx="3657600" cy="320040"/>
+          </a:xfrm>
+          <a:prstGeom prst="rect">
+            <a:avLst/>
+          </a:prstGeom>
+          <a:noFill/>
+          <a:ln/>
+        </p:spPr>
+        <p:txBody>
+          <a:bodyPr wrap="square" rtlCol="0" anchor="ctr"/>
+          <a:lstStyle/>
+          <a:p>
+            <a:pPr indent="0" marL="0">
+              <a:buNone/>
+            </a:pPr>
+            <a:r>
+              <a:rPr lang="en-US" sz="1000" dirty="0">
+                <a:solidFill>
+                  <a:srgbClr val="FFFFFF"/>
+                </a:solidFill>
+                <a:latin typeface="Calibri" pitchFamily="34" charset="0"/>
+                <a:ea typeface="Calibri" pitchFamily="34" charset="-122"/>
+                <a:cs typeface="Calibri" pitchFamily="34" charset="-120"/>
+              </a:rPr>
+              <a:t>PS6</a:t>
+            </a:r>
+            <a:endParaRPr lang="en-US" sz="1000" dirty="0"/>
+          </a:p>
+        </p:txBody>
+      </p:sp>
+      <p:sp>
+        <p:nvSpPr>
+          <p:cNvPr id="21" name="Text 18"/>
+          <p:cNvSpPr/>
+          <p:nvPr/>
+        </p:nvSpPr>
+        <p:spPr>
+          <a:xfrm>
+            <a:off x="7772400" y="6537960"/>
+            <a:ext cx="4114800" cy="320040"/>
+          </a:xfrm>
+          <a:prstGeom prst="rect">
+            <a:avLst/>
+          </a:prstGeom>
+          <a:noFill/>
+          <a:ln/>
+        </p:spPr>
+        <p:txBody>
+          <a:bodyPr wrap="square" rtlCol="0" anchor="ctr"/>
+          <a:lstStyle/>
+          <a:p>
+            <a:pPr algn="r" indent="0" marL="0">
+              <a:buNone/>
+            </a:pPr>
+            <a:r>
+              <a:rPr lang="en-US" sz="1000" dirty="0">
+                <a:solidFill>
+                  <a:srgbClr val="FFFFFF"/>
+                </a:solidFill>
+                <a:latin typeface="Calibri" pitchFamily="34" charset="0"/>
+                <a:ea typeface="Calibri" pitchFamily="34" charset="-122"/>
+                <a:cs typeface="Calibri" pitchFamily="34" charset="-120"/>
+              </a:rPr>
+              <a:t>Knowledge Hub 1 — Applying a Fitness Standard</a:t>
+            </a:r>
+            <a:endParaRPr lang="en-US" sz="1000" dirty="0"/>
           </a:p>
         </p:txBody>
       </p:sp>
@@ -5614,7 +8930,7 @@
                 <a:ea typeface="Calibri" pitchFamily="34" charset="-122"/>
                 <a:cs typeface="Calibri" pitchFamily="34" charset="-120"/>
               </a:rPr>
-              <a:t>B.P2/3 · B.M2/3 · B.D2/3</a:t>
+              <a:t>A.P1 · A.M1 · A.D1</a:t>
             </a:r>
             <a:endParaRPr lang="en-US" sz="1200" dirty="0"/>
           </a:p>
@@ -5653,7 +8969,7 @@
                 <a:ea typeface="Calibri" pitchFamily="34" charset="-122"/>
                 <a:cs typeface="Calibri" pitchFamily="34" charset="-120"/>
               </a:rPr>
-              <a:t>Recording and Reviewing Your Results</a:t>
+              <a:t>Fitness Tests Used by Public Services</a:t>
             </a:r>
             <a:endParaRPr lang="en-US" sz="2500" dirty="0"/>
           </a:p>
@@ -5661,217 +8977,18 @@
       </p:sp>
       <p:sp>
         <p:nvSpPr>
-          <p:cNvPr id="6" name="Text 3"/>
-          <p:cNvSpPr/>
-          <p:nvPr/>
-        </p:nvSpPr>
-        <p:spPr>
-          <a:xfrm>
-            <a:off x="548640" y="1097280"/>
-            <a:ext cx="5303520" cy="365760"/>
-          </a:xfrm>
-          <a:prstGeom prst="rect">
-            <a:avLst/>
-          </a:prstGeom>
-          <a:noFill/>
-          <a:ln/>
-        </p:spPr>
-        <p:txBody>
-          <a:bodyPr wrap="square" rtlCol="0" anchor="ctr"/>
-          <a:lstStyle/>
-          <a:p>
-            <a:pPr indent="0" marL="0">
-              <a:buNone/>
-            </a:pPr>
-            <a:r>
-              <a:rPr lang="en-US" sz="1600" b="1" dirty="0">
-                <a:solidFill>
-                  <a:srgbClr val="122952"/>
-                </a:solidFill>
-                <a:latin typeface="Calibri" pitchFamily="34" charset="0"/>
-                <a:ea typeface="Calibri" pitchFamily="34" charset="-122"/>
-                <a:cs typeface="Calibri" pitchFamily="34" charset="-120"/>
-              </a:rPr>
-              <a:t>Recording results well means:</a:t>
-            </a:r>
-            <a:endParaRPr lang="en-US" sz="1600" dirty="0"/>
-          </a:p>
-        </p:txBody>
-      </p:sp>
-      <p:sp>
-        <p:nvSpPr>
-          <p:cNvPr id="7" name="Text 4"/>
-          <p:cNvSpPr/>
-          <p:nvPr/>
-        </p:nvSpPr>
-        <p:spPr>
-          <a:xfrm>
-            <a:off x="548640" y="1554480"/>
-            <a:ext cx="5303520" cy="457200"/>
-          </a:xfrm>
-          <a:prstGeom prst="rect">
-            <a:avLst/>
-          </a:prstGeom>
-          <a:noFill/>
-          <a:ln/>
-        </p:spPr>
-        <p:txBody>
-          <a:bodyPr wrap="square" rtlCol="0" anchor="ctr"/>
-          <a:lstStyle/>
-          <a:p>
-            <a:pPr marL="342900" indent="-342900">
-              <a:buSzPct val="100000"/>
-              <a:buChar char="▪"/>
-            </a:pPr>
-            <a:r>
-              <a:rPr lang="en-US" sz="1300" dirty="0">
-                <a:solidFill>
-                  <a:srgbClr val="2A2A2A"/>
-                </a:solidFill>
-                <a:latin typeface="Calibri" pitchFamily="34" charset="0"/>
-                <a:ea typeface="Calibri" pitchFamily="34" charset="-122"/>
-                <a:cs typeface="Calibri" pitchFamily="34" charset="-120"/>
-              </a:rPr>
-              <a:t>Correct terminology</a:t>
-            </a:r>
-            <a:endParaRPr lang="en-US" sz="1300" dirty="0"/>
-          </a:p>
-        </p:txBody>
-      </p:sp>
-      <p:sp>
-        <p:nvSpPr>
-          <p:cNvPr id="8" name="Text 5"/>
-          <p:cNvSpPr/>
-          <p:nvPr/>
-        </p:nvSpPr>
-        <p:spPr>
-          <a:xfrm>
-            <a:off x="548640" y="2057400"/>
-            <a:ext cx="5303520" cy="457200"/>
-          </a:xfrm>
-          <a:prstGeom prst="rect">
-            <a:avLst/>
-          </a:prstGeom>
-          <a:noFill/>
-          <a:ln/>
-        </p:spPr>
-        <p:txBody>
-          <a:bodyPr wrap="square" rtlCol="0" anchor="ctr"/>
-          <a:lstStyle/>
-          <a:p>
-            <a:pPr marL="342900" indent="-342900">
-              <a:buSzPct val="100000"/>
-              <a:buChar char="▪"/>
-            </a:pPr>
-            <a:r>
-              <a:rPr lang="en-US" sz="1300" dirty="0">
-                <a:solidFill>
-                  <a:srgbClr val="2A2A2A"/>
-                </a:solidFill>
-                <a:latin typeface="Calibri" pitchFamily="34" charset="0"/>
-                <a:ea typeface="Calibri" pitchFamily="34" charset="-122"/>
-                <a:cs typeface="Calibri" pitchFamily="34" charset="-120"/>
-              </a:rPr>
-              <a:t>Correct units (secs, m, kg, mmHg)</a:t>
-            </a:r>
-            <a:endParaRPr lang="en-US" sz="1300" dirty="0"/>
-          </a:p>
-        </p:txBody>
-      </p:sp>
-      <p:sp>
-        <p:nvSpPr>
-          <p:cNvPr id="9" name="Text 6"/>
-          <p:cNvSpPr/>
-          <p:nvPr/>
-        </p:nvSpPr>
-        <p:spPr>
-          <a:xfrm>
-            <a:off x="548640" y="2560320"/>
-            <a:ext cx="5303520" cy="457200"/>
-          </a:xfrm>
-          <a:prstGeom prst="rect">
-            <a:avLst/>
-          </a:prstGeom>
-          <a:noFill/>
-          <a:ln/>
-        </p:spPr>
-        <p:txBody>
-          <a:bodyPr wrap="square" rtlCol="0" anchor="ctr"/>
-          <a:lstStyle/>
-          <a:p>
-            <a:pPr marL="342900" indent="-342900">
-              <a:buSzPct val="100000"/>
-              <a:buChar char="▪"/>
-            </a:pPr>
-            <a:r>
-              <a:rPr lang="en-US" sz="1300" dirty="0">
-                <a:solidFill>
-                  <a:srgbClr val="2A2A2A"/>
-                </a:solidFill>
-                <a:latin typeface="Calibri" pitchFamily="34" charset="0"/>
-                <a:ea typeface="Calibri" pitchFamily="34" charset="-122"/>
-                <a:cs typeface="Calibri" pitchFamily="34" charset="-120"/>
-              </a:rPr>
-              <a:t>An appropriate template</a:t>
-            </a:r>
-            <a:endParaRPr lang="en-US" sz="1300" dirty="0"/>
-          </a:p>
-        </p:txBody>
-      </p:sp>
-      <p:sp>
-        <p:nvSpPr>
-          <p:cNvPr id="10" name="Text 7"/>
-          <p:cNvSpPr/>
-          <p:nvPr/>
-        </p:nvSpPr>
-        <p:spPr>
-          <a:xfrm>
-            <a:off x="548640" y="3063240"/>
-            <a:ext cx="5303520" cy="457200"/>
-          </a:xfrm>
-          <a:prstGeom prst="rect">
-            <a:avLst/>
-          </a:prstGeom>
-          <a:noFill/>
-          <a:ln/>
-        </p:spPr>
-        <p:txBody>
-          <a:bodyPr wrap="square" rtlCol="0" anchor="ctr"/>
-          <a:lstStyle/>
-          <a:p>
-            <a:pPr marL="342900" indent="-342900">
-              <a:buSzPct val="100000"/>
-              <a:buChar char="▪"/>
-            </a:pPr>
-            <a:r>
-              <a:rPr lang="en-US" sz="1300" dirty="0">
-                <a:solidFill>
-                  <a:srgbClr val="2A2A2A"/>
-                </a:solidFill>
-                <a:latin typeface="Calibri" pitchFamily="34" charset="0"/>
-                <a:ea typeface="Calibri" pitchFamily="34" charset="-122"/>
-                <a:cs typeface="Calibri" pitchFamily="34" charset="-120"/>
-              </a:rPr>
-              <a:t>Good level of detail</a:t>
-            </a:r>
-            <a:endParaRPr lang="en-US" sz="1300" dirty="0"/>
-          </a:p>
-        </p:txBody>
-      </p:sp>
-      <p:sp>
-        <p:nvSpPr>
-          <p:cNvPr id="11" name="Shape 8"/>
-          <p:cNvSpPr/>
-          <p:nvPr/>
-        </p:nvSpPr>
-        <p:spPr>
-          <a:xfrm>
-            <a:off x="6172200" y="1097280"/>
-            <a:ext cx="5440680" cy="4343400"/>
+          <p:cNvPr id="6" name="Shape 3"/>
+          <p:cNvSpPr/>
+          <p:nvPr/>
+        </p:nvSpPr>
+        <p:spPr>
+          <a:xfrm>
+            <a:off x="548640" y="1234440"/>
+            <a:ext cx="11064240" cy="868680"/>
           </a:xfrm>
           <a:prstGeom prst="roundRect">
             <a:avLst>
-              <a:gd name="adj" fmla="val 1684"/>
+              <a:gd name="adj" fmla="val 6316"/>
             </a:avLst>
           </a:prstGeom>
           <a:solidFill>
@@ -5882,30 +8999,30 @@
       </p:sp>
       <p:sp>
         <p:nvSpPr>
-          <p:cNvPr id="12" name="Text 9"/>
-          <p:cNvSpPr/>
-          <p:nvPr/>
-        </p:nvSpPr>
-        <p:spPr>
-          <a:xfrm>
-            <a:off x="6446520" y="1325880"/>
-            <a:ext cx="4937760" cy="365760"/>
-          </a:xfrm>
-          <a:prstGeom prst="rect">
-            <a:avLst/>
-          </a:prstGeom>
-          <a:noFill/>
-          <a:ln/>
-        </p:spPr>
-        <p:txBody>
-          <a:bodyPr wrap="square" rtlCol="0" anchor="ctr"/>
-          <a:lstStyle/>
-          <a:p>
-            <a:pPr indent="0" marL="0">
-              <a:buNone/>
-            </a:pPr>
-            <a:r>
-              <a:rPr lang="en-US" sz="1600" b="1" dirty="0">
+          <p:cNvPr id="7" name="Text 4"/>
+          <p:cNvSpPr/>
+          <p:nvPr/>
+        </p:nvSpPr>
+        <p:spPr>
+          <a:xfrm>
+            <a:off x="822960" y="1325880"/>
+            <a:ext cx="2926080" cy="685800"/>
+          </a:xfrm>
+          <a:prstGeom prst="rect">
+            <a:avLst/>
+          </a:prstGeom>
+          <a:noFill/>
+          <a:ln/>
+        </p:spPr>
+        <p:txBody>
+          <a:bodyPr wrap="square" rtlCol="0" anchor="ctr"/>
+          <a:lstStyle/>
+          <a:p>
+            <a:pPr indent="0" marL="0">
+              <a:buNone/>
+            </a:pPr>
+            <a:r>
+              <a:rPr lang="en-US" sz="1400" b="1" dirty="0">
                 <a:solidFill>
                   <a:srgbClr val="122952"/>
                 </a:solidFill>
@@ -5913,11 +9030,172 @@
                 <a:ea typeface="Calibri" pitchFamily="34" charset="-122"/>
                 <a:cs typeface="Calibri" pitchFamily="34" charset="-120"/>
               </a:rPr>
-              <a:t>Reviewing your performance means:</a:t>
-            </a:r>
-            <a:endParaRPr lang="en-US" sz="1600" dirty="0"/>
-          </a:p>
-        </p:txBody>
+              <a:t>Armed services</a:t>
+            </a:r>
+            <a:endParaRPr lang="en-US" sz="1400" dirty="0"/>
+          </a:p>
+        </p:txBody>
+      </p:sp>
+      <p:sp>
+        <p:nvSpPr>
+          <p:cNvPr id="8" name="Text 5"/>
+          <p:cNvSpPr/>
+          <p:nvPr/>
+        </p:nvSpPr>
+        <p:spPr>
+          <a:xfrm>
+            <a:off x="3840480" y="1325880"/>
+            <a:ext cx="7589520" cy="685800"/>
+          </a:xfrm>
+          <a:prstGeom prst="rect">
+            <a:avLst/>
+          </a:prstGeom>
+          <a:noFill/>
+          <a:ln/>
+        </p:spPr>
+        <p:txBody>
+          <a:bodyPr wrap="square" rtlCol="0" anchor="ctr"/>
+          <a:lstStyle/>
+          <a:p>
+            <a:pPr indent="0" marL="0">
+              <a:buNone/>
+            </a:pPr>
+            <a:r>
+              <a:rPr lang="en-US" sz="1300" dirty="0">
+                <a:solidFill>
+                  <a:srgbClr val="2A2A2A"/>
+                </a:solidFill>
+                <a:latin typeface="Calibri" pitchFamily="34" charset="0"/>
+                <a:ea typeface="Calibri" pitchFamily="34" charset="-122"/>
+                <a:cs typeface="Calibri" pitchFamily="34" charset="-120"/>
+              </a:rPr>
+              <a:t>Static lift, Jerry can carry, 1.5 mile run</a:t>
+            </a:r>
+            <a:endParaRPr lang="en-US" sz="1300" dirty="0"/>
+          </a:p>
+        </p:txBody>
+      </p:sp>
+      <p:sp>
+        <p:nvSpPr>
+          <p:cNvPr id="9" name="Shape 6"/>
+          <p:cNvSpPr/>
+          <p:nvPr/>
+        </p:nvSpPr>
+        <p:spPr>
+          <a:xfrm>
+            <a:off x="548640" y="2240280"/>
+            <a:ext cx="11064240" cy="868680"/>
+          </a:xfrm>
+          <a:prstGeom prst="roundRect">
+            <a:avLst>
+              <a:gd name="adj" fmla="val 6316"/>
+            </a:avLst>
+          </a:prstGeom>
+          <a:solidFill>
+            <a:srgbClr val="E8EEF7"/>
+          </a:solidFill>
+          <a:ln/>
+        </p:spPr>
+      </p:sp>
+      <p:sp>
+        <p:nvSpPr>
+          <p:cNvPr id="10" name="Text 7"/>
+          <p:cNvSpPr/>
+          <p:nvPr/>
+        </p:nvSpPr>
+        <p:spPr>
+          <a:xfrm>
+            <a:off x="822960" y="2331720"/>
+            <a:ext cx="2926080" cy="685800"/>
+          </a:xfrm>
+          <a:prstGeom prst="rect">
+            <a:avLst/>
+          </a:prstGeom>
+          <a:noFill/>
+          <a:ln/>
+        </p:spPr>
+        <p:txBody>
+          <a:bodyPr wrap="square" rtlCol="0" anchor="ctr"/>
+          <a:lstStyle/>
+          <a:p>
+            <a:pPr indent="0" marL="0">
+              <a:buNone/>
+            </a:pPr>
+            <a:r>
+              <a:rPr lang="en-US" sz="1400" b="1" dirty="0">
+                <a:solidFill>
+                  <a:srgbClr val="122952"/>
+                </a:solidFill>
+                <a:latin typeface="Calibri" pitchFamily="34" charset="0"/>
+                <a:ea typeface="Calibri" pitchFamily="34" charset="-122"/>
+                <a:cs typeface="Calibri" pitchFamily="34" charset="-120"/>
+              </a:rPr>
+              <a:t>Police</a:t>
+            </a:r>
+            <a:endParaRPr lang="en-US" sz="1400" dirty="0"/>
+          </a:p>
+        </p:txBody>
+      </p:sp>
+      <p:sp>
+        <p:nvSpPr>
+          <p:cNvPr id="11" name="Text 8"/>
+          <p:cNvSpPr/>
+          <p:nvPr/>
+        </p:nvSpPr>
+        <p:spPr>
+          <a:xfrm>
+            <a:off x="3840480" y="2331720"/>
+            <a:ext cx="7589520" cy="685800"/>
+          </a:xfrm>
+          <a:prstGeom prst="rect">
+            <a:avLst/>
+          </a:prstGeom>
+          <a:noFill/>
+          <a:ln/>
+        </p:spPr>
+        <p:txBody>
+          <a:bodyPr wrap="square" rtlCol="0" anchor="ctr"/>
+          <a:lstStyle/>
+          <a:p>
+            <a:pPr indent="0" marL="0">
+              <a:buNone/>
+            </a:pPr>
+            <a:r>
+              <a:rPr lang="en-US" sz="1300" dirty="0">
+                <a:solidFill>
+                  <a:srgbClr val="2A2A2A"/>
+                </a:solidFill>
+                <a:latin typeface="Calibri" pitchFamily="34" charset="0"/>
+                <a:ea typeface="Calibri" pitchFamily="34" charset="-122"/>
+                <a:cs typeface="Calibri" pitchFamily="34" charset="-120"/>
+              </a:rPr>
+              <a:t>Bleep test (multi-stage fitness test), dynamic strength test</a:t>
+            </a:r>
+            <a:endParaRPr lang="en-US" sz="1300" dirty="0"/>
+          </a:p>
+        </p:txBody>
+      </p:sp>
+      <p:sp>
+        <p:nvSpPr>
+          <p:cNvPr id="12" name="Shape 9"/>
+          <p:cNvSpPr/>
+          <p:nvPr/>
+        </p:nvSpPr>
+        <p:spPr>
+          <a:xfrm>
+            <a:off x="548640" y="3246120"/>
+            <a:ext cx="11064240" cy="868680"/>
+          </a:xfrm>
+          <a:prstGeom prst="roundRect">
+            <a:avLst>
+              <a:gd name="adj" fmla="val 6316"/>
+            </a:avLst>
+          </a:prstGeom>
+          <a:solidFill>
+            <a:srgbClr val="E8EEF7"/>
+          </a:solidFill>
+          <a:ln/>
+        </p:spPr>
       </p:sp>
       <p:sp>
         <p:nvSpPr>
@@ -5927,8 +9205,208 @@
         </p:nvSpPr>
         <p:spPr>
           <a:xfrm>
-            <a:off x="6446520" y="1874520"/>
-            <a:ext cx="4937760" cy="320040"/>
+            <a:off x="822960" y="3337560"/>
+            <a:ext cx="2926080" cy="685800"/>
+          </a:xfrm>
+          <a:prstGeom prst="rect">
+            <a:avLst/>
+          </a:prstGeom>
+          <a:noFill/>
+          <a:ln/>
+        </p:spPr>
+        <p:txBody>
+          <a:bodyPr wrap="square" rtlCol="0" anchor="ctr"/>
+          <a:lstStyle/>
+          <a:p>
+            <a:pPr indent="0" marL="0">
+              <a:buNone/>
+            </a:pPr>
+            <a:r>
+              <a:rPr lang="en-US" sz="1400" b="1" dirty="0">
+                <a:solidFill>
+                  <a:srgbClr val="122952"/>
+                </a:solidFill>
+                <a:latin typeface="Calibri" pitchFamily="34" charset="0"/>
+                <a:ea typeface="Calibri" pitchFamily="34" charset="-122"/>
+                <a:cs typeface="Calibri" pitchFamily="34" charset="-120"/>
+              </a:rPr>
+              <a:t>Fire and rescue</a:t>
+            </a:r>
+            <a:endParaRPr lang="en-US" sz="1400" dirty="0"/>
+          </a:p>
+        </p:txBody>
+      </p:sp>
+      <p:sp>
+        <p:nvSpPr>
+          <p:cNvPr id="14" name="Text 11"/>
+          <p:cNvSpPr/>
+          <p:nvPr/>
+        </p:nvSpPr>
+        <p:spPr>
+          <a:xfrm>
+            <a:off x="3840480" y="3337560"/>
+            <a:ext cx="7589520" cy="685800"/>
+          </a:xfrm>
+          <a:prstGeom prst="rect">
+            <a:avLst/>
+          </a:prstGeom>
+          <a:noFill/>
+          <a:ln/>
+        </p:spPr>
+        <p:txBody>
+          <a:bodyPr wrap="square" rtlCol="0" anchor="ctr"/>
+          <a:lstStyle/>
+          <a:p>
+            <a:pPr indent="0" marL="0">
+              <a:buNone/>
+            </a:pPr>
+            <a:r>
+              <a:rPr lang="en-US" sz="1300" dirty="0">
+                <a:solidFill>
+                  <a:srgbClr val="2A2A2A"/>
+                </a:solidFill>
+                <a:latin typeface="Calibri" pitchFamily="34" charset="0"/>
+                <a:ea typeface="Calibri" pitchFamily="34" charset="-122"/>
+                <a:cs typeface="Calibri" pitchFamily="34" charset="-120"/>
+              </a:rPr>
+              <a:t>Ladder climb, casualty evacuation, equipment carry</a:t>
+            </a:r>
+            <a:endParaRPr lang="en-US" sz="1300" dirty="0"/>
+          </a:p>
+        </p:txBody>
+      </p:sp>
+      <p:sp>
+        <p:nvSpPr>
+          <p:cNvPr id="15" name="Shape 12"/>
+          <p:cNvSpPr/>
+          <p:nvPr/>
+        </p:nvSpPr>
+        <p:spPr>
+          <a:xfrm>
+            <a:off x="548640" y="4251960"/>
+            <a:ext cx="11064240" cy="868680"/>
+          </a:xfrm>
+          <a:prstGeom prst="roundRect">
+            <a:avLst>
+              <a:gd name="adj" fmla="val 6316"/>
+            </a:avLst>
+          </a:prstGeom>
+          <a:solidFill>
+            <a:srgbClr val="E8EEF7"/>
+          </a:solidFill>
+          <a:ln/>
+        </p:spPr>
+      </p:sp>
+      <p:sp>
+        <p:nvSpPr>
+          <p:cNvPr id="16" name="Text 13"/>
+          <p:cNvSpPr/>
+          <p:nvPr/>
+        </p:nvSpPr>
+        <p:spPr>
+          <a:xfrm>
+            <a:off x="822960" y="4343400"/>
+            <a:ext cx="2926080" cy="685800"/>
+          </a:xfrm>
+          <a:prstGeom prst="rect">
+            <a:avLst/>
+          </a:prstGeom>
+          <a:noFill/>
+          <a:ln/>
+        </p:spPr>
+        <p:txBody>
+          <a:bodyPr wrap="square" rtlCol="0" anchor="ctr"/>
+          <a:lstStyle/>
+          <a:p>
+            <a:pPr indent="0" marL="0">
+              <a:buNone/>
+            </a:pPr>
+            <a:r>
+              <a:rPr lang="en-US" sz="1400" b="1" dirty="0">
+                <a:solidFill>
+                  <a:srgbClr val="122952"/>
+                </a:solidFill>
+                <a:latin typeface="Calibri" pitchFamily="34" charset="0"/>
+                <a:ea typeface="Calibri" pitchFamily="34" charset="-122"/>
+                <a:cs typeface="Calibri" pitchFamily="34" charset="-120"/>
+              </a:rPr>
+              <a:t>HM Prison Service</a:t>
+            </a:r>
+            <a:endParaRPr lang="en-US" sz="1400" dirty="0"/>
+          </a:p>
+        </p:txBody>
+      </p:sp>
+      <p:sp>
+        <p:nvSpPr>
+          <p:cNvPr id="17" name="Text 14"/>
+          <p:cNvSpPr/>
+          <p:nvPr/>
+        </p:nvSpPr>
+        <p:spPr>
+          <a:xfrm>
+            <a:off x="3840480" y="4343400"/>
+            <a:ext cx="7589520" cy="685800"/>
+          </a:xfrm>
+          <a:prstGeom prst="rect">
+            <a:avLst/>
+          </a:prstGeom>
+          <a:noFill/>
+          <a:ln/>
+        </p:spPr>
+        <p:txBody>
+          <a:bodyPr wrap="square" rtlCol="0" anchor="ctr"/>
+          <a:lstStyle/>
+          <a:p>
+            <a:pPr indent="0" marL="0">
+              <a:buNone/>
+            </a:pPr>
+            <a:r>
+              <a:rPr lang="en-US" sz="1300" dirty="0">
+                <a:solidFill>
+                  <a:srgbClr val="2A2A2A"/>
+                </a:solidFill>
+                <a:latin typeface="Calibri" pitchFamily="34" charset="0"/>
+                <a:ea typeface="Calibri" pitchFamily="34" charset="-122"/>
+                <a:cs typeface="Calibri" pitchFamily="34" charset="-120"/>
+              </a:rPr>
+              <a:t>Aerobic run, grip strength, seated bench press</a:t>
+            </a:r>
+            <a:endParaRPr lang="en-US" sz="1300" dirty="0"/>
+          </a:p>
+        </p:txBody>
+      </p:sp>
+      <p:sp>
+        <p:nvSpPr>
+          <p:cNvPr id="18" name="Shape 15"/>
+          <p:cNvSpPr/>
+          <p:nvPr/>
+        </p:nvSpPr>
+        <p:spPr>
+          <a:xfrm>
+            <a:off x="548640" y="5303520"/>
+            <a:ext cx="11064240" cy="548640"/>
+          </a:xfrm>
+          <a:prstGeom prst="roundRect">
+            <a:avLst>
+              <a:gd name="adj" fmla="val 10000"/>
+            </a:avLst>
+          </a:prstGeom>
+          <a:solidFill>
+            <a:srgbClr val="F0FDF4"/>
+          </a:solidFill>
+          <a:ln/>
+        </p:spPr>
+      </p:sp>
+      <p:sp>
+        <p:nvSpPr>
+          <p:cNvPr id="19" name="Text 16"/>
+          <p:cNvSpPr/>
+          <p:nvPr/>
+        </p:nvSpPr>
+        <p:spPr>
+          <a:xfrm>
+            <a:off x="822960" y="5367528"/>
+            <a:ext cx="10515600" cy="411480"/>
           </a:xfrm>
           <a:prstGeom prst="rect">
             <a:avLst/>
@@ -5946,13 +9424,27 @@
             <a:r>
               <a:rPr lang="en-US" sz="1300" b="1" dirty="0">
                 <a:solidFill>
-                  <a:srgbClr val="122952"/>
-                </a:solidFill>
-                <a:latin typeface="Calibri" pitchFamily="34" charset="0"/>
-                <a:ea typeface="Calibri" pitchFamily="34" charset="-122"/>
-                <a:cs typeface="Calibri" pitchFamily="34" charset="-120"/>
-              </a:rPr>
-              <a:t>Self-evaluation</a:t>
+                  <a:srgbClr val="16A34A"/>
+                </a:solidFill>
+                <a:latin typeface="Calibri" pitchFamily="34" charset="0"/>
+                <a:ea typeface="Calibri" pitchFamily="34" charset="-122"/>
+                <a:cs typeface="Calibri" pitchFamily="34" charset="-120"/>
+              </a:rPr>
+              <a:t>Health monitoring tests:  </a:t>
+            </a:r>
+            <a:pPr indent="0" marL="0">
+              <a:buNone/>
+            </a:pPr>
+            <a:r>
+              <a:rPr lang="en-US" sz="1300" dirty="0">
+                <a:solidFill>
+                  <a:srgbClr val="2A2A2A"/>
+                </a:solidFill>
+                <a:latin typeface="Calibri" pitchFamily="34" charset="0"/>
+                <a:ea typeface="Calibri" pitchFamily="34" charset="-122"/>
+                <a:cs typeface="Calibri" pitchFamily="34" charset="-120"/>
+              </a:rPr>
+              <a:t>height, weight, body fat %, lung capacity, blood pressure, heart rate, BMI.</a:t>
             </a:r>
             <a:endParaRPr lang="en-US" sz="1300" dirty="0"/>
           </a:p>
@@ -5960,280 +9452,7 @@
       </p:sp>
       <p:sp>
         <p:nvSpPr>
-          <p:cNvPr id="14" name="Text 11"/>
-          <p:cNvSpPr/>
-          <p:nvPr/>
-        </p:nvSpPr>
-        <p:spPr>
-          <a:xfrm>
-            <a:off x="6446520" y="2240280"/>
-            <a:ext cx="4937760" cy="548640"/>
-          </a:xfrm>
-          <a:prstGeom prst="rect">
-            <a:avLst/>
-          </a:prstGeom>
-          <a:noFill/>
-          <a:ln/>
-        </p:spPr>
-        <p:txBody>
-          <a:bodyPr wrap="square" rtlCol="0" anchor="ctr"/>
-          <a:lstStyle/>
-          <a:p>
-            <a:pPr indent="0" marL="0">
-              <a:buNone/>
-            </a:pPr>
-            <a:r>
-              <a:rPr lang="en-US" sz="1200" dirty="0">
-                <a:solidFill>
-                  <a:srgbClr val="2A2A2A"/>
-                </a:solidFill>
-                <a:latin typeface="Calibri" pitchFamily="34" charset="0"/>
-                <a:ea typeface="Calibri" pitchFamily="34" charset="-122"/>
-                <a:cs typeface="Calibri" pitchFamily="34" charset="-120"/>
-              </a:rPr>
-              <a:t>Comparing your own results honestly</a:t>
-            </a:r>
-            <a:endParaRPr lang="en-US" sz="1200" dirty="0"/>
-          </a:p>
-        </p:txBody>
-      </p:sp>
-      <p:sp>
-        <p:nvSpPr>
-          <p:cNvPr id="15" name="Text 12"/>
-          <p:cNvSpPr/>
-          <p:nvPr/>
-        </p:nvSpPr>
-        <p:spPr>
-          <a:xfrm>
-            <a:off x="6446520" y="2834640"/>
-            <a:ext cx="4937760" cy="320040"/>
-          </a:xfrm>
-          <a:prstGeom prst="rect">
-            <a:avLst/>
-          </a:prstGeom>
-          <a:noFill/>
-          <a:ln/>
-        </p:spPr>
-        <p:txBody>
-          <a:bodyPr wrap="square" rtlCol="0" anchor="ctr"/>
-          <a:lstStyle/>
-          <a:p>
-            <a:pPr indent="0" marL="0">
-              <a:buNone/>
-            </a:pPr>
-            <a:r>
-              <a:rPr lang="en-US" sz="1300" b="1" dirty="0">
-                <a:solidFill>
-                  <a:srgbClr val="122952"/>
-                </a:solidFill>
-                <a:latin typeface="Calibri" pitchFamily="34" charset="0"/>
-                <a:ea typeface="Calibri" pitchFamily="34" charset="-122"/>
-                <a:cs typeface="Calibri" pitchFamily="34" charset="-120"/>
-              </a:rPr>
-              <a:t>Feedback</a:t>
-            </a:r>
-            <a:endParaRPr lang="en-US" sz="1300" dirty="0"/>
-          </a:p>
-        </p:txBody>
-      </p:sp>
-      <p:sp>
-        <p:nvSpPr>
-          <p:cNvPr id="16" name="Text 13"/>
-          <p:cNvSpPr/>
-          <p:nvPr/>
-        </p:nvSpPr>
-        <p:spPr>
-          <a:xfrm>
-            <a:off x="6446520" y="3200400"/>
-            <a:ext cx="4937760" cy="548640"/>
-          </a:xfrm>
-          <a:prstGeom prst="rect">
-            <a:avLst/>
-          </a:prstGeom>
-          <a:noFill/>
-          <a:ln/>
-        </p:spPr>
-        <p:txBody>
-          <a:bodyPr wrap="square" rtlCol="0" anchor="ctr"/>
-          <a:lstStyle/>
-          <a:p>
-            <a:pPr indent="0" marL="0">
-              <a:buNone/>
-            </a:pPr>
-            <a:r>
-              <a:rPr lang="en-US" sz="1200" dirty="0">
-                <a:solidFill>
-                  <a:srgbClr val="2A2A2A"/>
-                </a:solidFill>
-                <a:latin typeface="Calibri" pitchFamily="34" charset="0"/>
-                <a:ea typeface="Calibri" pitchFamily="34" charset="-122"/>
-                <a:cs typeface="Calibri" pitchFamily="34" charset="-120"/>
-              </a:rPr>
-              <a:t>From peers or your tutor</a:t>
-            </a:r>
-            <a:endParaRPr lang="en-US" sz="1200" dirty="0"/>
-          </a:p>
-        </p:txBody>
-      </p:sp>
-      <p:sp>
-        <p:nvSpPr>
-          <p:cNvPr id="17" name="Text 14"/>
-          <p:cNvSpPr/>
-          <p:nvPr/>
-        </p:nvSpPr>
-        <p:spPr>
-          <a:xfrm>
-            <a:off x="6446520" y="3794760"/>
-            <a:ext cx="4937760" cy="320040"/>
-          </a:xfrm>
-          <a:prstGeom prst="rect">
-            <a:avLst/>
-          </a:prstGeom>
-          <a:noFill/>
-          <a:ln/>
-        </p:spPr>
-        <p:txBody>
-          <a:bodyPr wrap="square" rtlCol="0" anchor="ctr"/>
-          <a:lstStyle/>
-          <a:p>
-            <a:pPr indent="0" marL="0">
-              <a:buNone/>
-            </a:pPr>
-            <a:r>
-              <a:rPr lang="en-US" sz="1300" b="1" dirty="0">
-                <a:solidFill>
-                  <a:srgbClr val="122952"/>
-                </a:solidFill>
-                <a:latin typeface="Calibri" pitchFamily="34" charset="0"/>
-                <a:ea typeface="Calibri" pitchFamily="34" charset="-122"/>
-                <a:cs typeface="Calibri" pitchFamily="34" charset="-120"/>
-              </a:rPr>
-              <a:t>Draw conclusions</a:t>
-            </a:r>
-            <a:endParaRPr lang="en-US" sz="1300" dirty="0"/>
-          </a:p>
-        </p:txBody>
-      </p:sp>
-      <p:sp>
-        <p:nvSpPr>
-          <p:cNvPr id="18" name="Text 15"/>
-          <p:cNvSpPr/>
-          <p:nvPr/>
-        </p:nvSpPr>
-        <p:spPr>
-          <a:xfrm>
-            <a:off x="6446520" y="4160520"/>
-            <a:ext cx="4937760" cy="548640"/>
-          </a:xfrm>
-          <a:prstGeom prst="rect">
-            <a:avLst/>
-          </a:prstGeom>
-          <a:noFill/>
-          <a:ln/>
-        </p:spPr>
-        <p:txBody>
-          <a:bodyPr wrap="square" rtlCol="0" anchor="ctr"/>
-          <a:lstStyle/>
-          <a:p>
-            <a:pPr indent="0" marL="0">
-              <a:buNone/>
-            </a:pPr>
-            <a:r>
-              <a:rPr lang="en-US" sz="1200" dirty="0">
-                <a:solidFill>
-                  <a:srgbClr val="2A2A2A"/>
-                </a:solidFill>
-                <a:latin typeface="Calibri" pitchFamily="34" charset="0"/>
-                <a:ea typeface="Calibri" pitchFamily="34" charset="-122"/>
-                <a:cs typeface="Calibri" pitchFamily="34" charset="-120"/>
-              </a:rPr>
-              <a:t>What the data actually shows</a:t>
-            </a:r>
-            <a:endParaRPr lang="en-US" sz="1200" dirty="0"/>
-          </a:p>
-        </p:txBody>
-      </p:sp>
-      <p:sp>
-        <p:nvSpPr>
-          <p:cNvPr id="19" name="Text 16"/>
-          <p:cNvSpPr/>
-          <p:nvPr/>
-        </p:nvSpPr>
-        <p:spPr>
-          <a:xfrm>
-            <a:off x="6446520" y="4754880"/>
-            <a:ext cx="4937760" cy="320040"/>
-          </a:xfrm>
-          <a:prstGeom prst="rect">
-            <a:avLst/>
-          </a:prstGeom>
-          <a:noFill/>
-          <a:ln/>
-        </p:spPr>
-        <p:txBody>
-          <a:bodyPr wrap="square" rtlCol="0" anchor="ctr"/>
-          <a:lstStyle/>
-          <a:p>
-            <a:pPr indent="0" marL="0">
-              <a:buNone/>
-            </a:pPr>
-            <a:r>
-              <a:rPr lang="en-US" sz="1300" b="1" dirty="0">
-                <a:solidFill>
-                  <a:srgbClr val="122952"/>
-                </a:solidFill>
-                <a:latin typeface="Calibri" pitchFamily="34" charset="0"/>
-                <a:ea typeface="Calibri" pitchFamily="34" charset="-122"/>
-                <a:cs typeface="Calibri" pitchFamily="34" charset="-120"/>
-              </a:rPr>
-              <a:t>Recommend improvements</a:t>
-            </a:r>
-            <a:endParaRPr lang="en-US" sz="1300" dirty="0"/>
-          </a:p>
-        </p:txBody>
-      </p:sp>
-      <p:sp>
-        <p:nvSpPr>
-          <p:cNvPr id="20" name="Text 17"/>
-          <p:cNvSpPr/>
-          <p:nvPr/>
-        </p:nvSpPr>
-        <p:spPr>
-          <a:xfrm>
-            <a:off x="6446520" y="5120640"/>
-            <a:ext cx="4937760" cy="548640"/>
-          </a:xfrm>
-          <a:prstGeom prst="rect">
-            <a:avLst/>
-          </a:prstGeom>
-          <a:noFill/>
-          <a:ln/>
-        </p:spPr>
-        <p:txBody>
-          <a:bodyPr wrap="square" rtlCol="0" anchor="ctr"/>
-          <a:lstStyle/>
-          <a:p>
-            <a:pPr indent="0" marL="0">
-              <a:buNone/>
-            </a:pPr>
-            <a:r>
-              <a:rPr lang="en-US" sz="1200" dirty="0">
-                <a:solidFill>
-                  <a:srgbClr val="2A2A2A"/>
-                </a:solidFill>
-                <a:latin typeface="Calibri" pitchFamily="34" charset="0"/>
-                <a:ea typeface="Calibri" pitchFamily="34" charset="-122"/>
-                <a:cs typeface="Calibri" pitchFamily="34" charset="-120"/>
-              </a:rPr>
-              <a:t>Realistic, specific next steps</a:t>
-            </a:r>
-            <a:endParaRPr lang="en-US" sz="1200" dirty="0"/>
-          </a:p>
-        </p:txBody>
-      </p:sp>
-      <p:sp>
-        <p:nvSpPr>
-          <p:cNvPr id="21" name="Shape 18"/>
+          <p:cNvPr id="20" name="Shape 17"/>
           <p:cNvSpPr/>
           <p:nvPr/>
         </p:nvSpPr>
@@ -6253,7 +9472,7 @@
       </p:sp>
       <p:sp>
         <p:nvSpPr>
-          <p:cNvPr id="22" name="Text 19"/>
+          <p:cNvPr id="21" name="Text 18"/>
           <p:cNvSpPr/>
           <p:nvPr/>
         </p:nvSpPr>
@@ -6292,7 +9511,7 @@
       </p:sp>
       <p:sp>
         <p:nvSpPr>
-          <p:cNvPr id="23" name="Text 20"/>
+          <p:cNvPr id="22" name="Text 19"/>
           <p:cNvSpPr/>
           <p:nvPr/>
         </p:nvSpPr>
@@ -6323,7 +9542,7 @@
                 <a:ea typeface="Calibri" pitchFamily="34" charset="-122"/>
                 <a:cs typeface="Calibri" pitchFamily="34" charset="-120"/>
               </a:rPr>
-              <a:t>Knowledge Hub 5-6 — Recording and Reviewing</a:t>
+              <a:t>Knowledge Hub 3 — Types of Fitness and Health Monitoring Tests</a:t>
             </a:r>
             <a:endParaRPr lang="en-US" sz="1000" dirty="0"/>
           </a:p>
@@ -6354,1115 +9573,130 @@
           <a:chExt cx="0" cy="0"/>
         </a:xfrm>
       </p:grpSpPr>
-      <p:pic>
-        <p:nvPicPr>
-          <p:cNvPr id="2" name="Image 0" descr="preencoded.png">    </p:cNvPr>
-          <p:cNvPicPr>
-            <a:picLocks noChangeAspect="1"/>
-          </p:cNvPicPr>
-          <p:nvPr/>
-        </p:nvPicPr>
-        <p:blipFill>
-          <a:blip r:embed="rId1"/>
-          <a:stretch>
-            <a:fillRect/>
-          </a:stretch>
-        </p:blipFill>
-        <p:spPr>
-          <a:xfrm>
-            <a:off x="11109960" y="228600"/>
-            <a:ext cx="777240" cy="548640"/>
-          </a:xfrm>
-          <a:prstGeom prst="rect">
-            <a:avLst/>
-          </a:prstGeom>
-        </p:spPr>
-      </p:pic>
-      <p:sp>
-        <p:nvSpPr>
-          <p:cNvPr id="3" name="Text 0"/>
-          <p:cNvSpPr/>
-          <p:nvPr/>
-        </p:nvSpPr>
-        <p:spPr>
-          <a:xfrm>
-            <a:off x="548640" y="320040"/>
-            <a:ext cx="8869680" cy="548640"/>
-          </a:xfrm>
-          <a:prstGeom prst="rect">
-            <a:avLst/>
-          </a:prstGeom>
-          <a:noFill/>
-          <a:ln/>
-        </p:spPr>
-        <p:txBody>
-          <a:bodyPr wrap="square" rtlCol="0" anchor="ctr"/>
-          <a:lstStyle/>
-          <a:p>
-            <a:pPr indent="0" marL="0">
-              <a:buNone/>
-            </a:pPr>
-            <a:r>
-              <a:rPr lang="en-US" sz="2800" b="1" dirty="0">
-                <a:solidFill>
-                  <a:srgbClr val="122952"/>
-                </a:solidFill>
-                <a:latin typeface="Calibri" pitchFamily="34" charset="0"/>
-                <a:ea typeface="Calibri" pitchFamily="34" charset="-122"/>
-                <a:cs typeface="Calibri" pitchFamily="34" charset="-120"/>
-              </a:rPr>
-              <a:t>Revision — Key Terms</a:t>
-            </a:r>
-            <a:endParaRPr lang="en-US" sz="2800" dirty="0"/>
-          </a:p>
-        </p:txBody>
-      </p:sp>
-      <p:sp>
-        <p:nvSpPr>
-          <p:cNvPr id="4" name="Shape 1"/>
-          <p:cNvSpPr/>
-          <p:nvPr/>
-        </p:nvSpPr>
-        <p:spPr>
-          <a:xfrm>
-            <a:off x="548640" y="1161288"/>
-            <a:ext cx="5440680" cy="676656"/>
-          </a:xfrm>
-          <a:prstGeom prst="roundRect">
-            <a:avLst>
-              <a:gd name="adj" fmla="val 6757"/>
-            </a:avLst>
+      <p:sp>
+        <p:nvSpPr>
+          <p:cNvPr id="2" name="Shape 0"/>
+          <p:cNvSpPr/>
+          <p:nvPr/>
+        </p:nvSpPr>
+        <p:spPr>
+          <a:xfrm>
+            <a:off x="0" y="0"/>
+            <a:ext cx="12188952" cy="6858000"/>
+          </a:xfrm>
+          <a:prstGeom prst="rect">
+            <a:avLst/>
           </a:prstGeom>
           <a:solidFill>
-            <a:srgbClr val="E8EEF7"/>
+            <a:srgbClr val="122952"/>
           </a:solidFill>
           <a:ln/>
         </p:spPr>
       </p:sp>
       <p:sp>
         <p:nvSpPr>
-          <p:cNvPr id="5" name="Text 2"/>
-          <p:cNvSpPr/>
-          <p:nvPr/>
-        </p:nvSpPr>
-        <p:spPr>
-          <a:xfrm>
-            <a:off x="685800" y="1161288"/>
-            <a:ext cx="1828800" cy="676656"/>
-          </a:xfrm>
-          <a:prstGeom prst="rect">
-            <a:avLst/>
-          </a:prstGeom>
-          <a:noFill/>
-          <a:ln/>
-        </p:spPr>
-        <p:txBody>
-          <a:bodyPr wrap="square" rtlCol="0" anchor="ctr"/>
-          <a:lstStyle/>
-          <a:p>
-            <a:pPr indent="0" marL="0">
-              <a:buNone/>
-            </a:pPr>
-            <a:r>
-              <a:rPr lang="en-US" sz="1200" b="1" dirty="0">
-                <a:solidFill>
-                  <a:srgbClr val="122952"/>
-                </a:solidFill>
-                <a:latin typeface="Calibri" pitchFamily="34" charset="0"/>
-                <a:ea typeface="Calibri" pitchFamily="34" charset="-122"/>
-                <a:cs typeface="Calibri" pitchFamily="34" charset="-120"/>
-              </a:rPr>
-              <a:t>BMI</a:t>
-            </a:r>
-            <a:endParaRPr lang="en-US" sz="1200" dirty="0"/>
-          </a:p>
-        </p:txBody>
-      </p:sp>
-      <p:sp>
-        <p:nvSpPr>
-          <p:cNvPr id="6" name="Text 3"/>
-          <p:cNvSpPr/>
-          <p:nvPr/>
-        </p:nvSpPr>
-        <p:spPr>
-          <a:xfrm>
-            <a:off x="2560320" y="1161288"/>
-            <a:ext cx="3291840" cy="676656"/>
-          </a:xfrm>
-          <a:prstGeom prst="rect">
-            <a:avLst/>
-          </a:prstGeom>
-          <a:noFill/>
-          <a:ln/>
-        </p:spPr>
-        <p:txBody>
-          <a:bodyPr wrap="square" rtlCol="0" anchor="ctr"/>
-          <a:lstStyle/>
-          <a:p>
-            <a:pPr indent="0" marL="0">
-              <a:buNone/>
-            </a:pPr>
-            <a:r>
-              <a:rPr lang="en-US" sz="1100" dirty="0">
-                <a:solidFill>
-                  <a:srgbClr val="2A2A2A"/>
-                </a:solidFill>
-                <a:latin typeface="Calibri" pitchFamily="34" charset="0"/>
-                <a:ea typeface="Calibri" pitchFamily="34" charset="-122"/>
-                <a:cs typeface="Calibri" pitchFamily="34" charset="-120"/>
-              </a:rPr>
-              <a:t>Body Mass Index — a measure of body fat</a:t>
-            </a:r>
-            <a:endParaRPr lang="en-US" sz="1100" dirty="0"/>
-          </a:p>
-        </p:txBody>
-      </p:sp>
-      <p:sp>
-        <p:nvSpPr>
-          <p:cNvPr id="7" name="Shape 4"/>
-          <p:cNvSpPr/>
-          <p:nvPr/>
-        </p:nvSpPr>
-        <p:spPr>
-          <a:xfrm>
-            <a:off x="6263640" y="1161288"/>
-            <a:ext cx="5440680" cy="676656"/>
-          </a:xfrm>
-          <a:prstGeom prst="roundRect">
-            <a:avLst>
-              <a:gd name="adj" fmla="val 6757"/>
-            </a:avLst>
-          </a:prstGeom>
-          <a:solidFill>
-            <a:srgbClr val="E8EEF7"/>
-          </a:solidFill>
-          <a:ln/>
-        </p:spPr>
-      </p:sp>
-      <p:sp>
-        <p:nvSpPr>
-          <p:cNvPr id="8" name="Text 5"/>
-          <p:cNvSpPr/>
-          <p:nvPr/>
-        </p:nvSpPr>
-        <p:spPr>
-          <a:xfrm>
-            <a:off x="6400800" y="1161288"/>
-            <a:ext cx="1828800" cy="676656"/>
-          </a:xfrm>
-          <a:prstGeom prst="rect">
-            <a:avLst/>
-          </a:prstGeom>
-          <a:noFill/>
-          <a:ln/>
-        </p:spPr>
-        <p:txBody>
-          <a:bodyPr wrap="square" rtlCol="0" anchor="ctr"/>
-          <a:lstStyle/>
-          <a:p>
-            <a:pPr indent="0" marL="0">
-              <a:buNone/>
-            </a:pPr>
-            <a:r>
-              <a:rPr lang="en-US" sz="1200" b="1" dirty="0">
-                <a:solidFill>
-                  <a:srgbClr val="122952"/>
-                </a:solidFill>
-                <a:latin typeface="Calibri" pitchFamily="34" charset="0"/>
-                <a:ea typeface="Calibri" pitchFamily="34" charset="-122"/>
-                <a:cs typeface="Calibri" pitchFamily="34" charset="-120"/>
-              </a:rPr>
-              <a:t>Lung capacity</a:t>
-            </a:r>
-            <a:endParaRPr lang="en-US" sz="1200" dirty="0"/>
-          </a:p>
-        </p:txBody>
-      </p:sp>
-      <p:sp>
-        <p:nvSpPr>
-          <p:cNvPr id="9" name="Text 6"/>
-          <p:cNvSpPr/>
-          <p:nvPr/>
-        </p:nvSpPr>
-        <p:spPr>
-          <a:xfrm>
-            <a:off x="8275320" y="1161288"/>
-            <a:ext cx="3291840" cy="676656"/>
-          </a:xfrm>
-          <a:prstGeom prst="rect">
-            <a:avLst/>
-          </a:prstGeom>
-          <a:noFill/>
-          <a:ln/>
-        </p:spPr>
-        <p:txBody>
-          <a:bodyPr wrap="square" rtlCol="0" anchor="ctr"/>
-          <a:lstStyle/>
-          <a:p>
-            <a:pPr indent="0" marL="0">
-              <a:buNone/>
-            </a:pPr>
-            <a:r>
-              <a:rPr lang="en-US" sz="1100" dirty="0">
-                <a:solidFill>
-                  <a:srgbClr val="2A2A2A"/>
-                </a:solidFill>
-                <a:latin typeface="Calibri" pitchFamily="34" charset="0"/>
-                <a:ea typeface="Calibri" pitchFamily="34" charset="-122"/>
-                <a:cs typeface="Calibri" pitchFamily="34" charset="-120"/>
-              </a:rPr>
-              <a:t>Total amount of air the lungs can hold</a:t>
-            </a:r>
-            <a:endParaRPr lang="en-US" sz="1100" dirty="0"/>
-          </a:p>
-        </p:txBody>
-      </p:sp>
-      <p:sp>
-        <p:nvSpPr>
-          <p:cNvPr id="10" name="Shape 7"/>
-          <p:cNvSpPr/>
-          <p:nvPr/>
-        </p:nvSpPr>
-        <p:spPr>
-          <a:xfrm>
-            <a:off x="548640" y="1947672"/>
-            <a:ext cx="5440680" cy="676656"/>
-          </a:xfrm>
-          <a:prstGeom prst="roundRect">
-            <a:avLst>
-              <a:gd name="adj" fmla="val 6757"/>
-            </a:avLst>
-          </a:prstGeom>
-          <a:solidFill>
-            <a:srgbClr val="F7F9FC"/>
-          </a:solidFill>
-          <a:ln/>
-        </p:spPr>
-      </p:sp>
-      <p:sp>
-        <p:nvSpPr>
-          <p:cNvPr id="11" name="Text 8"/>
-          <p:cNvSpPr/>
-          <p:nvPr/>
-        </p:nvSpPr>
-        <p:spPr>
-          <a:xfrm>
-            <a:off x="685800" y="1947672"/>
-            <a:ext cx="1828800" cy="676656"/>
-          </a:xfrm>
-          <a:prstGeom prst="rect">
-            <a:avLst/>
-          </a:prstGeom>
-          <a:noFill/>
-          <a:ln/>
-        </p:spPr>
-        <p:txBody>
-          <a:bodyPr wrap="square" rtlCol="0" anchor="ctr"/>
-          <a:lstStyle/>
-          <a:p>
-            <a:pPr indent="0" marL="0">
-              <a:buNone/>
-            </a:pPr>
-            <a:r>
-              <a:rPr lang="en-US" sz="1200" b="1" dirty="0">
-                <a:solidFill>
-                  <a:srgbClr val="122952"/>
-                </a:solidFill>
-                <a:latin typeface="Calibri" pitchFamily="34" charset="0"/>
-                <a:ea typeface="Calibri" pitchFamily="34" charset="-122"/>
-                <a:cs typeface="Calibri" pitchFamily="34" charset="-120"/>
-              </a:rPr>
-              <a:t>Aerobic exercise</a:t>
-            </a:r>
-            <a:endParaRPr lang="en-US" sz="1200" dirty="0"/>
-          </a:p>
-        </p:txBody>
-      </p:sp>
-      <p:sp>
-        <p:nvSpPr>
-          <p:cNvPr id="12" name="Text 9"/>
-          <p:cNvSpPr/>
-          <p:nvPr/>
-        </p:nvSpPr>
-        <p:spPr>
-          <a:xfrm>
-            <a:off x="2560320" y="1947672"/>
-            <a:ext cx="3291840" cy="676656"/>
-          </a:xfrm>
-          <a:prstGeom prst="rect">
-            <a:avLst/>
-          </a:prstGeom>
-          <a:noFill/>
-          <a:ln/>
-        </p:spPr>
-        <p:txBody>
-          <a:bodyPr wrap="square" rtlCol="0" anchor="ctr"/>
-          <a:lstStyle/>
-          <a:p>
-            <a:pPr indent="0" marL="0">
-              <a:buNone/>
-            </a:pPr>
-            <a:r>
-              <a:rPr lang="en-US" sz="1100" dirty="0">
-                <a:solidFill>
-                  <a:srgbClr val="2A2A2A"/>
-                </a:solidFill>
-                <a:latin typeface="Calibri" pitchFamily="34" charset="0"/>
-                <a:ea typeface="Calibri" pitchFamily="34" charset="-122"/>
-                <a:cs typeface="Calibri" pitchFamily="34" charset="-120"/>
-              </a:rPr>
-              <a:t>Sustained exercise using oxygen for energy</a:t>
-            </a:r>
-            <a:endParaRPr lang="en-US" sz="1100" dirty="0"/>
-          </a:p>
-        </p:txBody>
-      </p:sp>
-      <p:sp>
-        <p:nvSpPr>
-          <p:cNvPr id="13" name="Shape 10"/>
-          <p:cNvSpPr/>
-          <p:nvPr/>
-        </p:nvSpPr>
-        <p:spPr>
-          <a:xfrm>
-            <a:off x="6263640" y="1947672"/>
-            <a:ext cx="5440680" cy="676656"/>
-          </a:xfrm>
-          <a:prstGeom prst="roundRect">
-            <a:avLst>
-              <a:gd name="adj" fmla="val 6757"/>
-            </a:avLst>
-          </a:prstGeom>
-          <a:solidFill>
-            <a:srgbClr val="F7F9FC"/>
-          </a:solidFill>
-          <a:ln/>
-        </p:spPr>
-      </p:sp>
-      <p:sp>
-        <p:nvSpPr>
-          <p:cNvPr id="14" name="Text 11"/>
-          <p:cNvSpPr/>
-          <p:nvPr/>
-        </p:nvSpPr>
-        <p:spPr>
-          <a:xfrm>
-            <a:off x="6400800" y="1947672"/>
-            <a:ext cx="1828800" cy="676656"/>
-          </a:xfrm>
-          <a:prstGeom prst="rect">
-            <a:avLst/>
-          </a:prstGeom>
-          <a:noFill/>
-          <a:ln/>
-        </p:spPr>
-        <p:txBody>
-          <a:bodyPr wrap="square" rtlCol="0" anchor="ctr"/>
-          <a:lstStyle/>
-          <a:p>
-            <a:pPr indent="0" marL="0">
-              <a:buNone/>
-            </a:pPr>
-            <a:r>
-              <a:rPr lang="en-US" sz="1200" b="1" dirty="0">
-                <a:solidFill>
-                  <a:srgbClr val="122952"/>
-                </a:solidFill>
-                <a:latin typeface="Calibri" pitchFamily="34" charset="0"/>
-                <a:ea typeface="Calibri" pitchFamily="34" charset="-122"/>
-                <a:cs typeface="Calibri" pitchFamily="34" charset="-120"/>
-              </a:rPr>
-              <a:t>Bleep test</a:t>
-            </a:r>
-            <a:endParaRPr lang="en-US" sz="1200" dirty="0"/>
-          </a:p>
-        </p:txBody>
-      </p:sp>
-      <p:sp>
-        <p:nvSpPr>
-          <p:cNvPr id="15" name="Text 12"/>
-          <p:cNvSpPr/>
-          <p:nvPr/>
-        </p:nvSpPr>
-        <p:spPr>
-          <a:xfrm>
-            <a:off x="8275320" y="1947672"/>
-            <a:ext cx="3291840" cy="676656"/>
-          </a:xfrm>
-          <a:prstGeom prst="rect">
-            <a:avLst/>
-          </a:prstGeom>
-          <a:noFill/>
-          <a:ln/>
-        </p:spPr>
-        <p:txBody>
-          <a:bodyPr wrap="square" rtlCol="0" anchor="ctr"/>
-          <a:lstStyle/>
-          <a:p>
-            <a:pPr indent="0" marL="0">
-              <a:buNone/>
-            </a:pPr>
-            <a:r>
-              <a:rPr lang="en-US" sz="1100" dirty="0">
-                <a:solidFill>
-                  <a:srgbClr val="2A2A2A"/>
-                </a:solidFill>
-                <a:latin typeface="Calibri" pitchFamily="34" charset="0"/>
-                <a:ea typeface="Calibri" pitchFamily="34" charset="-122"/>
-                <a:cs typeface="Calibri" pitchFamily="34" charset="-120"/>
-              </a:rPr>
-              <a:t>Multi-stage fitness test for aerobic capacity</a:t>
-            </a:r>
-            <a:endParaRPr lang="en-US" sz="1100" dirty="0"/>
-          </a:p>
-        </p:txBody>
-      </p:sp>
-      <p:sp>
-        <p:nvSpPr>
-          <p:cNvPr id="16" name="Shape 13"/>
-          <p:cNvSpPr/>
-          <p:nvPr/>
-        </p:nvSpPr>
-        <p:spPr>
-          <a:xfrm>
-            <a:off x="548640" y="2734056"/>
-            <a:ext cx="5440680" cy="676656"/>
-          </a:xfrm>
-          <a:prstGeom prst="roundRect">
-            <a:avLst>
-              <a:gd name="adj" fmla="val 6757"/>
-            </a:avLst>
-          </a:prstGeom>
-          <a:solidFill>
-            <a:srgbClr val="E8EEF7"/>
-          </a:solidFill>
-          <a:ln/>
-        </p:spPr>
-      </p:sp>
-      <p:sp>
-        <p:nvSpPr>
-          <p:cNvPr id="17" name="Text 14"/>
-          <p:cNvSpPr/>
-          <p:nvPr/>
-        </p:nvSpPr>
-        <p:spPr>
-          <a:xfrm>
-            <a:off x="685800" y="2734056"/>
-            <a:ext cx="1828800" cy="676656"/>
-          </a:xfrm>
-          <a:prstGeom prst="rect">
-            <a:avLst/>
-          </a:prstGeom>
-          <a:noFill/>
-          <a:ln/>
-        </p:spPr>
-        <p:txBody>
-          <a:bodyPr wrap="square" rtlCol="0" anchor="ctr"/>
-          <a:lstStyle/>
-          <a:p>
-            <a:pPr indent="0" marL="0">
-              <a:buNone/>
-            </a:pPr>
-            <a:r>
-              <a:rPr lang="en-US" sz="1200" b="1" dirty="0">
-                <a:solidFill>
-                  <a:srgbClr val="122952"/>
-                </a:solidFill>
-                <a:latin typeface="Calibri" pitchFamily="34" charset="0"/>
-                <a:ea typeface="Calibri" pitchFamily="34" charset="-122"/>
-                <a:cs typeface="Calibri" pitchFamily="34" charset="-120"/>
-              </a:rPr>
-              <a:t>Warm-up</a:t>
-            </a:r>
-            <a:endParaRPr lang="en-US" sz="1200" dirty="0"/>
-          </a:p>
-        </p:txBody>
-      </p:sp>
-      <p:sp>
-        <p:nvSpPr>
-          <p:cNvPr id="18" name="Text 15"/>
-          <p:cNvSpPr/>
-          <p:nvPr/>
-        </p:nvSpPr>
-        <p:spPr>
-          <a:xfrm>
-            <a:off x="2560320" y="2734056"/>
-            <a:ext cx="3291840" cy="676656"/>
-          </a:xfrm>
-          <a:prstGeom prst="rect">
-            <a:avLst/>
-          </a:prstGeom>
-          <a:noFill/>
-          <a:ln/>
-        </p:spPr>
-        <p:txBody>
-          <a:bodyPr wrap="square" rtlCol="0" anchor="ctr"/>
-          <a:lstStyle/>
-          <a:p>
-            <a:pPr indent="0" marL="0">
-              <a:buNone/>
-            </a:pPr>
-            <a:r>
-              <a:rPr lang="en-US" sz="1100" dirty="0">
-                <a:solidFill>
-                  <a:srgbClr val="2A2A2A"/>
-                </a:solidFill>
-                <a:latin typeface="Calibri" pitchFamily="34" charset="0"/>
-                <a:ea typeface="Calibri" pitchFamily="34" charset="-122"/>
-                <a:cs typeface="Calibri" pitchFamily="34" charset="-120"/>
-              </a:rPr>
-              <a:t>Stretching and pulse-raising before exercise</a:t>
-            </a:r>
-            <a:endParaRPr lang="en-US" sz="1100" dirty="0"/>
-          </a:p>
-        </p:txBody>
-      </p:sp>
-      <p:sp>
-        <p:nvSpPr>
-          <p:cNvPr id="19" name="Shape 16"/>
-          <p:cNvSpPr/>
-          <p:nvPr/>
-        </p:nvSpPr>
-        <p:spPr>
-          <a:xfrm>
-            <a:off x="6263640" y="2734056"/>
-            <a:ext cx="5440680" cy="676656"/>
-          </a:xfrm>
-          <a:prstGeom prst="roundRect">
-            <a:avLst>
-              <a:gd name="adj" fmla="val 6757"/>
-            </a:avLst>
-          </a:prstGeom>
-          <a:solidFill>
-            <a:srgbClr val="E8EEF7"/>
-          </a:solidFill>
-          <a:ln/>
-        </p:spPr>
-      </p:sp>
-      <p:sp>
-        <p:nvSpPr>
-          <p:cNvPr id="20" name="Text 17"/>
-          <p:cNvSpPr/>
-          <p:nvPr/>
-        </p:nvSpPr>
-        <p:spPr>
-          <a:xfrm>
-            <a:off x="6400800" y="2734056"/>
-            <a:ext cx="1828800" cy="676656"/>
-          </a:xfrm>
-          <a:prstGeom prst="rect">
-            <a:avLst/>
-          </a:prstGeom>
-          <a:noFill/>
-          <a:ln/>
-        </p:spPr>
-        <p:txBody>
-          <a:bodyPr wrap="square" rtlCol="0" anchor="ctr"/>
-          <a:lstStyle/>
-          <a:p>
-            <a:pPr indent="0" marL="0">
-              <a:buNone/>
-            </a:pPr>
-            <a:r>
-              <a:rPr lang="en-US" sz="1200" b="1" dirty="0">
-                <a:solidFill>
-                  <a:srgbClr val="122952"/>
-                </a:solidFill>
-                <a:latin typeface="Calibri" pitchFamily="34" charset="0"/>
-                <a:ea typeface="Calibri" pitchFamily="34" charset="-122"/>
-                <a:cs typeface="Calibri" pitchFamily="34" charset="-120"/>
-              </a:rPr>
-              <a:t>Cool-down</a:t>
-            </a:r>
-            <a:endParaRPr lang="en-US" sz="1200" dirty="0"/>
-          </a:p>
-        </p:txBody>
-      </p:sp>
-      <p:sp>
-        <p:nvSpPr>
-          <p:cNvPr id="21" name="Text 18"/>
-          <p:cNvSpPr/>
-          <p:nvPr/>
-        </p:nvSpPr>
-        <p:spPr>
-          <a:xfrm>
-            <a:off x="8275320" y="2734056"/>
-            <a:ext cx="3291840" cy="676656"/>
-          </a:xfrm>
-          <a:prstGeom prst="rect">
-            <a:avLst/>
-          </a:prstGeom>
-          <a:noFill/>
-          <a:ln/>
-        </p:spPr>
-        <p:txBody>
-          <a:bodyPr wrap="square" rtlCol="0" anchor="ctr"/>
-          <a:lstStyle/>
-          <a:p>
-            <a:pPr indent="0" marL="0">
-              <a:buNone/>
-            </a:pPr>
-            <a:r>
-              <a:rPr lang="en-US" sz="1100" dirty="0">
-                <a:solidFill>
-                  <a:srgbClr val="2A2A2A"/>
-                </a:solidFill>
-                <a:latin typeface="Calibri" pitchFamily="34" charset="0"/>
-                <a:ea typeface="Calibri" pitchFamily="34" charset="-122"/>
-                <a:cs typeface="Calibri" pitchFamily="34" charset="-120"/>
-              </a:rPr>
-              <a:t>Stretching and recovery after exercise</a:t>
-            </a:r>
-            <a:endParaRPr lang="en-US" sz="1100" dirty="0"/>
-          </a:p>
-        </p:txBody>
-      </p:sp>
-      <p:sp>
-        <p:nvSpPr>
-          <p:cNvPr id="22" name="Shape 19"/>
-          <p:cNvSpPr/>
-          <p:nvPr/>
-        </p:nvSpPr>
-        <p:spPr>
-          <a:xfrm>
-            <a:off x="548640" y="3520440"/>
-            <a:ext cx="5440680" cy="676656"/>
-          </a:xfrm>
-          <a:prstGeom prst="roundRect">
-            <a:avLst>
-              <a:gd name="adj" fmla="val 6757"/>
-            </a:avLst>
-          </a:prstGeom>
-          <a:solidFill>
-            <a:srgbClr val="F7F9FC"/>
-          </a:solidFill>
-          <a:ln/>
-        </p:spPr>
-      </p:sp>
-      <p:sp>
-        <p:nvSpPr>
-          <p:cNvPr id="23" name="Text 20"/>
-          <p:cNvSpPr/>
-          <p:nvPr/>
-        </p:nvSpPr>
-        <p:spPr>
-          <a:xfrm>
-            <a:off x="685800" y="3520440"/>
-            <a:ext cx="1828800" cy="676656"/>
-          </a:xfrm>
-          <a:prstGeom prst="rect">
-            <a:avLst/>
-          </a:prstGeom>
-          <a:noFill/>
-          <a:ln/>
-        </p:spPr>
-        <p:txBody>
-          <a:bodyPr wrap="square" rtlCol="0" anchor="ctr"/>
-          <a:lstStyle/>
-          <a:p>
-            <a:pPr indent="0" marL="0">
-              <a:buNone/>
-            </a:pPr>
-            <a:r>
-              <a:rPr lang="en-US" sz="1200" b="1" dirty="0">
-                <a:solidFill>
-                  <a:srgbClr val="122952"/>
-                </a:solidFill>
-                <a:latin typeface="Calibri" pitchFamily="34" charset="0"/>
-                <a:ea typeface="Calibri" pitchFamily="34" charset="-122"/>
-                <a:cs typeface="Calibri" pitchFamily="34" charset="-120"/>
-              </a:rPr>
-              <a:t>Frequency</a:t>
-            </a:r>
-            <a:endParaRPr lang="en-US" sz="1200" dirty="0"/>
-          </a:p>
-        </p:txBody>
-      </p:sp>
-      <p:sp>
-        <p:nvSpPr>
-          <p:cNvPr id="24" name="Text 21"/>
-          <p:cNvSpPr/>
-          <p:nvPr/>
-        </p:nvSpPr>
-        <p:spPr>
-          <a:xfrm>
-            <a:off x="2560320" y="3520440"/>
-            <a:ext cx="3291840" cy="676656"/>
-          </a:xfrm>
-          <a:prstGeom prst="rect">
-            <a:avLst/>
-          </a:prstGeom>
-          <a:noFill/>
-          <a:ln/>
-        </p:spPr>
-        <p:txBody>
-          <a:bodyPr wrap="square" rtlCol="0" anchor="ctr"/>
-          <a:lstStyle/>
-          <a:p>
-            <a:pPr indent="0" marL="0">
-              <a:buNone/>
-            </a:pPr>
-            <a:r>
-              <a:rPr lang="en-US" sz="1100" dirty="0">
-                <a:solidFill>
-                  <a:srgbClr val="2A2A2A"/>
-                </a:solidFill>
-                <a:latin typeface="Calibri" pitchFamily="34" charset="0"/>
-                <a:ea typeface="Calibri" pitchFamily="34" charset="-122"/>
-                <a:cs typeface="Calibri" pitchFamily="34" charset="-120"/>
-              </a:rPr>
-              <a:t>How often a session is carried out</a:t>
-            </a:r>
-            <a:endParaRPr lang="en-US" sz="1100" dirty="0"/>
-          </a:p>
-        </p:txBody>
-      </p:sp>
-      <p:sp>
-        <p:nvSpPr>
-          <p:cNvPr id="25" name="Shape 22"/>
-          <p:cNvSpPr/>
-          <p:nvPr/>
-        </p:nvSpPr>
-        <p:spPr>
-          <a:xfrm>
-            <a:off x="6263640" y="3520440"/>
-            <a:ext cx="5440680" cy="676656"/>
-          </a:xfrm>
-          <a:prstGeom prst="roundRect">
-            <a:avLst>
-              <a:gd name="adj" fmla="val 6757"/>
-            </a:avLst>
-          </a:prstGeom>
-          <a:solidFill>
-            <a:srgbClr val="F7F9FC"/>
-          </a:solidFill>
-          <a:ln/>
-        </p:spPr>
-      </p:sp>
-      <p:sp>
-        <p:nvSpPr>
-          <p:cNvPr id="26" name="Text 23"/>
-          <p:cNvSpPr/>
-          <p:nvPr/>
-        </p:nvSpPr>
-        <p:spPr>
-          <a:xfrm>
-            <a:off x="6400800" y="3520440"/>
-            <a:ext cx="1828800" cy="676656"/>
-          </a:xfrm>
-          <a:prstGeom prst="rect">
-            <a:avLst/>
-          </a:prstGeom>
-          <a:noFill/>
-          <a:ln/>
-        </p:spPr>
-        <p:txBody>
-          <a:bodyPr wrap="square" rtlCol="0" anchor="ctr"/>
-          <a:lstStyle/>
-          <a:p>
-            <a:pPr indent="0" marL="0">
-              <a:buNone/>
-            </a:pPr>
-            <a:r>
-              <a:rPr lang="en-US" sz="1200" b="1" dirty="0">
-                <a:solidFill>
-                  <a:srgbClr val="122952"/>
-                </a:solidFill>
-                <a:latin typeface="Calibri" pitchFamily="34" charset="0"/>
-                <a:ea typeface="Calibri" pitchFamily="34" charset="-122"/>
-                <a:cs typeface="Calibri" pitchFamily="34" charset="-120"/>
-              </a:rPr>
-              <a:t>Intensity</a:t>
-            </a:r>
-            <a:endParaRPr lang="en-US" sz="1200" dirty="0"/>
-          </a:p>
-        </p:txBody>
-      </p:sp>
-      <p:sp>
-        <p:nvSpPr>
-          <p:cNvPr id="27" name="Text 24"/>
-          <p:cNvSpPr/>
-          <p:nvPr/>
-        </p:nvSpPr>
-        <p:spPr>
-          <a:xfrm>
-            <a:off x="8275320" y="3520440"/>
-            <a:ext cx="3291840" cy="676656"/>
-          </a:xfrm>
-          <a:prstGeom prst="rect">
-            <a:avLst/>
-          </a:prstGeom>
-          <a:noFill/>
-          <a:ln/>
-        </p:spPr>
-        <p:txBody>
-          <a:bodyPr wrap="square" rtlCol="0" anchor="ctr"/>
-          <a:lstStyle/>
-          <a:p>
-            <a:pPr indent="0" marL="0">
-              <a:buNone/>
-            </a:pPr>
-            <a:r>
-              <a:rPr lang="en-US" sz="1100" dirty="0">
-                <a:solidFill>
-                  <a:srgbClr val="2A2A2A"/>
-                </a:solidFill>
-                <a:latin typeface="Calibri" pitchFamily="34" charset="0"/>
-                <a:ea typeface="Calibri" pitchFamily="34" charset="-122"/>
-                <a:cs typeface="Calibri" pitchFamily="34" charset="-120"/>
-              </a:rPr>
-              <a:t>How hard a session is</a:t>
-            </a:r>
-            <a:endParaRPr lang="en-US" sz="1100" dirty="0"/>
-          </a:p>
-        </p:txBody>
-      </p:sp>
-      <p:sp>
-        <p:nvSpPr>
-          <p:cNvPr id="28" name="Shape 25"/>
-          <p:cNvSpPr/>
-          <p:nvPr/>
-        </p:nvSpPr>
-        <p:spPr>
-          <a:xfrm>
-            <a:off x="548640" y="4306824"/>
-            <a:ext cx="5440680" cy="676656"/>
-          </a:xfrm>
-          <a:prstGeom prst="roundRect">
-            <a:avLst>
-              <a:gd name="adj" fmla="val 6757"/>
-            </a:avLst>
-          </a:prstGeom>
-          <a:solidFill>
-            <a:srgbClr val="E8EEF7"/>
-          </a:solidFill>
-          <a:ln/>
-        </p:spPr>
-      </p:sp>
-      <p:sp>
-        <p:nvSpPr>
-          <p:cNvPr id="29" name="Text 26"/>
-          <p:cNvSpPr/>
-          <p:nvPr/>
-        </p:nvSpPr>
-        <p:spPr>
-          <a:xfrm>
-            <a:off x="685800" y="4306824"/>
-            <a:ext cx="1828800" cy="676656"/>
-          </a:xfrm>
-          <a:prstGeom prst="rect">
-            <a:avLst/>
-          </a:prstGeom>
-          <a:noFill/>
-          <a:ln/>
-        </p:spPr>
-        <p:txBody>
-          <a:bodyPr wrap="square" rtlCol="0" anchor="ctr"/>
-          <a:lstStyle/>
-          <a:p>
-            <a:pPr indent="0" marL="0">
-              <a:buNone/>
-            </a:pPr>
-            <a:r>
-              <a:rPr lang="en-US" sz="1200" b="1" dirty="0">
-                <a:solidFill>
-                  <a:srgbClr val="122952"/>
-                </a:solidFill>
-                <a:latin typeface="Calibri" pitchFamily="34" charset="0"/>
-                <a:ea typeface="Calibri" pitchFamily="34" charset="-122"/>
-                <a:cs typeface="Calibri" pitchFamily="34" charset="-120"/>
-              </a:rPr>
-              <a:t>Duration</a:t>
-            </a:r>
-            <a:endParaRPr lang="en-US" sz="1200" dirty="0"/>
-          </a:p>
-        </p:txBody>
-      </p:sp>
-      <p:sp>
-        <p:nvSpPr>
-          <p:cNvPr id="30" name="Text 27"/>
-          <p:cNvSpPr/>
-          <p:nvPr/>
-        </p:nvSpPr>
-        <p:spPr>
-          <a:xfrm>
-            <a:off x="2560320" y="4306824"/>
-            <a:ext cx="3291840" cy="676656"/>
-          </a:xfrm>
-          <a:prstGeom prst="rect">
-            <a:avLst/>
-          </a:prstGeom>
-          <a:noFill/>
-          <a:ln/>
-        </p:spPr>
-        <p:txBody>
-          <a:bodyPr wrap="square" rtlCol="0" anchor="ctr"/>
-          <a:lstStyle/>
-          <a:p>
-            <a:pPr indent="0" marL="0">
-              <a:buNone/>
-            </a:pPr>
-            <a:r>
-              <a:rPr lang="en-US" sz="1100" dirty="0">
-                <a:solidFill>
-                  <a:srgbClr val="2A2A2A"/>
-                </a:solidFill>
-                <a:latin typeface="Calibri" pitchFamily="34" charset="0"/>
-                <a:ea typeface="Calibri" pitchFamily="34" charset="-122"/>
-                <a:cs typeface="Calibri" pitchFamily="34" charset="-120"/>
-              </a:rPr>
-              <a:t>How long a session lasts</a:t>
-            </a:r>
-            <a:endParaRPr lang="en-US" sz="1100" dirty="0"/>
-          </a:p>
-        </p:txBody>
-      </p:sp>
-      <p:sp>
-        <p:nvSpPr>
-          <p:cNvPr id="31" name="Shape 28"/>
-          <p:cNvSpPr/>
-          <p:nvPr/>
-        </p:nvSpPr>
-        <p:spPr>
-          <a:xfrm>
-            <a:off x="6263640" y="4306824"/>
-            <a:ext cx="5440680" cy="676656"/>
-          </a:xfrm>
-          <a:prstGeom prst="roundRect">
-            <a:avLst>
-              <a:gd name="adj" fmla="val 6757"/>
-            </a:avLst>
-          </a:prstGeom>
-          <a:solidFill>
-            <a:srgbClr val="E8EEF7"/>
-          </a:solidFill>
-          <a:ln/>
-        </p:spPr>
-      </p:sp>
-      <p:sp>
-        <p:nvSpPr>
-          <p:cNvPr id="32" name="Text 29"/>
-          <p:cNvSpPr/>
-          <p:nvPr/>
-        </p:nvSpPr>
-        <p:spPr>
-          <a:xfrm>
-            <a:off x="6400800" y="4306824"/>
-            <a:ext cx="1828800" cy="676656"/>
-          </a:xfrm>
-          <a:prstGeom prst="rect">
-            <a:avLst/>
-          </a:prstGeom>
-          <a:noFill/>
-          <a:ln/>
-        </p:spPr>
-        <p:txBody>
-          <a:bodyPr wrap="square" rtlCol="0" anchor="ctr"/>
-          <a:lstStyle/>
-          <a:p>
-            <a:pPr indent="0" marL="0">
-              <a:buNone/>
-            </a:pPr>
-            <a:r>
-              <a:rPr lang="en-US" sz="1200" b="1" dirty="0">
-                <a:solidFill>
-                  <a:srgbClr val="122952"/>
-                </a:solidFill>
-                <a:latin typeface="Calibri" pitchFamily="34" charset="0"/>
-                <a:ea typeface="Calibri" pitchFamily="34" charset="-122"/>
-                <a:cs typeface="Calibri" pitchFamily="34" charset="-120"/>
-              </a:rPr>
-              <a:t>Self-evaluation</a:t>
-            </a:r>
-            <a:endParaRPr lang="en-US" sz="1200" dirty="0"/>
-          </a:p>
-        </p:txBody>
-      </p:sp>
-      <p:sp>
-        <p:nvSpPr>
-          <p:cNvPr id="33" name="Text 30"/>
-          <p:cNvSpPr/>
-          <p:nvPr/>
-        </p:nvSpPr>
-        <p:spPr>
-          <a:xfrm>
-            <a:off x="8275320" y="4306824"/>
-            <a:ext cx="3291840" cy="676656"/>
-          </a:xfrm>
-          <a:prstGeom prst="rect">
-            <a:avLst/>
-          </a:prstGeom>
-          <a:noFill/>
-          <a:ln/>
-        </p:spPr>
-        <p:txBody>
-          <a:bodyPr wrap="square" rtlCol="0" anchor="ctr"/>
-          <a:lstStyle/>
-          <a:p>
-            <a:pPr indent="0" marL="0">
-              <a:buNone/>
-            </a:pPr>
-            <a:r>
-              <a:rPr lang="en-US" sz="1100" dirty="0">
-                <a:solidFill>
-                  <a:srgbClr val="2A2A2A"/>
-                </a:solidFill>
-                <a:latin typeface="Calibri" pitchFamily="34" charset="0"/>
-                <a:ea typeface="Calibri" pitchFamily="34" charset="-122"/>
-                <a:cs typeface="Calibri" pitchFamily="34" charset="-120"/>
-              </a:rPr>
-              <a:t>Judging your own performance</a:t>
-            </a:r>
-            <a:endParaRPr lang="en-US" sz="1100" dirty="0"/>
-          </a:p>
-        </p:txBody>
-      </p:sp>
-      <p:sp>
-        <p:nvSpPr>
-          <p:cNvPr id="34" name="Shape 31"/>
-          <p:cNvSpPr/>
-          <p:nvPr/>
-        </p:nvSpPr>
-        <p:spPr>
-          <a:xfrm>
-            <a:off x="0" y="6537960"/>
-            <a:ext cx="12188952" cy="320040"/>
-          </a:xfrm>
-          <a:prstGeom prst="rect">
-            <a:avLst/>
-          </a:prstGeom>
-          <a:solidFill>
-            <a:srgbClr val="1B3A6B"/>
-          </a:solidFill>
-          <a:ln/>
-        </p:spPr>
-      </p:sp>
-      <p:sp>
-        <p:nvSpPr>
-          <p:cNvPr id="35" name="Text 32"/>
-          <p:cNvSpPr/>
-          <p:nvPr/>
-        </p:nvSpPr>
-        <p:spPr>
-          <a:xfrm>
-            <a:off x="274320" y="6537960"/>
-            <a:ext cx="3657600" cy="320040"/>
-          </a:xfrm>
-          <a:prstGeom prst="rect">
-            <a:avLst/>
-          </a:prstGeom>
-          <a:noFill/>
-          <a:ln/>
-        </p:spPr>
-        <p:txBody>
-          <a:bodyPr wrap="square" rtlCol="0" anchor="ctr"/>
-          <a:lstStyle/>
-          <a:p>
-            <a:pPr indent="0" marL="0">
-              <a:buNone/>
-            </a:pPr>
-            <a:r>
-              <a:rPr lang="en-US" sz="1000" dirty="0">
+          <p:cNvPr id="3" name="Text 1"/>
+          <p:cNvSpPr/>
+          <p:nvPr/>
+        </p:nvSpPr>
+        <p:spPr>
+          <a:xfrm>
+            <a:off x="731520" y="1828800"/>
+            <a:ext cx="2743200" cy="2286000"/>
+          </a:xfrm>
+          <a:prstGeom prst="rect">
+            <a:avLst/>
+          </a:prstGeom>
+          <a:noFill/>
+          <a:ln/>
+        </p:spPr>
+        <p:txBody>
+          <a:bodyPr wrap="square" rtlCol="0" anchor="ctr"/>
+          <a:lstStyle/>
+          <a:p>
+            <a:pPr indent="0" marL="0">
+              <a:buNone/>
+            </a:pPr>
+            <a:r>
+              <a:rPr lang="en-US" sz="14000" b="1" dirty="0">
+                <a:solidFill>
+                  <a:srgbClr val="26538A"/>
+                </a:solidFill>
+                <a:latin typeface="Calibri" pitchFamily="34" charset="0"/>
+                <a:ea typeface="Calibri" pitchFamily="34" charset="-122"/>
+                <a:cs typeface="Calibri" pitchFamily="34" charset="-120"/>
+              </a:rPr>
+              <a:t>B</a:t>
+            </a:r>
+            <a:endParaRPr lang="en-US" sz="14000" dirty="0"/>
+          </a:p>
+        </p:txBody>
+      </p:sp>
+      <p:sp>
+        <p:nvSpPr>
+          <p:cNvPr id="4" name="Text 2"/>
+          <p:cNvSpPr/>
+          <p:nvPr/>
+        </p:nvSpPr>
+        <p:spPr>
+          <a:xfrm>
+            <a:off x="3840480" y="2377440"/>
+            <a:ext cx="7589520" cy="548640"/>
+          </a:xfrm>
+          <a:prstGeom prst="rect">
+            <a:avLst/>
+          </a:prstGeom>
+          <a:noFill/>
+          <a:ln/>
+        </p:spPr>
+        <p:txBody>
+          <a:bodyPr wrap="square" rtlCol="0" anchor="ctr"/>
+          <a:lstStyle/>
+          <a:p>
+            <a:pPr indent="0" marL="0">
+              <a:buNone/>
+            </a:pPr>
+            <a:r>
+              <a:rPr lang="en-US" sz="2000" b="1" dirty="0">
+                <a:solidFill>
+                  <a:srgbClr val="C8A951"/>
+                </a:solidFill>
+                <a:latin typeface="Calibri" pitchFamily="34" charset="0"/>
+                <a:ea typeface="Calibri" pitchFamily="34" charset="-122"/>
+                <a:cs typeface="Calibri" pitchFamily="34" charset="-120"/>
+              </a:rPr>
+              <a:t>Learning Aim B</a:t>
+            </a:r>
+            <a:endParaRPr lang="en-US" sz="2000" dirty="0"/>
+          </a:p>
+        </p:txBody>
+      </p:sp>
+      <p:sp>
+        <p:nvSpPr>
+          <p:cNvPr id="5" name="Text 3"/>
+          <p:cNvSpPr/>
+          <p:nvPr/>
+        </p:nvSpPr>
+        <p:spPr>
+          <a:xfrm>
+            <a:off x="3840480" y="2926080"/>
+            <a:ext cx="7589520" cy="1005840"/>
+          </a:xfrm>
+          <a:prstGeom prst="rect">
+            <a:avLst/>
+          </a:prstGeom>
+          <a:noFill/>
+          <a:ln/>
+        </p:spPr>
+        <p:txBody>
+          <a:bodyPr wrap="square" rtlCol="0" anchor="ctr"/>
+          <a:lstStyle/>
+          <a:p>
+            <a:pPr indent="0" marL="0">
+              <a:buNone/>
+            </a:pPr>
+            <a:r>
+              <a:rPr lang="en-US" sz="3200" b="1" dirty="0">
                 <a:solidFill>
                   <a:srgbClr val="FFFFFF"/>
                 </a:solidFill>
@@ -7470,48 +9704,48 @@
                 <a:ea typeface="Calibri" pitchFamily="34" charset="-122"/>
                 <a:cs typeface="Calibri" pitchFamily="34" charset="-120"/>
               </a:rPr>
-              <a:t>PS6</a:t>
-            </a:r>
-            <a:endParaRPr lang="en-US" sz="1000" dirty="0"/>
-          </a:p>
-        </p:txBody>
-      </p:sp>
-      <p:sp>
-        <p:nvSpPr>
-          <p:cNvPr id="36" name="Text 33"/>
-          <p:cNvSpPr/>
-          <p:nvPr/>
-        </p:nvSpPr>
-        <p:spPr>
-          <a:xfrm>
-            <a:off x="7772400" y="6537960"/>
-            <a:ext cx="4114800" cy="320040"/>
-          </a:xfrm>
-          <a:prstGeom prst="rect">
-            <a:avLst/>
-          </a:prstGeom>
-          <a:noFill/>
-          <a:ln/>
-        </p:spPr>
-        <p:txBody>
-          <a:bodyPr wrap="square" rtlCol="0" anchor="ctr"/>
-          <a:lstStyle/>
-          <a:p>
-            <a:pPr algn="r" indent="0" marL="0">
-              <a:buNone/>
-            </a:pPr>
-            <a:r>
-              <a:rPr lang="en-US" sz="1000" dirty="0">
-                <a:solidFill>
-                  <a:srgbClr val="FFFFFF"/>
-                </a:solidFill>
-                <a:latin typeface="Calibri" pitchFamily="34" charset="0"/>
-                <a:ea typeface="Calibri" pitchFamily="34" charset="-122"/>
-                <a:cs typeface="Calibri" pitchFamily="34" charset="-120"/>
-              </a:rPr>
-              <a:t>Revision Summary</a:t>
-            </a:r>
-            <a:endParaRPr lang="en-US" sz="1000" dirty="0"/>
+              <a:t>Record and Review Participation</a:t>
+            </a:r>
+            <a:endParaRPr lang="en-US" sz="3200" dirty="0"/>
+          </a:p>
+        </p:txBody>
+      </p:sp>
+      <p:sp>
+        <p:nvSpPr>
+          <p:cNvPr id="6" name="Text 4"/>
+          <p:cNvSpPr/>
+          <p:nvPr/>
+        </p:nvSpPr>
+        <p:spPr>
+          <a:xfrm>
+            <a:off x="3840480" y="3977640"/>
+            <a:ext cx="7589520" cy="457200"/>
+          </a:xfrm>
+          <a:prstGeom prst="rect">
+            <a:avLst/>
+          </a:prstGeom>
+          <a:noFill/>
+          <a:ln/>
+        </p:spPr>
+        <p:txBody>
+          <a:bodyPr wrap="square" rtlCol="0" anchor="ctr"/>
+          <a:lstStyle/>
+          <a:p>
+            <a:pPr indent="0" marL="0">
+              <a:buNone/>
+            </a:pPr>
+            <a:r>
+              <a:rPr lang="en-US" sz="1400" dirty="0">
+                <a:solidFill>
+                  <a:srgbClr val="9FB3D9"/>
+                </a:solidFill>
+                <a:latin typeface="Calibri" pitchFamily="34" charset="0"/>
+                <a:ea typeface="Calibri" pitchFamily="34" charset="-122"/>
+                <a:cs typeface="Calibri" pitchFamily="34" charset="-120"/>
+              </a:rPr>
+              <a:t>Covers: B.P2  ·  B.M2  ·  B.D2  ·  B.P3  ·  B.M3  ·  B.D3</a:t>
+            </a:r>
+            <a:endParaRPr lang="en-US" sz="1400" dirty="0"/>
           </a:p>
         </p:txBody>
       </p:sp>
